--- a/docs/example7_walkthrough.pptx
+++ b/docs/example7_walkthrough.pptx
@@ -7,6 +7,9 @@
   <p:sldIdLst>
     <p:sldId id="256" r:id="rId7"/>
     <p:sldId id="257" r:id="rId8"/>
+    <p:sldId id="258" r:id="rId9"/>
+    <p:sldId id="259" r:id="rId10"/>
+    <p:sldId id="260" r:id="rId11"/>
   </p:sldIdLst>
   <p:sldSz cx="9144000" cy="6858000" type="screen4x3"/>
   <p:notesSz cx="6858000" cy="9144000"/>
@@ -3242,7 +3245,7 @@
                 </a:solidFill>
                 <a:latin typeface="Aptos"/>
               </a:rPr>
-              <a:t>We want to add a new method </a:t>
+              <a:t>Treat 15 integer-like types uniformly: </a:t>
             </a:r>
             <a:r>
               <a:rPr sz="1600">
@@ -3251,7 +3254,7 @@
                 </a:solidFill>
                 <a:latin typeface="Consolas"/>
               </a:rPr>
-              <a:t>is_odd()</a:t>
+              <a:t>u8</a:t>
             </a:r>
             <a:r>
               <a:rPr sz="1600">
@@ -3260,7 +3263,7 @@
                 </a:solidFill>
                 <a:latin typeface="Aptos"/>
               </a:rPr>
-              <a:t> to an existing concrete type </a:t>
+              <a:t>, ..., </a:t>
             </a:r>
             <a:r>
               <a:rPr sz="1600">
@@ -3278,7 +3281,115 @@
                 </a:solidFill>
                 <a:latin typeface="Aptos"/>
               </a:rPr>
-              <a:t>, even though we do not own that type.</a:t>
+              <a:t>, ...</a:t>
+            </a:r>
+            <a:r>
+              <a:rPr sz="1600">
+                <a:solidFill>
+                  <a:srgbClr val="FFFFFF"/>
+                </a:solidFill>
+                <a:latin typeface="Consolas"/>
+              </a:rPr>
+              <a:t>i128</a:t>
+            </a:r>
+            <a:r>
+              <a:rPr sz="1600">
+                <a:solidFill>
+                  <a:srgbClr val="E6E6E6"/>
+                </a:solidFill>
+                <a:latin typeface="Aptos"/>
+              </a:rPr>
+              <a:t>, </a:t>
+            </a:r>
+            <a:r>
+              <a:rPr sz="1600">
+                <a:solidFill>
+                  <a:srgbClr val="FFFFFF"/>
+                </a:solidFill>
+                <a:latin typeface="Consolas"/>
+              </a:rPr>
+              <a:t>char</a:t>
+            </a:r>
+            <a:r>
+              <a:rPr sz="1600">
+                <a:solidFill>
+                  <a:srgbClr val="E6E6E6"/>
+                </a:solidFill>
+                <a:latin typeface="Aptos"/>
+              </a:rPr>
+              <a:t>, </a:t>
+            </a:r>
+            <a:r>
+              <a:rPr sz="1600">
+                <a:solidFill>
+                  <a:srgbClr val="FFFFFF"/>
+                </a:solidFill>
+                <a:latin typeface="Consolas"/>
+              </a:rPr>
+              <a:t>IPv4</a:t>
+            </a:r>
+            <a:r>
+              <a:rPr sz="1600">
+                <a:solidFill>
+                  <a:srgbClr val="E6E6E6"/>
+                </a:solidFill>
+                <a:latin typeface="Aptos"/>
+              </a:rPr>
+              <a:t>, </a:t>
+            </a:r>
+            <a:r>
+              <a:rPr sz="1600">
+                <a:solidFill>
+                  <a:srgbClr val="FFFFFF"/>
+                </a:solidFill>
+                <a:latin typeface="Consolas"/>
+              </a:rPr>
+              <a:t>IPv6</a:t>
+            </a:r>
+            <a:r>
+              <a:rPr sz="1600">
+                <a:solidFill>
+                  <a:srgbClr val="E6E6E6"/>
+                </a:solidFill>
+                <a:latin typeface="Aptos"/>
+              </a:rPr>
+              <a:t> For example, with a </a:t>
+            </a:r>
+            <a:r>
+              <a:rPr sz="1600">
+                <a:solidFill>
+                  <a:srgbClr val="FFFFFF"/>
+                </a:solidFill>
+                <a:latin typeface="Consolas"/>
+              </a:rPr>
+              <a:t>min</a:t>
+            </a:r>
+            <a:r>
+              <a:rPr sz="1600">
+                <a:solidFill>
+                  <a:srgbClr val="E6E6E6"/>
+                </a:solidFill>
+                <a:latin typeface="Aptos"/>
+              </a:rPr>
+              <a:t>, </a:t>
+            </a:r>
+            <a:r>
+              <a:rPr sz="1600">
+                <a:solidFill>
+                  <a:srgbClr val="FFFFFF"/>
+                </a:solidFill>
+                <a:latin typeface="Consolas"/>
+              </a:rPr>
+              <a:t>max</a:t>
+            </a:r>
+            <a:r>
+              <a:rPr sz="1600">
+                <a:solidFill>
+                  <a:srgbClr val="E6E6E6"/>
+                </a:solidFill>
+                <a:latin typeface="Aptos"/>
+              </a:rPr>
+              <a:t>, and ability to add one (unchecked).</a:t>
             </a:r>
           </a:p>
         </p:txBody>
@@ -3299,8 +3410,8 @@
         </p:blipFill>
         <p:spPr>
           <a:xfrm>
-            <a:off x="1889291" y="1691640"/>
-            <a:ext cx="3765217" cy="4846320"/>
+            <a:off x="274319" y="1691640"/>
+            <a:ext cx="6995160" cy="4559345"/>
           </a:xfrm>
           <a:prstGeom prst="rect">
             <a:avLst/>
@@ -3408,34 +3519,61 @@
                 </a:solidFill>
                 <a:latin typeface="Consolas"/>
               </a:rPr>
-              <a:t>trait</a:t>
-            </a:r>
-            <a:r>
-              <a:rPr sz="1600">
-                <a:solidFill>
-                  <a:srgbClr val="EEFFFF"/>
-                </a:solidFill>
-                <a:latin typeface="Consolas"/>
-              </a:rPr>
-              <a:t> </a:t>
-            </a:r>
-            <a:r>
-              <a:rPr sz="1600">
-                <a:solidFill>
-                  <a:srgbClr val="EEFFFF"/>
-                </a:solidFill>
-                <a:latin typeface="Consolas"/>
-              </a:rPr>
-              <a:t>UsizeExtensions</a:t>
-            </a:r>
-            <a:r>
-              <a:rPr sz="1600">
-                <a:solidFill>
-                  <a:srgbClr val="EEFFFF"/>
-                </a:solidFill>
-                <a:latin typeface="Consolas"/>
-              </a:rPr>
-              <a:t> </a:t>
+              <a:t>use</a:t>
+            </a:r>
+            <a:r>
+              <a:rPr sz="1600">
+                <a:solidFill>
+                  <a:srgbClr val="EEFFFF"/>
+                </a:solidFill>
+                <a:latin typeface="Consolas"/>
+              </a:rPr>
+              <a:t> </a:t>
+            </a:r>
+            <a:r>
+              <a:rPr sz="1600">
+                <a:solidFill>
+                  <a:srgbClr val="EEFFFF"/>
+                </a:solidFill>
+                <a:latin typeface="Consolas"/>
+              </a:rPr>
+              <a:t>std</a:t>
+            </a:r>
+            <a:r>
+              <a:rPr sz="1600">
+                <a:solidFill>
+                  <a:srgbClr val="BAC2DE"/>
+                </a:solidFill>
+                <a:latin typeface="Consolas"/>
+              </a:rPr>
+              <a:t>::</a:t>
+            </a:r>
+            <a:r>
+              <a:rPr sz="1600">
+                <a:solidFill>
+                  <a:srgbClr val="EEFFFF"/>
+                </a:solidFill>
+                <a:latin typeface="Consolas"/>
+              </a:rPr>
+              <a:t>net</a:t>
+            </a:r>
+            <a:r>
+              <a:rPr sz="1600">
+                <a:solidFill>
+                  <a:srgbClr val="BAC2DE"/>
+                </a:solidFill>
+                <a:latin typeface="Consolas"/>
+              </a:rPr>
+              <a:t>:</a:t>
+            </a:r>
+            <a:r>
+              <a:rPr sz="1600">
+                <a:solidFill>
+                  <a:srgbClr val="BAC2DE"/>
+                </a:solidFill>
+                <a:latin typeface="Consolas"/>
+              </a:rPr>
+              <a:t>:</a:t>
             </a:r>
             <a:r>
               <a:rPr sz="1600">
@@ -3445,6 +3583,60 @@
                 <a:latin typeface="Consolas"/>
               </a:rPr>
               <a:t>{</a:t>
+            </a:r>
+            <a:r>
+              <a:rPr sz="1600">
+                <a:solidFill>
+                  <a:srgbClr val="EEFFFF"/>
+                </a:solidFill>
+                <a:latin typeface="Consolas"/>
+              </a:rPr>
+              <a:t>Ipv4Addr</a:t>
+            </a:r>
+            <a:r>
+              <a:rPr sz="1600">
+                <a:solidFill>
+                  <a:srgbClr val="BAC2DE"/>
+                </a:solidFill>
+                <a:latin typeface="Consolas"/>
+              </a:rPr>
+              <a:t>,</a:t>
+            </a:r>
+            <a:r>
+              <a:rPr sz="1600">
+                <a:solidFill>
+                  <a:srgbClr val="EEFFFF"/>
+                </a:solidFill>
+                <a:latin typeface="Consolas"/>
+              </a:rPr>
+              <a:t> </a:t>
+            </a:r>
+            <a:r>
+              <a:rPr sz="1600">
+                <a:solidFill>
+                  <a:srgbClr val="EEFFFF"/>
+                </a:solidFill>
+                <a:latin typeface="Consolas"/>
+              </a:rPr>
+              <a:t>Ipv6Addr</a:t>
+            </a:r>
+            <a:r>
+              <a:rPr sz="1600">
+                <a:solidFill>
+                  <a:srgbClr val="BAC2DE"/>
+                </a:solidFill>
+                <a:latin typeface="Consolas"/>
+              </a:rPr>
+              <a:t>}</a:t>
+            </a:r>
+            <a:r>
+              <a:rPr sz="1600">
+                <a:solidFill>
+                  <a:srgbClr val="BAC2DE"/>
+                </a:solidFill>
+                <a:latin typeface="Consolas"/>
+              </a:rPr>
+              <a:t>;</a:t>
             </a:r>
           </a:p>
           <a:p>
@@ -3459,114 +3651,6 @@
                 <a:spcPts val="0"/>
               </a:spcAft>
             </a:pPr>
-            <a:r>
-              <a:rPr sz="1600">
-                <a:solidFill>
-                  <a:srgbClr val="EEFFFF"/>
-                </a:solidFill>
-                <a:latin typeface="Consolas"/>
-              </a:rPr>
-              <a:t>    </a:t>
-            </a:r>
-            <a:r>
-              <a:rPr sz="1600">
-                <a:solidFill>
-                  <a:srgbClr val="C792EA"/>
-                </a:solidFill>
-                <a:latin typeface="Consolas"/>
-              </a:rPr>
-              <a:t>fn</a:t>
-            </a:r>
-            <a:r>
-              <a:rPr sz="1600">
-                <a:solidFill>
-                  <a:srgbClr val="EEFFFF"/>
-                </a:solidFill>
-                <a:latin typeface="Consolas"/>
-              </a:rPr>
-              <a:t> </a:t>
-            </a:r>
-            <a:r>
-              <a:rPr sz="1600">
-                <a:solidFill>
-                  <a:srgbClr val="82AAFF"/>
-                </a:solidFill>
-                <a:latin typeface="Consolas"/>
-              </a:rPr>
-              <a:t>is_odd</a:t>
-            </a:r>
-            <a:r>
-              <a:rPr sz="1600">
-                <a:solidFill>
-                  <a:srgbClr val="BAC2DE"/>
-                </a:solidFill>
-                <a:latin typeface="Consolas"/>
-              </a:rPr>
-              <a:t>(</a:t>
-            </a:r>
-            <a:r>
-              <a:rPr sz="1600">
-                <a:solidFill>
-                  <a:srgbClr val="89DDFF"/>
-                </a:solidFill>
-                <a:latin typeface="Consolas"/>
-              </a:rPr>
-              <a:t>self</a:t>
-            </a:r>
-            <a:r>
-              <a:rPr sz="1600">
-                <a:solidFill>
-                  <a:srgbClr val="BAC2DE"/>
-                </a:solidFill>
-                <a:latin typeface="Consolas"/>
-              </a:rPr>
-              <a:t>)</a:t>
-            </a:r>
-            <a:r>
-              <a:rPr sz="1600">
-                <a:solidFill>
-                  <a:srgbClr val="EEFFFF"/>
-                </a:solidFill>
-                <a:latin typeface="Consolas"/>
-              </a:rPr>
-              <a:t> </a:t>
-            </a:r>
-            <a:r>
-              <a:rPr sz="1600">
-                <a:solidFill>
-                  <a:srgbClr val="EEFFFF"/>
-                </a:solidFill>
-                <a:latin typeface="Consolas"/>
-              </a:rPr>
-              <a:t>-&gt;</a:t>
-            </a:r>
-            <a:r>
-              <a:rPr sz="1600">
-                <a:solidFill>
-                  <a:srgbClr val="EEFFFF"/>
-                </a:solidFill>
-                <a:latin typeface="Consolas"/>
-              </a:rPr>
-              <a:t> </a:t>
-            </a:r>
-            <a:r>
-              <a:rPr sz="1600">
-                <a:solidFill>
-                  <a:srgbClr val="C792EA"/>
-                </a:solidFill>
-                <a:latin typeface="Consolas"/>
-              </a:rPr>
-              <a:t>bool</a:t>
-            </a:r>
-            <a:r>
-              <a:rPr sz="1600">
-                <a:solidFill>
-                  <a:srgbClr val="BAC2DE"/>
-                </a:solidFill>
-                <a:latin typeface="Consolas"/>
-              </a:rPr>
-              <a:t>;</a:t>
-            </a:r>
           </a:p>
           <a:p>
             <a:pPr>
@@ -3583,11 +3667,110 @@
             <a:r>
               <a:rPr sz="1600">
                 <a:solidFill>
-                  <a:srgbClr val="BAC2DE"/>
-                </a:solidFill>
-                <a:latin typeface="Consolas"/>
-              </a:rPr>
-              <a:t>}</a:t>
+                  <a:srgbClr val="C792EA"/>
+                </a:solidFill>
+                <a:latin typeface="Consolas"/>
+              </a:rPr>
+              <a:t>trait</a:t>
+            </a:r>
+            <a:r>
+              <a:rPr sz="1600">
+                <a:solidFill>
+                  <a:srgbClr val="EEFFFF"/>
+                </a:solidFill>
+                <a:latin typeface="Consolas"/>
+              </a:rPr>
+              <a:t> </a:t>
+            </a:r>
+            <a:r>
+              <a:rPr sz="1600">
+                <a:solidFill>
+                  <a:srgbClr val="EEFFFF"/>
+                </a:solidFill>
+                <a:latin typeface="Consolas"/>
+              </a:rPr>
+              <a:t>Integer</a:t>
+            </a:r>
+            <a:r>
+              <a:rPr sz="1600">
+                <a:solidFill>
+                  <a:srgbClr val="BAC2DE"/>
+                </a:solidFill>
+                <a:latin typeface="Consolas"/>
+              </a:rPr>
+              <a:t>:</a:t>
+            </a:r>
+            <a:r>
+              <a:rPr sz="1600">
+                <a:solidFill>
+                  <a:srgbClr val="EEFFFF"/>
+                </a:solidFill>
+                <a:latin typeface="Consolas"/>
+              </a:rPr>
+              <a:t> </a:t>
+            </a:r>
+            <a:r>
+              <a:rPr sz="1600">
+                <a:solidFill>
+                  <a:srgbClr val="89DDFF"/>
+                </a:solidFill>
+                <a:latin typeface="Consolas"/>
+              </a:rPr>
+              <a:t>Copy</a:t>
+            </a:r>
+            <a:r>
+              <a:rPr sz="1600">
+                <a:solidFill>
+                  <a:srgbClr val="EEFFFF"/>
+                </a:solidFill>
+                <a:latin typeface="Consolas"/>
+              </a:rPr>
+              <a:t> </a:t>
+            </a:r>
+            <a:r>
+              <a:rPr sz="1600">
+                <a:solidFill>
+                  <a:srgbClr val="89DDFF"/>
+                </a:solidFill>
+                <a:latin typeface="Consolas"/>
+              </a:rPr>
+              <a:t>+</a:t>
+            </a:r>
+            <a:r>
+              <a:rPr sz="1600">
+                <a:solidFill>
+                  <a:srgbClr val="EEFFFF"/>
+                </a:solidFill>
+                <a:latin typeface="Consolas"/>
+              </a:rPr>
+              <a:t> </a:t>
+            </a:r>
+            <a:r>
+              <a:rPr sz="1600">
+                <a:solidFill>
+                  <a:srgbClr val="89DDFF"/>
+                </a:solidFill>
+                <a:latin typeface="Consolas"/>
+              </a:rPr>
+              <a:t>Ord</a:t>
+            </a:r>
+            <a:r>
+              <a:rPr sz="1600">
+                <a:solidFill>
+                  <a:srgbClr val="EEFFFF"/>
+                </a:solidFill>
+                <a:latin typeface="Consolas"/>
+              </a:rPr>
+              <a:t> </a:t>
+            </a:r>
+            <a:r>
+              <a:rPr sz="1600">
+                <a:solidFill>
+                  <a:srgbClr val="BAC2DE"/>
+                </a:solidFill>
+                <a:latin typeface="Consolas"/>
+              </a:rPr>
+              <a:t>{</a:t>
             </a:r>
           </a:p>
           <a:p>
@@ -3602,6 +3785,114 @@
                 <a:spcPts val="0"/>
               </a:spcAft>
             </a:pPr>
+            <a:r>
+              <a:rPr sz="1600">
+                <a:solidFill>
+                  <a:srgbClr val="EEFFFF"/>
+                </a:solidFill>
+                <a:latin typeface="Consolas"/>
+              </a:rPr>
+              <a:t>    </a:t>
+            </a:r>
+            <a:r>
+              <a:rPr sz="1600">
+                <a:solidFill>
+                  <a:srgbClr val="C792EA"/>
+                </a:solidFill>
+                <a:latin typeface="Consolas"/>
+              </a:rPr>
+              <a:t>fn</a:t>
+            </a:r>
+            <a:r>
+              <a:rPr sz="1600">
+                <a:solidFill>
+                  <a:srgbClr val="EEFFFF"/>
+                </a:solidFill>
+                <a:latin typeface="Consolas"/>
+              </a:rPr>
+              <a:t> </a:t>
+            </a:r>
+            <a:r>
+              <a:rPr sz="1600">
+                <a:solidFill>
+                  <a:srgbClr val="82AAFF"/>
+                </a:solidFill>
+                <a:latin typeface="Consolas"/>
+              </a:rPr>
+              <a:t>add_one</a:t>
+            </a:r>
+            <a:r>
+              <a:rPr sz="1600">
+                <a:solidFill>
+                  <a:srgbClr val="BAC2DE"/>
+                </a:solidFill>
+                <a:latin typeface="Consolas"/>
+              </a:rPr>
+              <a:t>(</a:t>
+            </a:r>
+            <a:r>
+              <a:rPr sz="1600">
+                <a:solidFill>
+                  <a:srgbClr val="89DDFF"/>
+                </a:solidFill>
+                <a:latin typeface="Consolas"/>
+              </a:rPr>
+              <a:t>self</a:t>
+            </a:r>
+            <a:r>
+              <a:rPr sz="1600">
+                <a:solidFill>
+                  <a:srgbClr val="BAC2DE"/>
+                </a:solidFill>
+                <a:latin typeface="Consolas"/>
+              </a:rPr>
+              <a:t>)</a:t>
+            </a:r>
+            <a:r>
+              <a:rPr sz="1600">
+                <a:solidFill>
+                  <a:srgbClr val="EEFFFF"/>
+                </a:solidFill>
+                <a:latin typeface="Consolas"/>
+              </a:rPr>
+              <a:t> </a:t>
+            </a:r>
+            <a:r>
+              <a:rPr sz="1600">
+                <a:solidFill>
+                  <a:srgbClr val="BAC2DE"/>
+                </a:solidFill>
+                <a:latin typeface="Consolas"/>
+              </a:rPr>
+              <a:t>-&gt;</a:t>
+            </a:r>
+            <a:r>
+              <a:rPr sz="1600">
+                <a:solidFill>
+                  <a:srgbClr val="EEFFFF"/>
+                </a:solidFill>
+                <a:latin typeface="Consolas"/>
+              </a:rPr>
+              <a:t> </a:t>
+            </a:r>
+            <a:r>
+              <a:rPr sz="1600">
+                <a:solidFill>
+                  <a:srgbClr val="FFCB6B"/>
+                </a:solidFill>
+                <a:latin typeface="Consolas"/>
+              </a:rPr>
+              <a:t>Self</a:t>
+            </a:r>
+            <a:r>
+              <a:rPr sz="1600">
+                <a:solidFill>
+                  <a:srgbClr val="BAC2DE"/>
+                </a:solidFill>
+                <a:latin typeface="Consolas"/>
+              </a:rPr>
+              <a:t>;</a:t>
+            </a:r>
           </a:p>
           <a:p>
             <a:pPr>
@@ -3618,83 +3909,101 @@
             <a:r>
               <a:rPr sz="1600">
                 <a:solidFill>
+                  <a:srgbClr val="EEFFFF"/>
+                </a:solidFill>
+                <a:latin typeface="Consolas"/>
+              </a:rPr>
+              <a:t>    </a:t>
+            </a:r>
+            <a:r>
+              <a:rPr sz="1600">
+                <a:solidFill>
                   <a:srgbClr val="C792EA"/>
                 </a:solidFill>
                 <a:latin typeface="Consolas"/>
               </a:rPr>
-              <a:t>impl</a:t>
-            </a:r>
-            <a:r>
-              <a:rPr sz="1600">
-                <a:solidFill>
-                  <a:srgbClr val="EEFFFF"/>
-                </a:solidFill>
-                <a:latin typeface="Consolas"/>
-              </a:rPr>
-              <a:t> </a:t>
-            </a:r>
-            <a:r>
-              <a:rPr sz="1600">
-                <a:solidFill>
-                  <a:srgbClr val="EEFFFF"/>
-                </a:solidFill>
-                <a:latin typeface="Consolas"/>
-              </a:rPr>
-              <a:t>UsizeExtensions</a:t>
-            </a:r>
-            <a:r>
-              <a:rPr sz="1600">
-                <a:solidFill>
-                  <a:srgbClr val="EEFFFF"/>
-                </a:solidFill>
-                <a:latin typeface="Consolas"/>
-              </a:rPr>
-              <a:t> </a:t>
-            </a:r>
-            <a:r>
-              <a:rPr sz="1600">
-                <a:solidFill>
-                  <a:srgbClr val="C792EA"/>
-                </a:solidFill>
-                <a:latin typeface="Consolas"/>
-              </a:rPr>
-              <a:t>for</a:t>
-            </a:r>
-            <a:r>
-              <a:rPr sz="1600">
-                <a:solidFill>
-                  <a:srgbClr val="EEFFFF"/>
-                </a:solidFill>
-                <a:latin typeface="Consolas"/>
-              </a:rPr>
-              <a:t> </a:t>
-            </a:r>
-            <a:r>
-              <a:rPr sz="1600">
-                <a:solidFill>
-                  <a:srgbClr val="C792EA"/>
-                </a:solidFill>
-                <a:latin typeface="Consolas"/>
-              </a:rPr>
-              <a:t>usize</a:t>
-            </a:r>
-            <a:r>
-              <a:rPr sz="1600">
-                <a:solidFill>
-                  <a:srgbClr val="EEFFFF"/>
-                </a:solidFill>
-                <a:latin typeface="Consolas"/>
-              </a:rPr>
-              <a:t> </a:t>
-            </a:r>
-            <a:r>
-              <a:rPr sz="1600">
-                <a:solidFill>
-                  <a:srgbClr val="BAC2DE"/>
-                </a:solidFill>
-                <a:latin typeface="Consolas"/>
-              </a:rPr>
-              <a:t>{</a:t>
+              <a:t>fn</a:t>
+            </a:r>
+            <a:r>
+              <a:rPr sz="1600">
+                <a:solidFill>
+                  <a:srgbClr val="EEFFFF"/>
+                </a:solidFill>
+                <a:latin typeface="Consolas"/>
+              </a:rPr>
+              <a:t> </a:t>
+            </a:r>
+            <a:r>
+              <a:rPr sz="1600">
+                <a:solidFill>
+                  <a:srgbClr val="82AAFF"/>
+                </a:solidFill>
+                <a:latin typeface="Consolas"/>
+              </a:rPr>
+              <a:t>min_value</a:t>
+            </a:r>
+            <a:r>
+              <a:rPr sz="1600">
+                <a:solidFill>
+                  <a:srgbClr val="BAC2DE"/>
+                </a:solidFill>
+                <a:latin typeface="Consolas"/>
+              </a:rPr>
+              <a:t>(</a:t>
+            </a:r>
+            <a:r>
+              <a:rPr sz="1600">
+                <a:solidFill>
+                  <a:srgbClr val="BAC2DE"/>
+                </a:solidFill>
+                <a:latin typeface="Consolas"/>
+              </a:rPr>
+              <a:t>)</a:t>
+            </a:r>
+            <a:r>
+              <a:rPr sz="1600">
+                <a:solidFill>
+                  <a:srgbClr val="EEFFFF"/>
+                </a:solidFill>
+                <a:latin typeface="Consolas"/>
+              </a:rPr>
+              <a:t> </a:t>
+            </a:r>
+            <a:r>
+              <a:rPr sz="1600">
+                <a:solidFill>
+                  <a:srgbClr val="BAC2DE"/>
+                </a:solidFill>
+                <a:latin typeface="Consolas"/>
+              </a:rPr>
+              <a:t>-&gt;</a:t>
+            </a:r>
+            <a:r>
+              <a:rPr sz="1600">
+                <a:solidFill>
+                  <a:srgbClr val="EEFFFF"/>
+                </a:solidFill>
+                <a:latin typeface="Consolas"/>
+              </a:rPr>
+              <a:t> </a:t>
+            </a:r>
+            <a:r>
+              <a:rPr sz="1600">
+                <a:solidFill>
+                  <a:srgbClr val="FFCB6B"/>
+                </a:solidFill>
+                <a:latin typeface="Consolas"/>
+              </a:rPr>
+              <a:t>Self</a:t>
+            </a:r>
+            <a:r>
+              <a:rPr sz="1600">
+                <a:solidFill>
+                  <a:srgbClr val="BAC2DE"/>
+                </a:solidFill>
+                <a:latin typeface="Consolas"/>
+              </a:rPr>
+              <a:t>;</a:t>
             </a:r>
           </a:p>
           <a:p>
@@ -3743,7 +4052,7 @@
                 </a:solidFill>
                 <a:latin typeface="Consolas"/>
               </a:rPr>
-              <a:t>is_odd</a:t>
+              <a:t>max_value</a:t>
             </a:r>
             <a:r>
               <a:rPr sz="1600">
@@ -3757,15 +4066,6 @@
             <a:r>
               <a:rPr sz="1600">
                 <a:solidFill>
-                  <a:srgbClr val="89DDFF"/>
-                </a:solidFill>
-                <a:latin typeface="Consolas"/>
-              </a:rPr>
-              <a:t>self</a:t>
-            </a:r>
-            <a:r>
-              <a:rPr sz="1600">
-                <a:solidFill>
                   <a:srgbClr val="BAC2DE"/>
                 </a:solidFill>
                 <a:latin typeface="Consolas"/>
@@ -3784,7 +4084,7 @@
             <a:r>
               <a:rPr sz="1600">
                 <a:solidFill>
-                  <a:srgbClr val="EEFFFF"/>
+                  <a:srgbClr val="BAC2DE"/>
                 </a:solidFill>
                 <a:latin typeface="Consolas"/>
               </a:rPr>
@@ -3802,29 +4102,20 @@
             <a:r>
               <a:rPr sz="1600">
                 <a:solidFill>
-                  <a:srgbClr val="C792EA"/>
-                </a:solidFill>
-                <a:latin typeface="Consolas"/>
-              </a:rPr>
-              <a:t>bool</a:t>
-            </a:r>
-            <a:r>
-              <a:rPr sz="1600">
-                <a:solidFill>
-                  <a:srgbClr val="EEFFFF"/>
-                </a:solidFill>
-                <a:latin typeface="Consolas"/>
-              </a:rPr>
-              <a:t> </a:t>
-            </a:r>
-            <a:r>
-              <a:rPr sz="1600">
-                <a:solidFill>
-                  <a:srgbClr val="BAC2DE"/>
-                </a:solidFill>
-                <a:latin typeface="Consolas"/>
-              </a:rPr>
-              <a:t>{</a:t>
+                  <a:srgbClr val="FFCB6B"/>
+                </a:solidFill>
+                <a:latin typeface="Consolas"/>
+              </a:rPr>
+              <a:t>Self</a:t>
+            </a:r>
+            <a:r>
+              <a:rPr sz="1600">
+                <a:solidFill>
+                  <a:srgbClr val="BAC2DE"/>
+                </a:solidFill>
+                <a:latin typeface="Consolas"/>
+              </a:rPr>
+              <a:t>;</a:t>
             </a:r>
           </a:p>
           <a:p>
@@ -3842,101 +4133,11 @@
             <a:r>
               <a:rPr sz="1600">
                 <a:solidFill>
-                  <a:srgbClr val="EEFFFF"/>
-                </a:solidFill>
-                <a:latin typeface="Consolas"/>
-              </a:rPr>
-              <a:t>        </a:t>
-            </a:r>
-            <a:r>
-              <a:rPr sz="1600">
-                <a:solidFill>
-                  <a:srgbClr val="89DDFF"/>
-                </a:solidFill>
-                <a:latin typeface="Consolas"/>
-              </a:rPr>
-              <a:t>self</a:t>
-            </a:r>
-            <a:r>
-              <a:rPr sz="1600">
-                <a:solidFill>
-                  <a:srgbClr val="EEFFFF"/>
-                </a:solidFill>
-                <a:latin typeface="Consolas"/>
-              </a:rPr>
-              <a:t> </a:t>
-            </a:r>
-            <a:r>
-              <a:rPr sz="1600">
-                <a:solidFill>
-                  <a:srgbClr val="89DDFF"/>
-                </a:solidFill>
-                <a:latin typeface="Consolas"/>
-              </a:rPr>
-              <a:t>&amp;</a:t>
-            </a:r>
-            <a:r>
-              <a:rPr sz="1600">
-                <a:solidFill>
-                  <a:srgbClr val="EEFFFF"/>
-                </a:solidFill>
-                <a:latin typeface="Consolas"/>
-              </a:rPr>
-              <a:t> </a:t>
-            </a:r>
-            <a:r>
-              <a:rPr sz="1600">
-                <a:solidFill>
-                  <a:srgbClr val="F78C6C"/>
-                </a:solidFill>
-                <a:latin typeface="Consolas"/>
-              </a:rPr>
-              <a:t>1</a:t>
-            </a:r>
-            <a:r>
-              <a:rPr sz="1600">
-                <a:solidFill>
-                  <a:srgbClr val="EEFFFF"/>
-                </a:solidFill>
-                <a:latin typeface="Consolas"/>
-              </a:rPr>
-              <a:t> </a:t>
-            </a:r>
-            <a:r>
-              <a:rPr sz="1600">
-                <a:solidFill>
-                  <a:srgbClr val="89DDFF"/>
-                </a:solidFill>
-                <a:latin typeface="Consolas"/>
-              </a:rPr>
-              <a:t>!</a:t>
-            </a:r>
-            <a:r>
-              <a:rPr sz="1600">
-                <a:solidFill>
-                  <a:srgbClr val="89DDFF"/>
-                </a:solidFill>
-                <a:latin typeface="Consolas"/>
-              </a:rPr>
-              <a:t>=</a:t>
-            </a:r>
-            <a:r>
-              <a:rPr sz="1600">
-                <a:solidFill>
-                  <a:srgbClr val="EEFFFF"/>
-                </a:solidFill>
-                <a:latin typeface="Consolas"/>
-              </a:rPr>
-              <a:t> </a:t>
-            </a:r>
-            <a:r>
-              <a:rPr sz="1600">
-                <a:solidFill>
-                  <a:srgbClr val="F78C6C"/>
-                </a:solidFill>
-                <a:latin typeface="Consolas"/>
-              </a:rPr>
-              <a:t>0</a:t>
+                  <a:srgbClr val="BAC2DE"/>
+                </a:solidFill>
+                <a:latin typeface="Consolas"/>
+              </a:rPr>
+              <a:t>}</a:t>
             </a:r>
           </a:p>
           <a:p>
@@ -3951,24 +4152,6 @@
                 <a:spcPts val="0"/>
               </a:spcAft>
             </a:pPr>
-            <a:r>
-              <a:rPr sz="1600">
-                <a:solidFill>
-                  <a:srgbClr val="EEFFFF"/>
-                </a:solidFill>
-                <a:latin typeface="Consolas"/>
-              </a:rPr>
-              <a:t>    </a:t>
-            </a:r>
-            <a:r>
-              <a:rPr sz="1600">
-                <a:solidFill>
-                  <a:srgbClr val="BAC2DE"/>
-                </a:solidFill>
-                <a:latin typeface="Consolas"/>
-              </a:rPr>
-              <a:t>}</a:t>
-            </a:r>
           </a:p>
           <a:p>
             <a:pPr>
@@ -3985,11 +4168,47 @@
             <a:r>
               <a:rPr sz="1600">
                 <a:solidFill>
-                  <a:srgbClr val="BAC2DE"/>
-                </a:solidFill>
-                <a:latin typeface="Consolas"/>
-              </a:rPr>
-              <a:t>}</a:t>
+                  <a:srgbClr val="82AAFF"/>
+                </a:solidFill>
+                <a:latin typeface="Consolas"/>
+              </a:rPr>
+              <a:t>macro_rules!</a:t>
+            </a:r>
+            <a:r>
+              <a:rPr sz="1600">
+                <a:solidFill>
+                  <a:srgbClr val="EEFFFF"/>
+                </a:solidFill>
+                <a:latin typeface="Consolas"/>
+              </a:rPr>
+              <a:t> </a:t>
+            </a:r>
+            <a:r>
+              <a:rPr sz="1600">
+                <a:solidFill>
+                  <a:srgbClr val="EEFFFF"/>
+                </a:solidFill>
+                <a:latin typeface="Consolas"/>
+              </a:rPr>
+              <a:t>impl_integer_ops_num</a:t>
+            </a:r>
+            <a:r>
+              <a:rPr sz="1600">
+                <a:solidFill>
+                  <a:srgbClr val="EEFFFF"/>
+                </a:solidFill>
+                <a:latin typeface="Consolas"/>
+              </a:rPr>
+              <a:t> </a:t>
+            </a:r>
+            <a:r>
+              <a:rPr sz="1600">
+                <a:solidFill>
+                  <a:srgbClr val="BAC2DE"/>
+                </a:solidFill>
+                <a:latin typeface="Consolas"/>
+              </a:rPr>
+              <a:t>{</a:t>
             </a:r>
           </a:p>
           <a:p>
@@ -4004,6 +4223,105 @@
                 <a:spcPts val="0"/>
               </a:spcAft>
             </a:pPr>
+            <a:r>
+              <a:rPr sz="1600">
+                <a:solidFill>
+                  <a:srgbClr val="EEFFFF"/>
+                </a:solidFill>
+                <a:latin typeface="Consolas"/>
+              </a:rPr>
+              <a:t>    </a:t>
+            </a:r>
+            <a:r>
+              <a:rPr sz="1600">
+                <a:solidFill>
+                  <a:srgbClr val="BAC2DE"/>
+                </a:solidFill>
+                <a:latin typeface="Consolas"/>
+              </a:rPr>
+              <a:t>(</a:t>
+            </a:r>
+            <a:r>
+              <a:rPr sz="1600">
+                <a:solidFill>
+                  <a:srgbClr val="6A9955"/>
+                </a:solidFill>
+                <a:latin typeface="Consolas"/>
+              </a:rPr>
+              <a:t>$t</a:t>
+            </a:r>
+            <a:r>
+              <a:rPr sz="1600">
+                <a:solidFill>
+                  <a:srgbClr val="BAC2DE"/>
+                </a:solidFill>
+                <a:latin typeface="Consolas"/>
+              </a:rPr>
+              <a:t>:</a:t>
+            </a:r>
+            <a:r>
+              <a:rPr sz="1600">
+                <a:solidFill>
+                  <a:srgbClr val="FFCB6B"/>
+                </a:solidFill>
+                <a:latin typeface="Consolas"/>
+              </a:rPr>
+              <a:t>ty</a:t>
+            </a:r>
+            <a:r>
+              <a:rPr sz="1600">
+                <a:solidFill>
+                  <a:srgbClr val="BAC2DE"/>
+                </a:solidFill>
+                <a:latin typeface="Consolas"/>
+              </a:rPr>
+              <a:t>)</a:t>
+            </a:r>
+            <a:r>
+              <a:rPr sz="1600">
+                <a:solidFill>
+                  <a:srgbClr val="EEFFFF"/>
+                </a:solidFill>
+                <a:latin typeface="Consolas"/>
+              </a:rPr>
+              <a:t> </a:t>
+            </a:r>
+            <a:r>
+              <a:rPr sz="1600">
+                <a:solidFill>
+                  <a:srgbClr val="89DDFF"/>
+                </a:solidFill>
+                <a:latin typeface="Consolas"/>
+              </a:rPr>
+              <a:t>=</a:t>
+            </a:r>
+            <a:r>
+              <a:rPr sz="1600">
+                <a:solidFill>
+                  <a:srgbClr val="89DDFF"/>
+                </a:solidFill>
+                <a:latin typeface="Consolas"/>
+              </a:rPr>
+              <a:t>&gt;</a:t>
+            </a:r>
+            <a:r>
+              <a:rPr sz="1600">
+                <a:solidFill>
+                  <a:srgbClr val="EEFFFF"/>
+                </a:solidFill>
+                <a:latin typeface="Consolas"/>
+              </a:rPr>
+              <a:t> </a:t>
+            </a:r>
+            <a:r>
+              <a:rPr sz="1600">
+                <a:solidFill>
+                  <a:srgbClr val="BAC2DE"/>
+                </a:solidFill>
+                <a:latin typeface="Consolas"/>
+              </a:rPr>
+              <a:t>{</a:t>
+            </a:r>
           </a:p>
           <a:p>
             <a:pPr>
@@ -4020,11 +4338,119 @@
             <a:r>
               <a:rPr sz="1600">
                 <a:solidFill>
-                  <a:srgbClr val="6A9955"/>
-                </a:solidFill>
-                <a:latin typeface="Consolas"/>
-              </a:rPr>
-              <a:t>// TECHNIQUE NAME: extension traits.</a:t>
+                  <a:srgbClr val="EEFFFF"/>
+                </a:solidFill>
+                <a:latin typeface="Consolas"/>
+              </a:rPr>
+              <a:t>        </a:t>
+            </a:r>
+            <a:r>
+              <a:rPr sz="1600">
+                <a:solidFill>
+                  <a:srgbClr val="C792EA"/>
+                </a:solidFill>
+                <a:latin typeface="Consolas"/>
+              </a:rPr>
+              <a:t>fn</a:t>
+            </a:r>
+            <a:r>
+              <a:rPr sz="1600">
+                <a:solidFill>
+                  <a:srgbClr val="EEFFFF"/>
+                </a:solidFill>
+                <a:latin typeface="Consolas"/>
+              </a:rPr>
+              <a:t> </a:t>
+            </a:r>
+            <a:r>
+              <a:rPr sz="1600">
+                <a:solidFill>
+                  <a:srgbClr val="82AAFF"/>
+                </a:solidFill>
+                <a:latin typeface="Consolas"/>
+              </a:rPr>
+              <a:t>add_one</a:t>
+            </a:r>
+            <a:r>
+              <a:rPr sz="1600">
+                <a:solidFill>
+                  <a:srgbClr val="BAC2DE"/>
+                </a:solidFill>
+                <a:latin typeface="Consolas"/>
+              </a:rPr>
+              <a:t>(</a:t>
+            </a:r>
+            <a:r>
+              <a:rPr sz="1600">
+                <a:solidFill>
+                  <a:srgbClr val="89DDFF"/>
+                </a:solidFill>
+                <a:latin typeface="Consolas"/>
+              </a:rPr>
+              <a:t>self</a:t>
+            </a:r>
+            <a:r>
+              <a:rPr sz="1600">
+                <a:solidFill>
+                  <a:srgbClr val="BAC2DE"/>
+                </a:solidFill>
+                <a:latin typeface="Consolas"/>
+              </a:rPr>
+              <a:t>)</a:t>
+            </a:r>
+            <a:r>
+              <a:rPr sz="1600">
+                <a:solidFill>
+                  <a:srgbClr val="EEFFFF"/>
+                </a:solidFill>
+                <a:latin typeface="Consolas"/>
+              </a:rPr>
+              <a:t> </a:t>
+            </a:r>
+            <a:r>
+              <a:rPr sz="1600">
+                <a:solidFill>
+                  <a:srgbClr val="BAC2DE"/>
+                </a:solidFill>
+                <a:latin typeface="Consolas"/>
+              </a:rPr>
+              <a:t>-&gt;</a:t>
+            </a:r>
+            <a:r>
+              <a:rPr sz="1600">
+                <a:solidFill>
+                  <a:srgbClr val="EEFFFF"/>
+                </a:solidFill>
+                <a:latin typeface="Consolas"/>
+              </a:rPr>
+              <a:t> </a:t>
+            </a:r>
+            <a:r>
+              <a:rPr sz="1600">
+                <a:solidFill>
+                  <a:srgbClr val="FFCB6B"/>
+                </a:solidFill>
+                <a:latin typeface="Consolas"/>
+              </a:rPr>
+              <a:t>Self</a:t>
+            </a:r>
+            <a:r>
+              <a:rPr sz="1600">
+                <a:solidFill>
+                  <a:srgbClr val="EEFFFF"/>
+                </a:solidFill>
+                <a:latin typeface="Consolas"/>
+              </a:rPr>
+              <a:t> </a:t>
+            </a:r>
+            <a:r>
+              <a:rPr sz="1600">
+                <a:solidFill>
+                  <a:srgbClr val="BAC2DE"/>
+                </a:solidFill>
+                <a:latin typeface="Consolas"/>
+              </a:rPr>
+              <a:t>{</a:t>
             </a:r>
           </a:p>
           <a:p>
@@ -4039,6 +4465,60 @@
                 <a:spcPts val="0"/>
               </a:spcAft>
             </a:pPr>
+            <a:r>
+              <a:rPr sz="1600">
+                <a:solidFill>
+                  <a:srgbClr val="EEFFFF"/>
+                </a:solidFill>
+                <a:latin typeface="Consolas"/>
+              </a:rPr>
+              <a:t>            </a:t>
+            </a:r>
+            <a:r>
+              <a:rPr sz="1600">
+                <a:solidFill>
+                  <a:srgbClr val="89DDFF"/>
+                </a:solidFill>
+                <a:latin typeface="Consolas"/>
+              </a:rPr>
+              <a:t>self</a:t>
+            </a:r>
+            <a:r>
+              <a:rPr sz="1600">
+                <a:solidFill>
+                  <a:srgbClr val="EEFFFF"/>
+                </a:solidFill>
+                <a:latin typeface="Consolas"/>
+              </a:rPr>
+              <a:t> </a:t>
+            </a:r>
+            <a:r>
+              <a:rPr sz="1600">
+                <a:solidFill>
+                  <a:srgbClr val="89DDFF"/>
+                </a:solidFill>
+                <a:latin typeface="Consolas"/>
+              </a:rPr>
+              <a:t>+</a:t>
+            </a:r>
+            <a:r>
+              <a:rPr sz="1600">
+                <a:solidFill>
+                  <a:srgbClr val="EEFFFF"/>
+                </a:solidFill>
+                <a:latin typeface="Consolas"/>
+              </a:rPr>
+              <a:t> </a:t>
+            </a:r>
+            <a:r>
+              <a:rPr sz="1600">
+                <a:solidFill>
+                  <a:srgbClr val="F78C6C"/>
+                </a:solidFill>
+                <a:latin typeface="Consolas"/>
+              </a:rPr>
+              <a:t>1</a:t>
+            </a:r>
           </a:p>
           <a:p>
             <a:pPr>
@@ -4055,65 +4535,20 @@
             <a:r>
               <a:rPr sz="1600">
                 <a:solidFill>
-                  <a:srgbClr val="C792EA"/>
-                </a:solidFill>
-                <a:latin typeface="Consolas"/>
-              </a:rPr>
-              <a:t>fn</a:t>
-            </a:r>
-            <a:r>
-              <a:rPr sz="1600">
-                <a:solidFill>
-                  <a:srgbClr val="EEFFFF"/>
-                </a:solidFill>
-                <a:latin typeface="Consolas"/>
-              </a:rPr>
-              <a:t> </a:t>
-            </a:r>
-            <a:r>
-              <a:rPr sz="1600">
-                <a:solidFill>
-                  <a:srgbClr val="82AAFF"/>
-                </a:solidFill>
-                <a:latin typeface="Consolas"/>
-              </a:rPr>
-              <a:t>main</a:t>
-            </a:r>
-            <a:r>
-              <a:rPr sz="1600">
-                <a:solidFill>
-                  <a:srgbClr val="BAC2DE"/>
-                </a:solidFill>
-                <a:latin typeface="Consolas"/>
-              </a:rPr>
-              <a:t>(</a:t>
-            </a:r>
-            <a:r>
-              <a:rPr sz="1600">
-                <a:solidFill>
-                  <a:srgbClr val="BAC2DE"/>
-                </a:solidFill>
-                <a:latin typeface="Consolas"/>
-              </a:rPr>
-              <a:t>)</a:t>
-            </a:r>
-            <a:r>
-              <a:rPr sz="1600">
-                <a:solidFill>
-                  <a:srgbClr val="EEFFFF"/>
-                </a:solidFill>
-                <a:latin typeface="Consolas"/>
-              </a:rPr>
-              <a:t> </a:t>
-            </a:r>
-            <a:r>
-              <a:rPr sz="1600">
-                <a:solidFill>
-                  <a:srgbClr val="BAC2DE"/>
-                </a:solidFill>
-                <a:latin typeface="Consolas"/>
-              </a:rPr>
-              <a:t>{</a:t>
+                  <a:srgbClr val="EEFFFF"/>
+                </a:solidFill>
+                <a:latin typeface="Consolas"/>
+              </a:rPr>
+              <a:t>        </a:t>
+            </a:r>
+            <a:r>
+              <a:rPr sz="1600">
+                <a:solidFill>
+                  <a:srgbClr val="BAC2DE"/>
+                </a:solidFill>
+                <a:latin typeface="Consolas"/>
+              </a:rPr>
+              <a:t>}</a:t>
             </a:r>
           </a:p>
           <a:p>
@@ -4128,114 +4563,6 @@
                 <a:spcPts val="0"/>
               </a:spcAft>
             </a:pPr>
-            <a:r>
-              <a:rPr sz="1600">
-                <a:solidFill>
-                  <a:srgbClr val="EEFFFF"/>
-                </a:solidFill>
-                <a:latin typeface="Consolas"/>
-              </a:rPr>
-              <a:t>    </a:t>
-            </a:r>
-            <a:r>
-              <a:rPr sz="1600">
-                <a:solidFill>
-                  <a:srgbClr val="C792EA"/>
-                </a:solidFill>
-                <a:latin typeface="Consolas"/>
-              </a:rPr>
-              <a:t>let</a:t>
-            </a:r>
-            <a:r>
-              <a:rPr sz="1600">
-                <a:solidFill>
-                  <a:srgbClr val="EEFFFF"/>
-                </a:solidFill>
-                <a:latin typeface="Consolas"/>
-              </a:rPr>
-              <a:t> </a:t>
-            </a:r>
-            <a:r>
-              <a:rPr sz="1600">
-                <a:solidFill>
-                  <a:srgbClr val="EEFFFF"/>
-                </a:solidFill>
-                <a:latin typeface="Consolas"/>
-              </a:rPr>
-              <a:t>count</a:t>
-            </a:r>
-            <a:r>
-              <a:rPr sz="1600">
-                <a:solidFill>
-                  <a:srgbClr val="EEFFFF"/>
-                </a:solidFill>
-                <a:latin typeface="Consolas"/>
-              </a:rPr>
-              <a:t>:</a:t>
-            </a:r>
-            <a:r>
-              <a:rPr sz="1600">
-                <a:solidFill>
-                  <a:srgbClr val="EEFFFF"/>
-                </a:solidFill>
-                <a:latin typeface="Consolas"/>
-              </a:rPr>
-              <a:t> </a:t>
-            </a:r>
-            <a:r>
-              <a:rPr sz="1600">
-                <a:solidFill>
-                  <a:srgbClr val="C792EA"/>
-                </a:solidFill>
-                <a:latin typeface="Consolas"/>
-              </a:rPr>
-              <a:t>usize</a:t>
-            </a:r>
-            <a:r>
-              <a:rPr sz="1600">
-                <a:solidFill>
-                  <a:srgbClr val="EEFFFF"/>
-                </a:solidFill>
-                <a:latin typeface="Consolas"/>
-              </a:rPr>
-              <a:t> </a:t>
-            </a:r>
-            <a:r>
-              <a:rPr sz="1600">
-                <a:solidFill>
-                  <a:srgbClr val="89DDFF"/>
-                </a:solidFill>
-                <a:latin typeface="Consolas"/>
-              </a:rPr>
-              <a:t>=</a:t>
-            </a:r>
-            <a:r>
-              <a:rPr sz="1600">
-                <a:solidFill>
-                  <a:srgbClr val="EEFFFF"/>
-                </a:solidFill>
-                <a:latin typeface="Consolas"/>
-              </a:rPr>
-              <a:t> </a:t>
-            </a:r>
-            <a:r>
-              <a:rPr sz="1600">
-                <a:solidFill>
-                  <a:srgbClr val="F78C6C"/>
-                </a:solidFill>
-                <a:latin typeface="Consolas"/>
-              </a:rPr>
-              <a:t>7</a:t>
-            </a:r>
-            <a:r>
-              <a:rPr sz="1600">
-                <a:solidFill>
-                  <a:srgbClr val="BAC2DE"/>
-                </a:solidFill>
-                <a:latin typeface="Consolas"/>
-              </a:rPr>
-              <a:t>;</a:t>
-            </a:r>
           </a:p>
           <a:p>
             <a:pPr>
@@ -4249,6 +4576,114 @@
                 <a:spcPts val="0"/>
               </a:spcAft>
             </a:pPr>
+            <a:r>
+              <a:rPr sz="1600">
+                <a:solidFill>
+                  <a:srgbClr val="EEFFFF"/>
+                </a:solidFill>
+                <a:latin typeface="Consolas"/>
+              </a:rPr>
+              <a:t>        </a:t>
+            </a:r>
+            <a:r>
+              <a:rPr sz="1600">
+                <a:solidFill>
+                  <a:srgbClr val="C792EA"/>
+                </a:solidFill>
+                <a:latin typeface="Consolas"/>
+              </a:rPr>
+              <a:t>fn</a:t>
+            </a:r>
+            <a:r>
+              <a:rPr sz="1600">
+                <a:solidFill>
+                  <a:srgbClr val="EEFFFF"/>
+                </a:solidFill>
+                <a:latin typeface="Consolas"/>
+              </a:rPr>
+              <a:t> </a:t>
+            </a:r>
+            <a:r>
+              <a:rPr sz="1600">
+                <a:solidFill>
+                  <a:srgbClr val="82AAFF"/>
+                </a:solidFill>
+                <a:latin typeface="Consolas"/>
+              </a:rPr>
+              <a:t>min_value</a:t>
+            </a:r>
+            <a:r>
+              <a:rPr sz="1600">
+                <a:solidFill>
+                  <a:srgbClr val="BAC2DE"/>
+                </a:solidFill>
+                <a:latin typeface="Consolas"/>
+              </a:rPr>
+              <a:t>(</a:t>
+            </a:r>
+            <a:r>
+              <a:rPr sz="1600">
+                <a:solidFill>
+                  <a:srgbClr val="BAC2DE"/>
+                </a:solidFill>
+                <a:latin typeface="Consolas"/>
+              </a:rPr>
+              <a:t>)</a:t>
+            </a:r>
+            <a:r>
+              <a:rPr sz="1600">
+                <a:solidFill>
+                  <a:srgbClr val="EEFFFF"/>
+                </a:solidFill>
+                <a:latin typeface="Consolas"/>
+              </a:rPr>
+              <a:t> </a:t>
+            </a:r>
+            <a:r>
+              <a:rPr sz="1600">
+                <a:solidFill>
+                  <a:srgbClr val="BAC2DE"/>
+                </a:solidFill>
+                <a:latin typeface="Consolas"/>
+              </a:rPr>
+              <a:t>-&gt;</a:t>
+            </a:r>
+            <a:r>
+              <a:rPr sz="1600">
+                <a:solidFill>
+                  <a:srgbClr val="EEFFFF"/>
+                </a:solidFill>
+                <a:latin typeface="Consolas"/>
+              </a:rPr>
+              <a:t> </a:t>
+            </a:r>
+            <a:r>
+              <a:rPr sz="1600">
+                <a:solidFill>
+                  <a:srgbClr val="FFCB6B"/>
+                </a:solidFill>
+                <a:latin typeface="Consolas"/>
+              </a:rPr>
+              <a:t>Self</a:t>
+            </a:r>
+            <a:r>
+              <a:rPr sz="1600">
+                <a:solidFill>
+                  <a:srgbClr val="EEFFFF"/>
+                </a:solidFill>
+                <a:latin typeface="Consolas"/>
+              </a:rPr>
+              <a:t> </a:t>
+            </a:r>
+            <a:r>
+              <a:rPr sz="1600">
+                <a:solidFill>
+                  <a:srgbClr val="BAC2DE"/>
+                </a:solidFill>
+                <a:latin typeface="Consolas"/>
+              </a:rPr>
+              <a:t>{</a:t>
+            </a:r>
           </a:p>
           <a:p>
             <a:pPr>
@@ -4269,88 +4704,52 @@
                 </a:solidFill>
                 <a:latin typeface="Consolas"/>
               </a:rPr>
-              <a:t>    </a:t>
-            </a:r>
-            <a:r>
-              <a:rPr sz="1600">
-                <a:solidFill>
-                  <a:srgbClr val="82AAFF"/>
-                </a:solidFill>
-                <a:latin typeface="Consolas"/>
-              </a:rPr>
-              <a:t>assert!</a:t>
-            </a:r>
-            <a:r>
-              <a:rPr sz="1600">
-                <a:solidFill>
-                  <a:srgbClr val="BAC2DE"/>
-                </a:solidFill>
-                <a:latin typeface="Consolas"/>
-              </a:rPr>
-              <a:t>(</a:t>
-            </a:r>
-            <a:r>
-              <a:rPr sz="1600">
-                <a:solidFill>
-                  <a:srgbClr val="EEFFFF"/>
-                </a:solidFill>
-                <a:latin typeface="Consolas"/>
-              </a:rPr>
-              <a:t>count</a:t>
-            </a:r>
-            <a:r>
-              <a:rPr sz="1600">
-                <a:solidFill>
-                  <a:srgbClr val="BAC2DE"/>
-                </a:solidFill>
-                <a:latin typeface="Consolas"/>
-              </a:rPr>
-              <a:t>.</a:t>
-            </a:r>
-            <a:r>
-              <a:rPr sz="1600">
-                <a:solidFill>
-                  <a:srgbClr val="EEFFFF"/>
-                </a:solidFill>
-                <a:latin typeface="Consolas"/>
-              </a:rPr>
-              <a:t>is_odd</a:t>
-            </a:r>
-            <a:r>
-              <a:rPr sz="1600">
-                <a:solidFill>
-                  <a:srgbClr val="BAC2DE"/>
-                </a:solidFill>
-                <a:latin typeface="Consolas"/>
-              </a:rPr>
-              <a:t>(</a:t>
-            </a:r>
-            <a:r>
-              <a:rPr sz="1600">
-                <a:solidFill>
-                  <a:srgbClr val="BAC2DE"/>
-                </a:solidFill>
-                <a:latin typeface="Consolas"/>
-              </a:rPr>
-              <a:t>)</a:t>
-            </a:r>
-            <a:r>
-              <a:rPr sz="1600">
-                <a:solidFill>
-                  <a:srgbClr val="BAC2DE"/>
-                </a:solidFill>
-                <a:latin typeface="Consolas"/>
-              </a:rPr>
-              <a:t>)</a:t>
-            </a:r>
-            <a:r>
-              <a:rPr sz="1600">
-                <a:solidFill>
-                  <a:srgbClr val="BAC2DE"/>
-                </a:solidFill>
-                <a:latin typeface="Consolas"/>
-              </a:rPr>
-              <a:t>;</a:t>
+              <a:t>            </a:t>
+            </a:r>
+            <a:r>
+              <a:rPr sz="1600">
+                <a:solidFill>
+                  <a:srgbClr val="89DDFF"/>
+                </a:solidFill>
+                <a:latin typeface="Consolas"/>
+              </a:rPr>
+              <a:t>&lt;</a:t>
+            </a:r>
+            <a:r>
+              <a:rPr sz="1600">
+                <a:solidFill>
+                  <a:srgbClr val="6A9955"/>
+                </a:solidFill>
+                <a:latin typeface="Consolas"/>
+              </a:rPr>
+              <a:t>$t</a:t>
+            </a:r>
+            <a:r>
+              <a:rPr sz="1600">
+                <a:solidFill>
+                  <a:srgbClr val="89DDFF"/>
+                </a:solidFill>
+                <a:latin typeface="Consolas"/>
+              </a:rPr>
+              <a:t>&gt;</a:t>
+            </a:r>
+            <a:r>
+              <a:rPr sz="1600">
+                <a:solidFill>
+                  <a:srgbClr val="BAC2DE"/>
+                </a:solidFill>
+                <a:latin typeface="Consolas"/>
+              </a:rPr>
+              <a:t>::</a:t>
+            </a:r>
+            <a:r>
+              <a:rPr sz="1600">
+                <a:solidFill>
+                  <a:srgbClr val="EEFFFF"/>
+                </a:solidFill>
+                <a:latin typeface="Consolas"/>
+              </a:rPr>
+              <a:t>MIN</a:t>
             </a:r>
           </a:p>
           <a:p>
@@ -4372,16 +4771,403 @@
                 </a:solidFill>
                 <a:latin typeface="Consolas"/>
               </a:rPr>
+              <a:t>        </a:t>
+            </a:r>
+            <a:r>
+              <a:rPr sz="1600">
+                <a:solidFill>
+                  <a:srgbClr val="BAC2DE"/>
+                </a:solidFill>
+                <a:latin typeface="Consolas"/>
+              </a:rPr>
+              <a:t>}</a:t>
+            </a:r>
+          </a:p>
+          <a:p>
+            <a:pPr>
+              <a:lnSpc>
+                <a:spcPct val="95000"/>
+              </a:lnSpc>
+              <a:spcBef>
+                <a:spcPts val="0"/>
+              </a:spcBef>
+              <a:spcAft>
+                <a:spcPts val="0"/>
+              </a:spcAft>
+            </a:pPr>
+          </a:p>
+          <a:p>
+            <a:pPr>
+              <a:lnSpc>
+                <a:spcPct val="95000"/>
+              </a:lnSpc>
+              <a:spcBef>
+                <a:spcPts val="0"/>
+              </a:spcBef>
+              <a:spcAft>
+                <a:spcPts val="0"/>
+              </a:spcAft>
+            </a:pPr>
+            <a:r>
+              <a:rPr sz="1600">
+                <a:solidFill>
+                  <a:srgbClr val="EEFFFF"/>
+                </a:solidFill>
+                <a:latin typeface="Consolas"/>
+              </a:rPr>
+              <a:t>        </a:t>
+            </a:r>
+            <a:r>
+              <a:rPr sz="1600">
+                <a:solidFill>
+                  <a:srgbClr val="C792EA"/>
+                </a:solidFill>
+                <a:latin typeface="Consolas"/>
+              </a:rPr>
+              <a:t>fn</a:t>
+            </a:r>
+            <a:r>
+              <a:rPr sz="1600">
+                <a:solidFill>
+                  <a:srgbClr val="EEFFFF"/>
+                </a:solidFill>
+                <a:latin typeface="Consolas"/>
+              </a:rPr>
+              <a:t> </a:t>
+            </a:r>
+            <a:r>
+              <a:rPr sz="1600">
+                <a:solidFill>
+                  <a:srgbClr val="82AAFF"/>
+                </a:solidFill>
+                <a:latin typeface="Consolas"/>
+              </a:rPr>
+              <a:t>max_value</a:t>
+            </a:r>
+            <a:r>
+              <a:rPr sz="1600">
+                <a:solidFill>
+                  <a:srgbClr val="BAC2DE"/>
+                </a:solidFill>
+                <a:latin typeface="Consolas"/>
+              </a:rPr>
+              <a:t>(</a:t>
+            </a:r>
+            <a:r>
+              <a:rPr sz="1600">
+                <a:solidFill>
+                  <a:srgbClr val="BAC2DE"/>
+                </a:solidFill>
+                <a:latin typeface="Consolas"/>
+              </a:rPr>
+              <a:t>)</a:t>
+            </a:r>
+            <a:r>
+              <a:rPr sz="1600">
+                <a:solidFill>
+                  <a:srgbClr val="EEFFFF"/>
+                </a:solidFill>
+                <a:latin typeface="Consolas"/>
+              </a:rPr>
+              <a:t> </a:t>
+            </a:r>
+            <a:r>
+              <a:rPr sz="1600">
+                <a:solidFill>
+                  <a:srgbClr val="BAC2DE"/>
+                </a:solidFill>
+                <a:latin typeface="Consolas"/>
+              </a:rPr>
+              <a:t>-&gt;</a:t>
+            </a:r>
+            <a:r>
+              <a:rPr sz="1600">
+                <a:solidFill>
+                  <a:srgbClr val="EEFFFF"/>
+                </a:solidFill>
+                <a:latin typeface="Consolas"/>
+              </a:rPr>
+              <a:t> </a:t>
+            </a:r>
+            <a:r>
+              <a:rPr sz="1600">
+                <a:solidFill>
+                  <a:srgbClr val="FFCB6B"/>
+                </a:solidFill>
+                <a:latin typeface="Consolas"/>
+              </a:rPr>
+              <a:t>Self</a:t>
+            </a:r>
+            <a:r>
+              <a:rPr sz="1600">
+                <a:solidFill>
+                  <a:srgbClr val="EEFFFF"/>
+                </a:solidFill>
+                <a:latin typeface="Consolas"/>
+              </a:rPr>
+              <a:t> </a:t>
+            </a:r>
+            <a:r>
+              <a:rPr sz="1600">
+                <a:solidFill>
+                  <a:srgbClr val="BAC2DE"/>
+                </a:solidFill>
+                <a:latin typeface="Consolas"/>
+              </a:rPr>
+              <a:t>{</a:t>
+            </a:r>
+          </a:p>
+          <a:p>
+            <a:pPr>
+              <a:lnSpc>
+                <a:spcPct val="95000"/>
+              </a:lnSpc>
+              <a:spcBef>
+                <a:spcPts val="0"/>
+              </a:spcBef>
+              <a:spcAft>
+                <a:spcPts val="0"/>
+              </a:spcAft>
+            </a:pPr>
+            <a:r>
+              <a:rPr sz="1600">
+                <a:solidFill>
+                  <a:srgbClr val="EEFFFF"/>
+                </a:solidFill>
+                <a:latin typeface="Consolas"/>
+              </a:rPr>
+              <a:t>            </a:t>
+            </a:r>
+            <a:r>
+              <a:rPr sz="1600">
+                <a:solidFill>
+                  <a:srgbClr val="89DDFF"/>
+                </a:solidFill>
+                <a:latin typeface="Consolas"/>
+              </a:rPr>
+              <a:t>&lt;</a:t>
+            </a:r>
+            <a:r>
+              <a:rPr sz="1600">
+                <a:solidFill>
+                  <a:srgbClr val="6A9955"/>
+                </a:solidFill>
+                <a:latin typeface="Consolas"/>
+              </a:rPr>
+              <a:t>$t</a:t>
+            </a:r>
+            <a:r>
+              <a:rPr sz="1600">
+                <a:solidFill>
+                  <a:srgbClr val="89DDFF"/>
+                </a:solidFill>
+                <a:latin typeface="Consolas"/>
+              </a:rPr>
+              <a:t>&gt;</a:t>
+            </a:r>
+            <a:r>
+              <a:rPr sz="1600">
+                <a:solidFill>
+                  <a:srgbClr val="BAC2DE"/>
+                </a:solidFill>
+                <a:latin typeface="Consolas"/>
+              </a:rPr>
+              <a:t>::</a:t>
+            </a:r>
+            <a:r>
+              <a:rPr sz="1600">
+                <a:solidFill>
+                  <a:srgbClr val="EEFFFF"/>
+                </a:solidFill>
+                <a:latin typeface="Consolas"/>
+              </a:rPr>
+              <a:t>MAX</a:t>
+            </a:r>
+          </a:p>
+          <a:p>
+            <a:pPr>
+              <a:lnSpc>
+                <a:spcPct val="95000"/>
+              </a:lnSpc>
+              <a:spcBef>
+                <a:spcPts val="0"/>
+              </a:spcBef>
+              <a:spcAft>
+                <a:spcPts val="0"/>
+              </a:spcAft>
+            </a:pPr>
+            <a:r>
+              <a:rPr sz="1600">
+                <a:solidFill>
+                  <a:srgbClr val="EEFFFF"/>
+                </a:solidFill>
+                <a:latin typeface="Consolas"/>
+              </a:rPr>
+              <a:t>        </a:t>
+            </a:r>
+            <a:r>
+              <a:rPr sz="1600">
+                <a:solidFill>
+                  <a:srgbClr val="BAC2DE"/>
+                </a:solidFill>
+                <a:latin typeface="Consolas"/>
+              </a:rPr>
+              <a:t>}</a:t>
+            </a:r>
+          </a:p>
+          <a:p>
+            <a:pPr>
+              <a:lnSpc>
+                <a:spcPct val="95000"/>
+              </a:lnSpc>
+              <a:spcBef>
+                <a:spcPts val="0"/>
+              </a:spcBef>
+              <a:spcAft>
+                <a:spcPts val="0"/>
+              </a:spcAft>
+            </a:pPr>
+            <a:r>
+              <a:rPr sz="1600">
+                <a:solidFill>
+                  <a:srgbClr val="EEFFFF"/>
+                </a:solidFill>
+                <a:latin typeface="Consolas"/>
+              </a:rPr>
               <a:t>    </a:t>
             </a:r>
             <a:r>
               <a:rPr sz="1600">
                 <a:solidFill>
+                  <a:srgbClr val="BAC2DE"/>
+                </a:solidFill>
+                <a:latin typeface="Consolas"/>
+              </a:rPr>
+              <a:t>}</a:t>
+            </a:r>
+            <a:r>
+              <a:rPr sz="1600">
+                <a:solidFill>
+                  <a:srgbClr val="BAC2DE"/>
+                </a:solidFill>
+                <a:latin typeface="Consolas"/>
+              </a:rPr>
+              <a:t>;</a:t>
+            </a:r>
+          </a:p>
+          <a:p>
+            <a:pPr>
+              <a:lnSpc>
+                <a:spcPct val="95000"/>
+              </a:lnSpc>
+              <a:spcBef>
+                <a:spcPts val="0"/>
+              </a:spcBef>
+              <a:spcAft>
+                <a:spcPts val="0"/>
+              </a:spcAft>
+            </a:pPr>
+            <a:r>
+              <a:rPr sz="1600">
+                <a:solidFill>
+                  <a:srgbClr val="BAC2DE"/>
+                </a:solidFill>
+                <a:latin typeface="Consolas"/>
+              </a:rPr>
+              <a:t>}</a:t>
+            </a:r>
+          </a:p>
+          <a:p>
+            <a:pPr>
+              <a:lnSpc>
+                <a:spcPct val="95000"/>
+              </a:lnSpc>
+              <a:spcBef>
+                <a:spcPts val="0"/>
+              </a:spcBef>
+              <a:spcAft>
+                <a:spcPts val="0"/>
+              </a:spcAft>
+            </a:pPr>
+          </a:p>
+          <a:p>
+            <a:pPr>
+              <a:lnSpc>
+                <a:spcPct val="95000"/>
+              </a:lnSpc>
+              <a:spcBef>
+                <a:spcPts val="0"/>
+              </a:spcBef>
+              <a:spcAft>
+                <a:spcPts val="0"/>
+              </a:spcAft>
+            </a:pPr>
+            <a:r>
+              <a:rPr sz="1600">
+                <a:solidFill>
                   <a:srgbClr val="82AAFF"/>
                 </a:solidFill>
                 <a:latin typeface="Consolas"/>
               </a:rPr>
-              <a:t>assert!</a:t>
+              <a:t>macro_rules!</a:t>
+            </a:r>
+            <a:r>
+              <a:rPr sz="1600">
+                <a:solidFill>
+                  <a:srgbClr val="EEFFFF"/>
+                </a:solidFill>
+                <a:latin typeface="Consolas"/>
+              </a:rPr>
+              <a:t> </a:t>
+            </a:r>
+            <a:r>
+              <a:rPr sz="1600">
+                <a:solidFill>
+                  <a:srgbClr val="EEFFFF"/>
+                </a:solidFill>
+                <a:latin typeface="Consolas"/>
+              </a:rPr>
+              <a:t>impl_integer_ops_ip</a:t>
+            </a:r>
+            <a:r>
+              <a:rPr sz="1600">
+                <a:solidFill>
+                  <a:srgbClr val="EEFFFF"/>
+                </a:solidFill>
+                <a:latin typeface="Consolas"/>
+              </a:rPr>
+              <a:t> </a:t>
+            </a:r>
+            <a:r>
+              <a:rPr sz="1600">
+                <a:solidFill>
+                  <a:srgbClr val="BAC2DE"/>
+                </a:solidFill>
+                <a:latin typeface="Consolas"/>
+              </a:rPr>
+              <a:t>{</a:t>
+            </a:r>
+          </a:p>
+          <a:p>
+            <a:pPr>
+              <a:lnSpc>
+                <a:spcPct val="95000"/>
+              </a:lnSpc>
+              <a:spcBef>
+                <a:spcPts val="0"/>
+              </a:spcBef>
+              <a:spcAft>
+                <a:spcPts val="0"/>
+              </a:spcAft>
+            </a:pPr>
+            <a:r>
+              <a:rPr sz="1600">
+                <a:solidFill>
+                  <a:srgbClr val="EEFFFF"/>
+                </a:solidFill>
+                <a:latin typeface="Consolas"/>
+              </a:rPr>
+              <a:t>    </a:t>
             </a:r>
             <a:r>
               <a:rPr sz="1600">
@@ -4395,29 +5181,5791 @@
             <a:r>
               <a:rPr sz="1600">
                 <a:solidFill>
+                  <a:srgbClr val="6A9955"/>
+                </a:solidFill>
+                <a:latin typeface="Consolas"/>
+              </a:rPr>
+              <a:t>$ip_type</a:t>
+            </a:r>
+            <a:r>
+              <a:rPr sz="1600">
+                <a:solidFill>
+                  <a:srgbClr val="BAC2DE"/>
+                </a:solidFill>
+                <a:latin typeface="Consolas"/>
+              </a:rPr>
+              <a:t>:</a:t>
+            </a:r>
+            <a:r>
+              <a:rPr sz="1600">
+                <a:solidFill>
+                  <a:srgbClr val="FFCB6B"/>
+                </a:solidFill>
+                <a:latin typeface="Consolas"/>
+              </a:rPr>
+              <a:t>ty</a:t>
+            </a:r>
+            <a:r>
+              <a:rPr sz="1600">
+                <a:solidFill>
+                  <a:srgbClr val="BAC2DE"/>
+                </a:solidFill>
+                <a:latin typeface="Consolas"/>
+              </a:rPr>
+              <a:t>,</a:t>
+            </a:r>
+            <a:r>
+              <a:rPr sz="1600">
+                <a:solidFill>
+                  <a:srgbClr val="EEFFFF"/>
+                </a:solidFill>
+                <a:latin typeface="Consolas"/>
+              </a:rPr>
+              <a:t> </a:t>
+            </a:r>
+            <a:r>
+              <a:rPr sz="1600">
+                <a:solidFill>
+                  <a:srgbClr val="6A9955"/>
+                </a:solidFill>
+                <a:latin typeface="Consolas"/>
+              </a:rPr>
+              <a:t>$representation_type</a:t>
+            </a:r>
+            <a:r>
+              <a:rPr sz="1600">
+                <a:solidFill>
+                  <a:srgbClr val="BAC2DE"/>
+                </a:solidFill>
+                <a:latin typeface="Consolas"/>
+              </a:rPr>
+              <a:t>:</a:t>
+            </a:r>
+            <a:r>
+              <a:rPr sz="1600">
+                <a:solidFill>
+                  <a:srgbClr val="FFCB6B"/>
+                </a:solidFill>
+                <a:latin typeface="Consolas"/>
+              </a:rPr>
+              <a:t>ty</a:t>
+            </a:r>
+            <a:r>
+              <a:rPr sz="1600">
+                <a:solidFill>
+                  <a:srgbClr val="BAC2DE"/>
+                </a:solidFill>
+                <a:latin typeface="Consolas"/>
+              </a:rPr>
+              <a:t>)</a:t>
+            </a:r>
+            <a:r>
+              <a:rPr sz="1600">
+                <a:solidFill>
+                  <a:srgbClr val="EEFFFF"/>
+                </a:solidFill>
+                <a:latin typeface="Consolas"/>
+              </a:rPr>
+              <a:t> </a:t>
+            </a:r>
+            <a:r>
+              <a:rPr sz="1600">
+                <a:solidFill>
                   <a:srgbClr val="89DDFF"/>
                 </a:solidFill>
                 <a:latin typeface="Consolas"/>
               </a:rPr>
+              <a:t>=</a:t>
+            </a:r>
+            <a:r>
+              <a:rPr sz="1600">
+                <a:solidFill>
+                  <a:srgbClr val="89DDFF"/>
+                </a:solidFill>
+                <a:latin typeface="Consolas"/>
+              </a:rPr>
+              <a:t>&gt;</a:t>
+            </a:r>
+            <a:r>
+              <a:rPr sz="1600">
+                <a:solidFill>
+                  <a:srgbClr val="EEFFFF"/>
+                </a:solidFill>
+                <a:latin typeface="Consolas"/>
+              </a:rPr>
+              <a:t> </a:t>
+            </a:r>
+            <a:r>
+              <a:rPr sz="1600">
+                <a:solidFill>
+                  <a:srgbClr val="BAC2DE"/>
+                </a:solidFill>
+                <a:latin typeface="Consolas"/>
+              </a:rPr>
+              <a:t>{</a:t>
+            </a:r>
+          </a:p>
+        </p:txBody>
+      </p:sp>
+    </p:spTree>
+  </p:cSld>
+  <p:clrMapOvr>
+    <a:masterClrMapping/>
+  </p:clrMapOvr>
+</p:sld>
+</file>
+
+<file path=ppt/slides/slide3.xml><?xml version="1.0" encoding="utf-8"?>
+<p:sld xmlns:a="http://schemas.openxmlformats.org/drawingml/2006/main" xmlns:p="http://schemas.openxmlformats.org/presentationml/2006/main" xmlns:r="http://schemas.openxmlformats.org/officeDocument/2006/relationships">
+  <p:cSld>
+    <p:spTree>
+      <p:nvGrpSpPr>
+        <p:cNvPr id="1" name=""/>
+        <p:cNvGrpSpPr/>
+        <p:nvPr/>
+      </p:nvGrpSpPr>
+      <p:grpSpPr/>
+      <p:sp>
+        <p:nvSpPr>
+          <p:cNvPr id="2" name="Rectangle 1"/>
+          <p:cNvSpPr/>
+          <p:nvPr/>
+        </p:nvSpPr>
+        <p:spPr>
+          <a:xfrm>
+            <a:off x="0" y="0"/>
+            <a:ext cx="9144000" cy="6858000"/>
+          </a:xfrm>
+          <a:prstGeom prst="rect">
+            <a:avLst/>
+          </a:prstGeom>
+          <a:solidFill>
+            <a:srgbClr val="000000"/>
+          </a:solidFill>
+          <a:ln>
+            <a:noFill/>
+          </a:ln>
+        </p:spPr>
+        <p:style>
+          <a:lnRef idx="1">
+            <a:schemeClr val="accent1"/>
+          </a:lnRef>
+          <a:fillRef idx="3">
+            <a:schemeClr val="accent1"/>
+          </a:fillRef>
+          <a:effectRef idx="2">
+            <a:schemeClr val="accent1"/>
+          </a:effectRef>
+          <a:fontRef idx="minor">
+            <a:schemeClr val="lt1"/>
+          </a:fontRef>
+        </p:style>
+        <p:txBody>
+          <a:bodyPr rtlCol="0" anchor="ctr"/>
+          <a:lstStyle/>
+          <a:p>
+            <a:pPr algn="ctr"/>
+          </a:p>
+        </p:txBody>
+      </p:sp>
+      <p:sp>
+        <p:nvSpPr>
+          <p:cNvPr id="3" name="TextBox 2"/>
+          <p:cNvSpPr txBox="1"/>
+          <p:nvPr/>
+        </p:nvSpPr>
+        <p:spPr>
+          <a:xfrm>
+            <a:off x="164592" y="109728"/>
+            <a:ext cx="8814816" cy="6638544"/>
+          </a:xfrm>
+          <a:prstGeom prst="rect">
+            <a:avLst/>
+          </a:prstGeom>
+          <a:noFill/>
+        </p:spPr>
+        <p:txBody>
+          <a:bodyPr wrap="square">
+            <a:noAutofit/>
+          </a:bodyPr>
+          <a:lstStyle/>
+          <a:p>
+            <a:pPr>
+              <a:lnSpc>
+                <a:spcPct val="95000"/>
+              </a:lnSpc>
+              <a:spcBef>
+                <a:spcPts val="0"/>
+              </a:spcBef>
+              <a:spcAft>
+                <a:spcPts val="0"/>
+              </a:spcAft>
+            </a:pPr>
+            <a:r>
+              <a:rPr sz="1600">
+                <a:solidFill>
+                  <a:srgbClr val="EEFFFF"/>
+                </a:solidFill>
+                <a:latin typeface="Consolas"/>
+              </a:rPr>
+              <a:t>        </a:t>
+            </a:r>
+            <a:r>
+              <a:rPr sz="1600">
+                <a:solidFill>
+                  <a:srgbClr val="C792EA"/>
+                </a:solidFill>
+                <a:latin typeface="Consolas"/>
+              </a:rPr>
+              <a:t>fn</a:t>
+            </a:r>
+            <a:r>
+              <a:rPr sz="1600">
+                <a:solidFill>
+                  <a:srgbClr val="EEFFFF"/>
+                </a:solidFill>
+                <a:latin typeface="Consolas"/>
+              </a:rPr>
+              <a:t> </a:t>
+            </a:r>
+            <a:r>
+              <a:rPr sz="1600">
+                <a:solidFill>
+                  <a:srgbClr val="82AAFF"/>
+                </a:solidFill>
+                <a:latin typeface="Consolas"/>
+              </a:rPr>
+              <a:t>add_one</a:t>
+            </a:r>
+            <a:r>
+              <a:rPr sz="1600">
+                <a:solidFill>
+                  <a:srgbClr val="BAC2DE"/>
+                </a:solidFill>
+                <a:latin typeface="Consolas"/>
+              </a:rPr>
+              <a:t>(</a:t>
+            </a:r>
+            <a:r>
+              <a:rPr sz="1600">
+                <a:solidFill>
+                  <a:srgbClr val="89DDFF"/>
+                </a:solidFill>
+                <a:latin typeface="Consolas"/>
+              </a:rPr>
+              <a:t>self</a:t>
+            </a:r>
+            <a:r>
+              <a:rPr sz="1600">
+                <a:solidFill>
+                  <a:srgbClr val="BAC2DE"/>
+                </a:solidFill>
+                <a:latin typeface="Consolas"/>
+              </a:rPr>
+              <a:t>)</a:t>
+            </a:r>
+            <a:r>
+              <a:rPr sz="1600">
+                <a:solidFill>
+                  <a:srgbClr val="EEFFFF"/>
+                </a:solidFill>
+                <a:latin typeface="Consolas"/>
+              </a:rPr>
+              <a:t> </a:t>
+            </a:r>
+            <a:r>
+              <a:rPr sz="1600">
+                <a:solidFill>
+                  <a:srgbClr val="BAC2DE"/>
+                </a:solidFill>
+                <a:latin typeface="Consolas"/>
+              </a:rPr>
+              <a:t>-&gt;</a:t>
+            </a:r>
+            <a:r>
+              <a:rPr sz="1600">
+                <a:solidFill>
+                  <a:srgbClr val="EEFFFF"/>
+                </a:solidFill>
+                <a:latin typeface="Consolas"/>
+              </a:rPr>
+              <a:t> </a:t>
+            </a:r>
+            <a:r>
+              <a:rPr sz="1600">
+                <a:solidFill>
+                  <a:srgbClr val="FFCB6B"/>
+                </a:solidFill>
+                <a:latin typeface="Consolas"/>
+              </a:rPr>
+              <a:t>Self</a:t>
+            </a:r>
+            <a:r>
+              <a:rPr sz="1600">
+                <a:solidFill>
+                  <a:srgbClr val="EEFFFF"/>
+                </a:solidFill>
+                <a:latin typeface="Consolas"/>
+              </a:rPr>
+              <a:t> </a:t>
+            </a:r>
+            <a:r>
+              <a:rPr sz="1600">
+                <a:solidFill>
+                  <a:srgbClr val="BAC2DE"/>
+                </a:solidFill>
+                <a:latin typeface="Consolas"/>
+              </a:rPr>
+              <a:t>{</a:t>
+            </a:r>
+          </a:p>
+          <a:p>
+            <a:pPr>
+              <a:lnSpc>
+                <a:spcPct val="95000"/>
+              </a:lnSpc>
+              <a:spcBef>
+                <a:spcPts val="0"/>
+              </a:spcBef>
+              <a:spcAft>
+                <a:spcPts val="0"/>
+              </a:spcAft>
+            </a:pPr>
+            <a:r>
+              <a:rPr sz="1600">
+                <a:solidFill>
+                  <a:srgbClr val="EEFFFF"/>
+                </a:solidFill>
+                <a:latin typeface="Consolas"/>
+              </a:rPr>
+              <a:t>            </a:t>
+            </a:r>
+            <a:r>
+              <a:rPr sz="1600">
+                <a:solidFill>
+                  <a:srgbClr val="89DDFF"/>
+                </a:solidFill>
+                <a:latin typeface="Consolas"/>
+              </a:rPr>
+              <a:t>&lt;</a:t>
+            </a:r>
+            <a:r>
+              <a:rPr sz="1600">
+                <a:solidFill>
+                  <a:srgbClr val="6A9955"/>
+                </a:solidFill>
+                <a:latin typeface="Consolas"/>
+              </a:rPr>
+              <a:t>$ip_type</a:t>
+            </a:r>
+            <a:r>
+              <a:rPr sz="1600">
+                <a:solidFill>
+                  <a:srgbClr val="89DDFF"/>
+                </a:solidFill>
+                <a:latin typeface="Consolas"/>
+              </a:rPr>
+              <a:t>&gt;</a:t>
+            </a:r>
+            <a:r>
+              <a:rPr sz="1600">
+                <a:solidFill>
+                  <a:srgbClr val="BAC2DE"/>
+                </a:solidFill>
+                <a:latin typeface="Consolas"/>
+              </a:rPr>
+              <a:t>::</a:t>
+            </a:r>
+            <a:r>
+              <a:rPr sz="1600">
+                <a:solidFill>
+                  <a:srgbClr val="EEFFFF"/>
+                </a:solidFill>
+                <a:latin typeface="Consolas"/>
+              </a:rPr>
+              <a:t>from</a:t>
+            </a:r>
+            <a:r>
+              <a:rPr sz="1600">
+                <a:solidFill>
+                  <a:srgbClr val="BAC2DE"/>
+                </a:solidFill>
+                <a:latin typeface="Consolas"/>
+              </a:rPr>
+              <a:t>(</a:t>
+            </a:r>
+            <a:r>
+              <a:rPr sz="1600">
+                <a:solidFill>
+                  <a:srgbClr val="89DDFF"/>
+                </a:solidFill>
+                <a:latin typeface="Consolas"/>
+              </a:rPr>
+              <a:t>&lt;</a:t>
+            </a:r>
+            <a:r>
+              <a:rPr sz="1600">
+                <a:solidFill>
+                  <a:srgbClr val="6A9955"/>
+                </a:solidFill>
+                <a:latin typeface="Consolas"/>
+              </a:rPr>
+              <a:t>$representation_type</a:t>
+            </a:r>
+            <a:r>
+              <a:rPr sz="1600">
+                <a:solidFill>
+                  <a:srgbClr val="89DDFF"/>
+                </a:solidFill>
+                <a:latin typeface="Consolas"/>
+              </a:rPr>
+              <a:t>&gt;</a:t>
+            </a:r>
+            <a:r>
+              <a:rPr sz="1600">
+                <a:solidFill>
+                  <a:srgbClr val="BAC2DE"/>
+                </a:solidFill>
+                <a:latin typeface="Consolas"/>
+              </a:rPr>
+              <a:t>::</a:t>
+            </a:r>
+            <a:r>
+              <a:rPr sz="1600">
+                <a:solidFill>
+                  <a:srgbClr val="EEFFFF"/>
+                </a:solidFill>
+                <a:latin typeface="Consolas"/>
+              </a:rPr>
+              <a:t>from</a:t>
+            </a:r>
+            <a:r>
+              <a:rPr sz="1600">
+                <a:solidFill>
+                  <a:srgbClr val="BAC2DE"/>
+                </a:solidFill>
+                <a:latin typeface="Consolas"/>
+              </a:rPr>
+              <a:t>(</a:t>
+            </a:r>
+            <a:r>
+              <a:rPr sz="1600">
+                <a:solidFill>
+                  <a:srgbClr val="89DDFF"/>
+                </a:solidFill>
+                <a:latin typeface="Consolas"/>
+              </a:rPr>
+              <a:t>self</a:t>
+            </a:r>
+            <a:r>
+              <a:rPr sz="1600">
+                <a:solidFill>
+                  <a:srgbClr val="BAC2DE"/>
+                </a:solidFill>
+                <a:latin typeface="Consolas"/>
+              </a:rPr>
+              <a:t>)</a:t>
+            </a:r>
+            <a:r>
+              <a:rPr sz="1600">
+                <a:solidFill>
+                  <a:srgbClr val="BAC2DE"/>
+                </a:solidFill>
+                <a:latin typeface="Consolas"/>
+              </a:rPr>
+              <a:t>.</a:t>
+            </a:r>
+            <a:r>
+              <a:rPr sz="1600">
+                <a:solidFill>
+                  <a:srgbClr val="EEFFFF"/>
+                </a:solidFill>
+                <a:latin typeface="Consolas"/>
+              </a:rPr>
+              <a:t>wrapping_add</a:t>
+            </a:r>
+            <a:r>
+              <a:rPr sz="1600">
+                <a:solidFill>
+                  <a:srgbClr val="BAC2DE"/>
+                </a:solidFill>
+                <a:latin typeface="Consolas"/>
+              </a:rPr>
+              <a:t>(</a:t>
+            </a:r>
+            <a:r>
+              <a:rPr sz="1600">
+                <a:solidFill>
+                  <a:srgbClr val="F78C6C"/>
+                </a:solidFill>
+                <a:latin typeface="Consolas"/>
+              </a:rPr>
+              <a:t>1</a:t>
+            </a:r>
+            <a:r>
+              <a:rPr sz="1600">
+                <a:solidFill>
+                  <a:srgbClr val="BAC2DE"/>
+                </a:solidFill>
+                <a:latin typeface="Consolas"/>
+              </a:rPr>
+              <a:t>)</a:t>
+            </a:r>
+            <a:r>
+              <a:rPr sz="1600">
+                <a:solidFill>
+                  <a:srgbClr val="BAC2DE"/>
+                </a:solidFill>
+                <a:latin typeface="Consolas"/>
+              </a:rPr>
+              <a:t>)</a:t>
+            </a:r>
+          </a:p>
+          <a:p>
+            <a:pPr>
+              <a:lnSpc>
+                <a:spcPct val="95000"/>
+              </a:lnSpc>
+              <a:spcBef>
+                <a:spcPts val="0"/>
+              </a:spcBef>
+              <a:spcAft>
+                <a:spcPts val="0"/>
+              </a:spcAft>
+            </a:pPr>
+            <a:r>
+              <a:rPr sz="1600">
+                <a:solidFill>
+                  <a:srgbClr val="EEFFFF"/>
+                </a:solidFill>
+                <a:latin typeface="Consolas"/>
+              </a:rPr>
+              <a:t>        </a:t>
+            </a:r>
+            <a:r>
+              <a:rPr sz="1600">
+                <a:solidFill>
+                  <a:srgbClr val="BAC2DE"/>
+                </a:solidFill>
+                <a:latin typeface="Consolas"/>
+              </a:rPr>
+              <a:t>}</a:t>
+            </a:r>
+          </a:p>
+          <a:p>
+            <a:pPr>
+              <a:lnSpc>
+                <a:spcPct val="95000"/>
+              </a:lnSpc>
+              <a:spcBef>
+                <a:spcPts val="0"/>
+              </a:spcBef>
+              <a:spcAft>
+                <a:spcPts val="0"/>
+              </a:spcAft>
+            </a:pPr>
+          </a:p>
+          <a:p>
+            <a:pPr>
+              <a:lnSpc>
+                <a:spcPct val="95000"/>
+              </a:lnSpc>
+              <a:spcBef>
+                <a:spcPts val="0"/>
+              </a:spcBef>
+              <a:spcAft>
+                <a:spcPts val="0"/>
+              </a:spcAft>
+            </a:pPr>
+            <a:r>
+              <a:rPr sz="1600">
+                <a:solidFill>
+                  <a:srgbClr val="EEFFFF"/>
+                </a:solidFill>
+                <a:latin typeface="Consolas"/>
+              </a:rPr>
+              <a:t>        </a:t>
+            </a:r>
+            <a:r>
+              <a:rPr sz="1600">
+                <a:solidFill>
+                  <a:srgbClr val="C792EA"/>
+                </a:solidFill>
+                <a:latin typeface="Consolas"/>
+              </a:rPr>
+              <a:t>fn</a:t>
+            </a:r>
+            <a:r>
+              <a:rPr sz="1600">
+                <a:solidFill>
+                  <a:srgbClr val="EEFFFF"/>
+                </a:solidFill>
+                <a:latin typeface="Consolas"/>
+              </a:rPr>
+              <a:t> </a:t>
+            </a:r>
+            <a:r>
+              <a:rPr sz="1600">
+                <a:solidFill>
+                  <a:srgbClr val="82AAFF"/>
+                </a:solidFill>
+                <a:latin typeface="Consolas"/>
+              </a:rPr>
+              <a:t>min_value</a:t>
+            </a:r>
+            <a:r>
+              <a:rPr sz="1600">
+                <a:solidFill>
+                  <a:srgbClr val="BAC2DE"/>
+                </a:solidFill>
+                <a:latin typeface="Consolas"/>
+              </a:rPr>
+              <a:t>(</a:t>
+            </a:r>
+            <a:r>
+              <a:rPr sz="1600">
+                <a:solidFill>
+                  <a:srgbClr val="BAC2DE"/>
+                </a:solidFill>
+                <a:latin typeface="Consolas"/>
+              </a:rPr>
+              <a:t>)</a:t>
+            </a:r>
+            <a:r>
+              <a:rPr sz="1600">
+                <a:solidFill>
+                  <a:srgbClr val="EEFFFF"/>
+                </a:solidFill>
+                <a:latin typeface="Consolas"/>
+              </a:rPr>
+              <a:t> </a:t>
+            </a:r>
+            <a:r>
+              <a:rPr sz="1600">
+                <a:solidFill>
+                  <a:srgbClr val="BAC2DE"/>
+                </a:solidFill>
+                <a:latin typeface="Consolas"/>
+              </a:rPr>
+              <a:t>-&gt;</a:t>
+            </a:r>
+            <a:r>
+              <a:rPr sz="1600">
+                <a:solidFill>
+                  <a:srgbClr val="EEFFFF"/>
+                </a:solidFill>
+                <a:latin typeface="Consolas"/>
+              </a:rPr>
+              <a:t> </a:t>
+            </a:r>
+            <a:r>
+              <a:rPr sz="1600">
+                <a:solidFill>
+                  <a:srgbClr val="FFCB6B"/>
+                </a:solidFill>
+                <a:latin typeface="Consolas"/>
+              </a:rPr>
+              <a:t>Self</a:t>
+            </a:r>
+            <a:r>
+              <a:rPr sz="1600">
+                <a:solidFill>
+                  <a:srgbClr val="EEFFFF"/>
+                </a:solidFill>
+                <a:latin typeface="Consolas"/>
+              </a:rPr>
+              <a:t> </a:t>
+            </a:r>
+            <a:r>
+              <a:rPr sz="1600">
+                <a:solidFill>
+                  <a:srgbClr val="BAC2DE"/>
+                </a:solidFill>
+                <a:latin typeface="Consolas"/>
+              </a:rPr>
+              <a:t>{</a:t>
+            </a:r>
+          </a:p>
+          <a:p>
+            <a:pPr>
+              <a:lnSpc>
+                <a:spcPct val="95000"/>
+              </a:lnSpc>
+              <a:spcBef>
+                <a:spcPts val="0"/>
+              </a:spcBef>
+              <a:spcAft>
+                <a:spcPts val="0"/>
+              </a:spcAft>
+            </a:pPr>
+            <a:r>
+              <a:rPr sz="1600">
+                <a:solidFill>
+                  <a:srgbClr val="EEFFFF"/>
+                </a:solidFill>
+                <a:latin typeface="Consolas"/>
+              </a:rPr>
+              <a:t>            </a:t>
+            </a:r>
+            <a:r>
+              <a:rPr sz="1600">
+                <a:solidFill>
+                  <a:srgbClr val="89DDFF"/>
+                </a:solidFill>
+                <a:latin typeface="Consolas"/>
+              </a:rPr>
+              <a:t>&lt;</a:t>
+            </a:r>
+            <a:r>
+              <a:rPr sz="1600">
+                <a:solidFill>
+                  <a:srgbClr val="6A9955"/>
+                </a:solidFill>
+                <a:latin typeface="Consolas"/>
+              </a:rPr>
+              <a:t>$ip_type</a:t>
+            </a:r>
+            <a:r>
+              <a:rPr sz="1600">
+                <a:solidFill>
+                  <a:srgbClr val="89DDFF"/>
+                </a:solidFill>
+                <a:latin typeface="Consolas"/>
+              </a:rPr>
+              <a:t>&gt;</a:t>
+            </a:r>
+            <a:r>
+              <a:rPr sz="1600">
+                <a:solidFill>
+                  <a:srgbClr val="BAC2DE"/>
+                </a:solidFill>
+                <a:latin typeface="Consolas"/>
+              </a:rPr>
+              <a:t>::</a:t>
+            </a:r>
+            <a:r>
+              <a:rPr sz="1600">
+                <a:solidFill>
+                  <a:srgbClr val="EEFFFF"/>
+                </a:solidFill>
+                <a:latin typeface="Consolas"/>
+              </a:rPr>
+              <a:t>from</a:t>
+            </a:r>
+            <a:r>
+              <a:rPr sz="1600">
+                <a:solidFill>
+                  <a:srgbClr val="BAC2DE"/>
+                </a:solidFill>
+                <a:latin typeface="Consolas"/>
+              </a:rPr>
+              <a:t>(</a:t>
+            </a:r>
+            <a:r>
+              <a:rPr sz="1600">
+                <a:solidFill>
+                  <a:srgbClr val="89DDFF"/>
+                </a:solidFill>
+                <a:latin typeface="Consolas"/>
+              </a:rPr>
+              <a:t>&lt;</a:t>
+            </a:r>
+            <a:r>
+              <a:rPr sz="1600">
+                <a:solidFill>
+                  <a:srgbClr val="6A9955"/>
+                </a:solidFill>
+                <a:latin typeface="Consolas"/>
+              </a:rPr>
+              <a:t>$representation_type</a:t>
+            </a:r>
+            <a:r>
+              <a:rPr sz="1600">
+                <a:solidFill>
+                  <a:srgbClr val="89DDFF"/>
+                </a:solidFill>
+                <a:latin typeface="Consolas"/>
+              </a:rPr>
+              <a:t>&gt;</a:t>
+            </a:r>
+            <a:r>
+              <a:rPr sz="1600">
+                <a:solidFill>
+                  <a:srgbClr val="BAC2DE"/>
+                </a:solidFill>
+                <a:latin typeface="Consolas"/>
+              </a:rPr>
+              <a:t>::</a:t>
+            </a:r>
+            <a:r>
+              <a:rPr sz="1600">
+                <a:solidFill>
+                  <a:srgbClr val="EEFFFF"/>
+                </a:solidFill>
+                <a:latin typeface="Consolas"/>
+              </a:rPr>
+              <a:t>MIN</a:t>
+            </a:r>
+            <a:r>
+              <a:rPr sz="1600">
+                <a:solidFill>
+                  <a:srgbClr val="BAC2DE"/>
+                </a:solidFill>
+                <a:latin typeface="Consolas"/>
+              </a:rPr>
+              <a:t>)</a:t>
+            </a:r>
+          </a:p>
+          <a:p>
+            <a:pPr>
+              <a:lnSpc>
+                <a:spcPct val="95000"/>
+              </a:lnSpc>
+              <a:spcBef>
+                <a:spcPts val="0"/>
+              </a:spcBef>
+              <a:spcAft>
+                <a:spcPts val="0"/>
+              </a:spcAft>
+            </a:pPr>
+            <a:r>
+              <a:rPr sz="1600">
+                <a:solidFill>
+                  <a:srgbClr val="EEFFFF"/>
+                </a:solidFill>
+                <a:latin typeface="Consolas"/>
+              </a:rPr>
+              <a:t>        </a:t>
+            </a:r>
+            <a:r>
+              <a:rPr sz="1600">
+                <a:solidFill>
+                  <a:srgbClr val="BAC2DE"/>
+                </a:solidFill>
+                <a:latin typeface="Consolas"/>
+              </a:rPr>
+              <a:t>}</a:t>
+            </a:r>
+          </a:p>
+          <a:p>
+            <a:pPr>
+              <a:lnSpc>
+                <a:spcPct val="95000"/>
+              </a:lnSpc>
+              <a:spcBef>
+                <a:spcPts val="0"/>
+              </a:spcBef>
+              <a:spcAft>
+                <a:spcPts val="0"/>
+              </a:spcAft>
+            </a:pPr>
+          </a:p>
+          <a:p>
+            <a:pPr>
+              <a:lnSpc>
+                <a:spcPct val="95000"/>
+              </a:lnSpc>
+              <a:spcBef>
+                <a:spcPts val="0"/>
+              </a:spcBef>
+              <a:spcAft>
+                <a:spcPts val="0"/>
+              </a:spcAft>
+            </a:pPr>
+            <a:r>
+              <a:rPr sz="1600">
+                <a:solidFill>
+                  <a:srgbClr val="EEFFFF"/>
+                </a:solidFill>
+                <a:latin typeface="Consolas"/>
+              </a:rPr>
+              <a:t>        </a:t>
+            </a:r>
+            <a:r>
+              <a:rPr sz="1600">
+                <a:solidFill>
+                  <a:srgbClr val="C792EA"/>
+                </a:solidFill>
+                <a:latin typeface="Consolas"/>
+              </a:rPr>
+              <a:t>fn</a:t>
+            </a:r>
+            <a:r>
+              <a:rPr sz="1600">
+                <a:solidFill>
+                  <a:srgbClr val="EEFFFF"/>
+                </a:solidFill>
+                <a:latin typeface="Consolas"/>
+              </a:rPr>
+              <a:t> </a:t>
+            </a:r>
+            <a:r>
+              <a:rPr sz="1600">
+                <a:solidFill>
+                  <a:srgbClr val="82AAFF"/>
+                </a:solidFill>
+                <a:latin typeface="Consolas"/>
+              </a:rPr>
+              <a:t>max_value</a:t>
+            </a:r>
+            <a:r>
+              <a:rPr sz="1600">
+                <a:solidFill>
+                  <a:srgbClr val="BAC2DE"/>
+                </a:solidFill>
+                <a:latin typeface="Consolas"/>
+              </a:rPr>
+              <a:t>(</a:t>
+            </a:r>
+            <a:r>
+              <a:rPr sz="1600">
+                <a:solidFill>
+                  <a:srgbClr val="BAC2DE"/>
+                </a:solidFill>
+                <a:latin typeface="Consolas"/>
+              </a:rPr>
+              <a:t>)</a:t>
+            </a:r>
+            <a:r>
+              <a:rPr sz="1600">
+                <a:solidFill>
+                  <a:srgbClr val="EEFFFF"/>
+                </a:solidFill>
+                <a:latin typeface="Consolas"/>
+              </a:rPr>
+              <a:t> </a:t>
+            </a:r>
+            <a:r>
+              <a:rPr sz="1600">
+                <a:solidFill>
+                  <a:srgbClr val="BAC2DE"/>
+                </a:solidFill>
+                <a:latin typeface="Consolas"/>
+              </a:rPr>
+              <a:t>-&gt;</a:t>
+            </a:r>
+            <a:r>
+              <a:rPr sz="1600">
+                <a:solidFill>
+                  <a:srgbClr val="EEFFFF"/>
+                </a:solidFill>
+                <a:latin typeface="Consolas"/>
+              </a:rPr>
+              <a:t> </a:t>
+            </a:r>
+            <a:r>
+              <a:rPr sz="1600">
+                <a:solidFill>
+                  <a:srgbClr val="FFCB6B"/>
+                </a:solidFill>
+                <a:latin typeface="Consolas"/>
+              </a:rPr>
+              <a:t>Self</a:t>
+            </a:r>
+            <a:r>
+              <a:rPr sz="1600">
+                <a:solidFill>
+                  <a:srgbClr val="EEFFFF"/>
+                </a:solidFill>
+                <a:latin typeface="Consolas"/>
+              </a:rPr>
+              <a:t> </a:t>
+            </a:r>
+            <a:r>
+              <a:rPr sz="1600">
+                <a:solidFill>
+                  <a:srgbClr val="BAC2DE"/>
+                </a:solidFill>
+                <a:latin typeface="Consolas"/>
+              </a:rPr>
+              <a:t>{</a:t>
+            </a:r>
+          </a:p>
+          <a:p>
+            <a:pPr>
+              <a:lnSpc>
+                <a:spcPct val="95000"/>
+              </a:lnSpc>
+              <a:spcBef>
+                <a:spcPts val="0"/>
+              </a:spcBef>
+              <a:spcAft>
+                <a:spcPts val="0"/>
+              </a:spcAft>
+            </a:pPr>
+            <a:r>
+              <a:rPr sz="1600">
+                <a:solidFill>
+                  <a:srgbClr val="EEFFFF"/>
+                </a:solidFill>
+                <a:latin typeface="Consolas"/>
+              </a:rPr>
+              <a:t>            </a:t>
+            </a:r>
+            <a:r>
+              <a:rPr sz="1600">
+                <a:solidFill>
+                  <a:srgbClr val="89DDFF"/>
+                </a:solidFill>
+                <a:latin typeface="Consolas"/>
+              </a:rPr>
+              <a:t>&lt;</a:t>
+            </a:r>
+            <a:r>
+              <a:rPr sz="1600">
+                <a:solidFill>
+                  <a:srgbClr val="6A9955"/>
+                </a:solidFill>
+                <a:latin typeface="Consolas"/>
+              </a:rPr>
+              <a:t>$ip_type</a:t>
+            </a:r>
+            <a:r>
+              <a:rPr sz="1600">
+                <a:solidFill>
+                  <a:srgbClr val="89DDFF"/>
+                </a:solidFill>
+                <a:latin typeface="Consolas"/>
+              </a:rPr>
+              <a:t>&gt;</a:t>
+            </a:r>
+            <a:r>
+              <a:rPr sz="1600">
+                <a:solidFill>
+                  <a:srgbClr val="BAC2DE"/>
+                </a:solidFill>
+                <a:latin typeface="Consolas"/>
+              </a:rPr>
+              <a:t>::</a:t>
+            </a:r>
+            <a:r>
+              <a:rPr sz="1600">
+                <a:solidFill>
+                  <a:srgbClr val="EEFFFF"/>
+                </a:solidFill>
+                <a:latin typeface="Consolas"/>
+              </a:rPr>
+              <a:t>from</a:t>
+            </a:r>
+            <a:r>
+              <a:rPr sz="1600">
+                <a:solidFill>
+                  <a:srgbClr val="BAC2DE"/>
+                </a:solidFill>
+                <a:latin typeface="Consolas"/>
+              </a:rPr>
+              <a:t>(</a:t>
+            </a:r>
+            <a:r>
+              <a:rPr sz="1600">
+                <a:solidFill>
+                  <a:srgbClr val="89DDFF"/>
+                </a:solidFill>
+                <a:latin typeface="Consolas"/>
+              </a:rPr>
+              <a:t>&lt;</a:t>
+            </a:r>
+            <a:r>
+              <a:rPr sz="1600">
+                <a:solidFill>
+                  <a:srgbClr val="6A9955"/>
+                </a:solidFill>
+                <a:latin typeface="Consolas"/>
+              </a:rPr>
+              <a:t>$representation_type</a:t>
+            </a:r>
+            <a:r>
+              <a:rPr sz="1600">
+                <a:solidFill>
+                  <a:srgbClr val="89DDFF"/>
+                </a:solidFill>
+                <a:latin typeface="Consolas"/>
+              </a:rPr>
+              <a:t>&gt;</a:t>
+            </a:r>
+            <a:r>
+              <a:rPr sz="1600">
+                <a:solidFill>
+                  <a:srgbClr val="BAC2DE"/>
+                </a:solidFill>
+                <a:latin typeface="Consolas"/>
+              </a:rPr>
+              <a:t>::</a:t>
+            </a:r>
+            <a:r>
+              <a:rPr sz="1600">
+                <a:solidFill>
+                  <a:srgbClr val="EEFFFF"/>
+                </a:solidFill>
+                <a:latin typeface="Consolas"/>
+              </a:rPr>
+              <a:t>MAX</a:t>
+            </a:r>
+            <a:r>
+              <a:rPr sz="1600">
+                <a:solidFill>
+                  <a:srgbClr val="BAC2DE"/>
+                </a:solidFill>
+                <a:latin typeface="Consolas"/>
+              </a:rPr>
+              <a:t>)</a:t>
+            </a:r>
+          </a:p>
+          <a:p>
+            <a:pPr>
+              <a:lnSpc>
+                <a:spcPct val="95000"/>
+              </a:lnSpc>
+              <a:spcBef>
+                <a:spcPts val="0"/>
+              </a:spcBef>
+              <a:spcAft>
+                <a:spcPts val="0"/>
+              </a:spcAft>
+            </a:pPr>
+            <a:r>
+              <a:rPr sz="1600">
+                <a:solidFill>
+                  <a:srgbClr val="EEFFFF"/>
+                </a:solidFill>
+                <a:latin typeface="Consolas"/>
+              </a:rPr>
+              <a:t>        </a:t>
+            </a:r>
+            <a:r>
+              <a:rPr sz="1600">
+                <a:solidFill>
+                  <a:srgbClr val="BAC2DE"/>
+                </a:solidFill>
+                <a:latin typeface="Consolas"/>
+              </a:rPr>
+              <a:t>}</a:t>
+            </a:r>
+          </a:p>
+          <a:p>
+            <a:pPr>
+              <a:lnSpc>
+                <a:spcPct val="95000"/>
+              </a:lnSpc>
+              <a:spcBef>
+                <a:spcPts val="0"/>
+              </a:spcBef>
+              <a:spcAft>
+                <a:spcPts val="0"/>
+              </a:spcAft>
+            </a:pPr>
+            <a:r>
+              <a:rPr sz="1600">
+                <a:solidFill>
+                  <a:srgbClr val="EEFFFF"/>
+                </a:solidFill>
+                <a:latin typeface="Consolas"/>
+              </a:rPr>
+              <a:t>    </a:t>
+            </a:r>
+            <a:r>
+              <a:rPr sz="1600">
+                <a:solidFill>
+                  <a:srgbClr val="BAC2DE"/>
+                </a:solidFill>
+                <a:latin typeface="Consolas"/>
+              </a:rPr>
+              <a:t>}</a:t>
+            </a:r>
+            <a:r>
+              <a:rPr sz="1600">
+                <a:solidFill>
+                  <a:srgbClr val="BAC2DE"/>
+                </a:solidFill>
+                <a:latin typeface="Consolas"/>
+              </a:rPr>
+              <a:t>;</a:t>
+            </a:r>
+          </a:p>
+          <a:p>
+            <a:pPr>
+              <a:lnSpc>
+                <a:spcPct val="95000"/>
+              </a:lnSpc>
+              <a:spcBef>
+                <a:spcPts val="0"/>
+              </a:spcBef>
+              <a:spcAft>
+                <a:spcPts val="0"/>
+              </a:spcAft>
+            </a:pPr>
+            <a:r>
+              <a:rPr sz="1600">
+                <a:solidFill>
+                  <a:srgbClr val="BAC2DE"/>
+                </a:solidFill>
+                <a:latin typeface="Consolas"/>
+              </a:rPr>
+              <a:t>}</a:t>
+            </a:r>
+          </a:p>
+          <a:p>
+            <a:pPr>
+              <a:lnSpc>
+                <a:spcPct val="95000"/>
+              </a:lnSpc>
+              <a:spcBef>
+                <a:spcPts val="0"/>
+              </a:spcBef>
+              <a:spcAft>
+                <a:spcPts val="0"/>
+              </a:spcAft>
+            </a:pPr>
+          </a:p>
+          <a:p>
+            <a:pPr>
+              <a:lnSpc>
+                <a:spcPct val="95000"/>
+              </a:lnSpc>
+              <a:spcBef>
+                <a:spcPts val="0"/>
+              </a:spcBef>
+              <a:spcAft>
+                <a:spcPts val="0"/>
+              </a:spcAft>
+            </a:pPr>
+            <a:r>
+              <a:rPr sz="1600">
+                <a:solidFill>
+                  <a:srgbClr val="82AAFF"/>
+                </a:solidFill>
+                <a:latin typeface="Consolas"/>
+              </a:rPr>
+              <a:t>macro_rules!</a:t>
+            </a:r>
+            <a:r>
+              <a:rPr sz="1600">
+                <a:solidFill>
+                  <a:srgbClr val="EEFFFF"/>
+                </a:solidFill>
+                <a:latin typeface="Consolas"/>
+              </a:rPr>
+              <a:t> </a:t>
+            </a:r>
+            <a:r>
+              <a:rPr sz="1600">
+                <a:solidFill>
+                  <a:srgbClr val="EEFFFF"/>
+                </a:solidFill>
+                <a:latin typeface="Consolas"/>
+              </a:rPr>
+              <a:t>impl_integer_ops_char</a:t>
+            </a:r>
+            <a:r>
+              <a:rPr sz="1600">
+                <a:solidFill>
+                  <a:srgbClr val="EEFFFF"/>
+                </a:solidFill>
+                <a:latin typeface="Consolas"/>
+              </a:rPr>
+              <a:t> </a:t>
+            </a:r>
+            <a:r>
+              <a:rPr sz="1600">
+                <a:solidFill>
+                  <a:srgbClr val="BAC2DE"/>
+                </a:solidFill>
+                <a:latin typeface="Consolas"/>
+              </a:rPr>
+              <a:t>{</a:t>
+            </a:r>
+          </a:p>
+          <a:p>
+            <a:pPr>
+              <a:lnSpc>
+                <a:spcPct val="95000"/>
+              </a:lnSpc>
+              <a:spcBef>
+                <a:spcPts val="0"/>
+              </a:spcBef>
+              <a:spcAft>
+                <a:spcPts val="0"/>
+              </a:spcAft>
+            </a:pPr>
+            <a:r>
+              <a:rPr sz="1600">
+                <a:solidFill>
+                  <a:srgbClr val="EEFFFF"/>
+                </a:solidFill>
+                <a:latin typeface="Consolas"/>
+              </a:rPr>
+              <a:t>    </a:t>
+            </a:r>
+            <a:r>
+              <a:rPr sz="1600">
+                <a:solidFill>
+                  <a:srgbClr val="BAC2DE"/>
+                </a:solidFill>
+                <a:latin typeface="Consolas"/>
+              </a:rPr>
+              <a:t>(</a:t>
+            </a:r>
+            <a:r>
+              <a:rPr sz="1600">
+                <a:solidFill>
+                  <a:srgbClr val="BAC2DE"/>
+                </a:solidFill>
+                <a:latin typeface="Consolas"/>
+              </a:rPr>
+              <a:t>)</a:t>
+            </a:r>
+            <a:r>
+              <a:rPr sz="1600">
+                <a:solidFill>
+                  <a:srgbClr val="EEFFFF"/>
+                </a:solidFill>
+                <a:latin typeface="Consolas"/>
+              </a:rPr>
+              <a:t> </a:t>
+            </a:r>
+            <a:r>
+              <a:rPr sz="1600">
+                <a:solidFill>
+                  <a:srgbClr val="89DDFF"/>
+                </a:solidFill>
+                <a:latin typeface="Consolas"/>
+              </a:rPr>
+              <a:t>=</a:t>
+            </a:r>
+            <a:r>
+              <a:rPr sz="1600">
+                <a:solidFill>
+                  <a:srgbClr val="89DDFF"/>
+                </a:solidFill>
+                <a:latin typeface="Consolas"/>
+              </a:rPr>
+              <a:t>&gt;</a:t>
+            </a:r>
+            <a:r>
+              <a:rPr sz="1600">
+                <a:solidFill>
+                  <a:srgbClr val="EEFFFF"/>
+                </a:solidFill>
+                <a:latin typeface="Consolas"/>
+              </a:rPr>
+              <a:t> </a:t>
+            </a:r>
+            <a:r>
+              <a:rPr sz="1600">
+                <a:solidFill>
+                  <a:srgbClr val="BAC2DE"/>
+                </a:solidFill>
+                <a:latin typeface="Consolas"/>
+              </a:rPr>
+              <a:t>{</a:t>
+            </a:r>
+          </a:p>
+          <a:p>
+            <a:pPr>
+              <a:lnSpc>
+                <a:spcPct val="95000"/>
+              </a:lnSpc>
+              <a:spcBef>
+                <a:spcPts val="0"/>
+              </a:spcBef>
+              <a:spcAft>
+                <a:spcPts val="0"/>
+              </a:spcAft>
+            </a:pPr>
+            <a:r>
+              <a:rPr sz="1600">
+                <a:solidFill>
+                  <a:srgbClr val="EEFFFF"/>
+                </a:solidFill>
+                <a:latin typeface="Consolas"/>
+              </a:rPr>
+              <a:t>        </a:t>
+            </a:r>
+            <a:r>
+              <a:rPr sz="1600">
+                <a:solidFill>
+                  <a:srgbClr val="C792EA"/>
+                </a:solidFill>
+                <a:latin typeface="Consolas"/>
+              </a:rPr>
+              <a:t>fn</a:t>
+            </a:r>
+            <a:r>
+              <a:rPr sz="1600">
+                <a:solidFill>
+                  <a:srgbClr val="EEFFFF"/>
+                </a:solidFill>
+                <a:latin typeface="Consolas"/>
+              </a:rPr>
+              <a:t> </a:t>
+            </a:r>
+            <a:r>
+              <a:rPr sz="1600">
+                <a:solidFill>
+                  <a:srgbClr val="82AAFF"/>
+                </a:solidFill>
+                <a:latin typeface="Consolas"/>
+              </a:rPr>
+              <a:t>add_one</a:t>
+            </a:r>
+            <a:r>
+              <a:rPr sz="1600">
+                <a:solidFill>
+                  <a:srgbClr val="BAC2DE"/>
+                </a:solidFill>
+                <a:latin typeface="Consolas"/>
+              </a:rPr>
+              <a:t>(</a:t>
+            </a:r>
+            <a:r>
+              <a:rPr sz="1600">
+                <a:solidFill>
+                  <a:srgbClr val="89DDFF"/>
+                </a:solidFill>
+                <a:latin typeface="Consolas"/>
+              </a:rPr>
+              <a:t>self</a:t>
+            </a:r>
+            <a:r>
+              <a:rPr sz="1600">
+                <a:solidFill>
+                  <a:srgbClr val="BAC2DE"/>
+                </a:solidFill>
+                <a:latin typeface="Consolas"/>
+              </a:rPr>
+              <a:t>)</a:t>
+            </a:r>
+            <a:r>
+              <a:rPr sz="1600">
+                <a:solidFill>
+                  <a:srgbClr val="EEFFFF"/>
+                </a:solidFill>
+                <a:latin typeface="Consolas"/>
+              </a:rPr>
+              <a:t> </a:t>
+            </a:r>
+            <a:r>
+              <a:rPr sz="1600">
+                <a:solidFill>
+                  <a:srgbClr val="BAC2DE"/>
+                </a:solidFill>
+                <a:latin typeface="Consolas"/>
+              </a:rPr>
+              <a:t>-&gt;</a:t>
+            </a:r>
+            <a:r>
+              <a:rPr sz="1600">
+                <a:solidFill>
+                  <a:srgbClr val="EEFFFF"/>
+                </a:solidFill>
+                <a:latin typeface="Consolas"/>
+              </a:rPr>
+              <a:t> </a:t>
+            </a:r>
+            <a:r>
+              <a:rPr sz="1600">
+                <a:solidFill>
+                  <a:srgbClr val="FFCB6B"/>
+                </a:solidFill>
+                <a:latin typeface="Consolas"/>
+              </a:rPr>
+              <a:t>Self</a:t>
+            </a:r>
+            <a:r>
+              <a:rPr sz="1600">
+                <a:solidFill>
+                  <a:srgbClr val="EEFFFF"/>
+                </a:solidFill>
+                <a:latin typeface="Consolas"/>
+              </a:rPr>
+              <a:t> </a:t>
+            </a:r>
+            <a:r>
+              <a:rPr sz="1600">
+                <a:solidFill>
+                  <a:srgbClr val="BAC2DE"/>
+                </a:solidFill>
+                <a:latin typeface="Consolas"/>
+              </a:rPr>
+              <a:t>{</a:t>
+            </a:r>
+          </a:p>
+          <a:p>
+            <a:pPr>
+              <a:lnSpc>
+                <a:spcPct val="95000"/>
+              </a:lnSpc>
+              <a:spcBef>
+                <a:spcPts val="0"/>
+              </a:spcBef>
+              <a:spcAft>
+                <a:spcPts val="0"/>
+              </a:spcAft>
+            </a:pPr>
+            <a:r>
+              <a:rPr sz="1600">
+                <a:solidFill>
+                  <a:srgbClr val="EEFFFF"/>
+                </a:solidFill>
+                <a:latin typeface="Consolas"/>
+              </a:rPr>
+              <a:t>            </a:t>
+            </a:r>
+            <a:r>
+              <a:rPr sz="1600">
+                <a:solidFill>
+                  <a:srgbClr val="C792EA"/>
+                </a:solidFill>
+                <a:latin typeface="Consolas"/>
+              </a:rPr>
+              <a:t>let</a:t>
+            </a:r>
+            <a:r>
+              <a:rPr sz="1600">
+                <a:solidFill>
+                  <a:srgbClr val="EEFFFF"/>
+                </a:solidFill>
+                <a:latin typeface="Consolas"/>
+              </a:rPr>
+              <a:t> </a:t>
+            </a:r>
+            <a:r>
+              <a:rPr sz="1600">
+                <a:solidFill>
+                  <a:srgbClr val="C792EA"/>
+                </a:solidFill>
+                <a:latin typeface="Consolas"/>
+              </a:rPr>
+              <a:t>mut</a:t>
+            </a:r>
+            <a:r>
+              <a:rPr sz="1600">
+                <a:solidFill>
+                  <a:srgbClr val="EEFFFF"/>
+                </a:solidFill>
+                <a:latin typeface="Consolas"/>
+              </a:rPr>
+              <a:t> </a:t>
+            </a:r>
+            <a:r>
+              <a:rPr sz="1600">
+                <a:solidFill>
+                  <a:srgbClr val="EEFFFF"/>
+                </a:solidFill>
+                <a:latin typeface="Consolas"/>
+              </a:rPr>
+              <a:t>num</a:t>
+            </a:r>
+            <a:r>
+              <a:rPr sz="1600">
+                <a:solidFill>
+                  <a:srgbClr val="EEFFFF"/>
+                </a:solidFill>
+                <a:latin typeface="Consolas"/>
+              </a:rPr>
+              <a:t> </a:t>
+            </a:r>
+            <a:r>
+              <a:rPr sz="1600">
+                <a:solidFill>
+                  <a:srgbClr val="89DDFF"/>
+                </a:solidFill>
+                <a:latin typeface="Consolas"/>
+              </a:rPr>
+              <a:t>=</a:t>
+            </a:r>
+            <a:r>
+              <a:rPr sz="1600">
+                <a:solidFill>
+                  <a:srgbClr val="EEFFFF"/>
+                </a:solidFill>
+                <a:latin typeface="Consolas"/>
+              </a:rPr>
+              <a:t> </a:t>
+            </a:r>
+            <a:r>
+              <a:rPr sz="1600">
+                <a:solidFill>
+                  <a:srgbClr val="C792EA"/>
+                </a:solidFill>
+                <a:latin typeface="Consolas"/>
+              </a:rPr>
+              <a:t>u32</a:t>
+            </a:r>
+            <a:r>
+              <a:rPr sz="1600">
+                <a:solidFill>
+                  <a:srgbClr val="BAC2DE"/>
+                </a:solidFill>
+                <a:latin typeface="Consolas"/>
+              </a:rPr>
+              <a:t>::</a:t>
+            </a:r>
+            <a:r>
+              <a:rPr sz="1600">
+                <a:solidFill>
+                  <a:srgbClr val="EEFFFF"/>
+                </a:solidFill>
+                <a:latin typeface="Consolas"/>
+              </a:rPr>
+              <a:t>from</a:t>
+            </a:r>
+            <a:r>
+              <a:rPr sz="1600">
+                <a:solidFill>
+                  <a:srgbClr val="BAC2DE"/>
+                </a:solidFill>
+                <a:latin typeface="Consolas"/>
+              </a:rPr>
+              <a:t>(</a:t>
+            </a:r>
+            <a:r>
+              <a:rPr sz="1600">
+                <a:solidFill>
+                  <a:srgbClr val="89DDFF"/>
+                </a:solidFill>
+                <a:latin typeface="Consolas"/>
+              </a:rPr>
+              <a:t>self</a:t>
+            </a:r>
+            <a:r>
+              <a:rPr sz="1600">
+                <a:solidFill>
+                  <a:srgbClr val="BAC2DE"/>
+                </a:solidFill>
+                <a:latin typeface="Consolas"/>
+              </a:rPr>
+              <a:t>)</a:t>
+            </a:r>
+            <a:r>
+              <a:rPr sz="1600">
+                <a:solidFill>
+                  <a:srgbClr val="EEFFFF"/>
+                </a:solidFill>
+                <a:latin typeface="Consolas"/>
+              </a:rPr>
+              <a:t> </a:t>
+            </a:r>
+            <a:r>
+              <a:rPr sz="1600">
+                <a:solidFill>
+                  <a:srgbClr val="89DDFF"/>
+                </a:solidFill>
+                <a:latin typeface="Consolas"/>
+              </a:rPr>
+              <a:t>+</a:t>
+            </a:r>
+            <a:r>
+              <a:rPr sz="1600">
+                <a:solidFill>
+                  <a:srgbClr val="EEFFFF"/>
+                </a:solidFill>
+                <a:latin typeface="Consolas"/>
+              </a:rPr>
+              <a:t> </a:t>
+            </a:r>
+            <a:r>
+              <a:rPr sz="1600">
+                <a:solidFill>
+                  <a:srgbClr val="F78C6C"/>
+                </a:solidFill>
+                <a:latin typeface="Consolas"/>
+              </a:rPr>
+              <a:t>1</a:t>
+            </a:r>
+            <a:r>
+              <a:rPr sz="1600">
+                <a:solidFill>
+                  <a:srgbClr val="BAC2DE"/>
+                </a:solidFill>
+                <a:latin typeface="Consolas"/>
+              </a:rPr>
+              <a:t>;</a:t>
+            </a:r>
+          </a:p>
+          <a:p>
+            <a:pPr>
+              <a:lnSpc>
+                <a:spcPct val="95000"/>
+              </a:lnSpc>
+              <a:spcBef>
+                <a:spcPts val="0"/>
+              </a:spcBef>
+              <a:spcAft>
+                <a:spcPts val="0"/>
+              </a:spcAft>
+            </a:pPr>
+            <a:r>
+              <a:rPr sz="1600">
+                <a:solidFill>
+                  <a:srgbClr val="EEFFFF"/>
+                </a:solidFill>
+                <a:latin typeface="Consolas"/>
+              </a:rPr>
+              <a:t>            </a:t>
+            </a:r>
+            <a:r>
+              <a:rPr sz="1600">
+                <a:solidFill>
+                  <a:srgbClr val="C792EA"/>
+                </a:solidFill>
+                <a:latin typeface="Consolas"/>
+              </a:rPr>
+              <a:t>if</a:t>
+            </a:r>
+            <a:r>
+              <a:rPr sz="1600">
+                <a:solidFill>
+                  <a:srgbClr val="EEFFFF"/>
+                </a:solidFill>
+                <a:latin typeface="Consolas"/>
+              </a:rPr>
+              <a:t> </a:t>
+            </a:r>
+            <a:r>
+              <a:rPr sz="1600">
+                <a:solidFill>
+                  <a:srgbClr val="EEFFFF"/>
+                </a:solidFill>
+                <a:latin typeface="Consolas"/>
+              </a:rPr>
+              <a:t>num</a:t>
+            </a:r>
+            <a:r>
+              <a:rPr sz="1600">
+                <a:solidFill>
+                  <a:srgbClr val="EEFFFF"/>
+                </a:solidFill>
+                <a:latin typeface="Consolas"/>
+              </a:rPr>
+              <a:t> </a:t>
+            </a:r>
+            <a:r>
+              <a:rPr sz="1600">
+                <a:solidFill>
+                  <a:srgbClr val="89DDFF"/>
+                </a:solidFill>
+                <a:latin typeface="Consolas"/>
+              </a:rPr>
+              <a:t>=</a:t>
+            </a:r>
+            <a:r>
+              <a:rPr sz="1600">
+                <a:solidFill>
+                  <a:srgbClr val="89DDFF"/>
+                </a:solidFill>
+                <a:latin typeface="Consolas"/>
+              </a:rPr>
+              <a:t>=</a:t>
+            </a:r>
+            <a:r>
+              <a:rPr sz="1600">
+                <a:solidFill>
+                  <a:srgbClr val="EEFFFF"/>
+                </a:solidFill>
+                <a:latin typeface="Consolas"/>
+              </a:rPr>
+              <a:t> </a:t>
+            </a:r>
+            <a:r>
+              <a:rPr sz="1600">
+                <a:solidFill>
+                  <a:srgbClr val="F78C6C"/>
+                </a:solidFill>
+                <a:latin typeface="Consolas"/>
+              </a:rPr>
+              <a:t>0xD800</a:t>
+            </a:r>
+            <a:r>
+              <a:rPr sz="1600">
+                <a:solidFill>
+                  <a:srgbClr val="EEFFFF"/>
+                </a:solidFill>
+                <a:latin typeface="Consolas"/>
+              </a:rPr>
+              <a:t> </a:t>
+            </a:r>
+            <a:r>
+              <a:rPr sz="1600">
+                <a:solidFill>
+                  <a:srgbClr val="BAC2DE"/>
+                </a:solidFill>
+                <a:latin typeface="Consolas"/>
+              </a:rPr>
+              <a:t>{</a:t>
+            </a:r>
+          </a:p>
+          <a:p>
+            <a:pPr>
+              <a:lnSpc>
+                <a:spcPct val="95000"/>
+              </a:lnSpc>
+              <a:spcBef>
+                <a:spcPts val="0"/>
+              </a:spcBef>
+              <a:spcAft>
+                <a:spcPts val="0"/>
+              </a:spcAft>
+            </a:pPr>
+            <a:r>
+              <a:rPr sz="1600">
+                <a:solidFill>
+                  <a:srgbClr val="EEFFFF"/>
+                </a:solidFill>
+                <a:latin typeface="Consolas"/>
+              </a:rPr>
+              <a:t>                </a:t>
+            </a:r>
+            <a:r>
+              <a:rPr sz="1600">
+                <a:solidFill>
+                  <a:srgbClr val="EEFFFF"/>
+                </a:solidFill>
+                <a:latin typeface="Consolas"/>
+              </a:rPr>
+              <a:t>num</a:t>
+            </a:r>
+            <a:r>
+              <a:rPr sz="1600">
+                <a:solidFill>
+                  <a:srgbClr val="EEFFFF"/>
+                </a:solidFill>
+                <a:latin typeface="Consolas"/>
+              </a:rPr>
+              <a:t> </a:t>
+            </a:r>
+            <a:r>
+              <a:rPr sz="1600">
+                <a:solidFill>
+                  <a:srgbClr val="89DDFF"/>
+                </a:solidFill>
+                <a:latin typeface="Consolas"/>
+              </a:rPr>
+              <a:t>=</a:t>
+            </a:r>
+            <a:r>
+              <a:rPr sz="1600">
+                <a:solidFill>
+                  <a:srgbClr val="EEFFFF"/>
+                </a:solidFill>
+                <a:latin typeface="Consolas"/>
+              </a:rPr>
+              <a:t> </a:t>
+            </a:r>
+            <a:r>
+              <a:rPr sz="1600">
+                <a:solidFill>
+                  <a:srgbClr val="F78C6C"/>
+                </a:solidFill>
+                <a:latin typeface="Consolas"/>
+              </a:rPr>
+              <a:t>0xE000</a:t>
+            </a:r>
+            <a:r>
+              <a:rPr sz="1600">
+                <a:solidFill>
+                  <a:srgbClr val="BAC2DE"/>
+                </a:solidFill>
+                <a:latin typeface="Consolas"/>
+              </a:rPr>
+              <a:t>;</a:t>
+            </a:r>
+          </a:p>
+          <a:p>
+            <a:pPr>
+              <a:lnSpc>
+                <a:spcPct val="95000"/>
+              </a:lnSpc>
+              <a:spcBef>
+                <a:spcPts val="0"/>
+              </a:spcBef>
+              <a:spcAft>
+                <a:spcPts val="0"/>
+              </a:spcAft>
+            </a:pPr>
+            <a:r>
+              <a:rPr sz="1600">
+                <a:solidFill>
+                  <a:srgbClr val="EEFFFF"/>
+                </a:solidFill>
+                <a:latin typeface="Consolas"/>
+              </a:rPr>
+              <a:t>            </a:t>
+            </a:r>
+            <a:r>
+              <a:rPr sz="1600">
+                <a:solidFill>
+                  <a:srgbClr val="BAC2DE"/>
+                </a:solidFill>
+                <a:latin typeface="Consolas"/>
+              </a:rPr>
+              <a:t>}</a:t>
+            </a:r>
+          </a:p>
+          <a:p>
+            <a:pPr>
+              <a:lnSpc>
+                <a:spcPct val="95000"/>
+              </a:lnSpc>
+              <a:spcBef>
+                <a:spcPts val="0"/>
+              </a:spcBef>
+              <a:spcAft>
+                <a:spcPts val="0"/>
+              </a:spcAft>
+            </a:pPr>
+            <a:r>
+              <a:rPr sz="1600">
+                <a:solidFill>
+                  <a:srgbClr val="EEFFFF"/>
+                </a:solidFill>
+                <a:latin typeface="Consolas"/>
+              </a:rPr>
+              <a:t>            </a:t>
+            </a:r>
+            <a:r>
+              <a:rPr sz="1600">
+                <a:solidFill>
+                  <a:srgbClr val="C792EA"/>
+                </a:solidFill>
+                <a:latin typeface="Consolas"/>
+              </a:rPr>
+              <a:t>char</a:t>
+            </a:r>
+            <a:r>
+              <a:rPr sz="1600">
+                <a:solidFill>
+                  <a:srgbClr val="BAC2DE"/>
+                </a:solidFill>
+                <a:latin typeface="Consolas"/>
+              </a:rPr>
+              <a:t>::</a:t>
+            </a:r>
+            <a:r>
+              <a:rPr sz="1600">
+                <a:solidFill>
+                  <a:srgbClr val="EEFFFF"/>
+                </a:solidFill>
+                <a:latin typeface="Consolas"/>
+              </a:rPr>
+              <a:t>from_u32</a:t>
+            </a:r>
+            <a:r>
+              <a:rPr sz="1600">
+                <a:solidFill>
+                  <a:srgbClr val="BAC2DE"/>
+                </a:solidFill>
+                <a:latin typeface="Consolas"/>
+              </a:rPr>
+              <a:t>(</a:t>
+            </a:r>
+            <a:r>
+              <a:rPr sz="1600">
+                <a:solidFill>
+                  <a:srgbClr val="EEFFFF"/>
+                </a:solidFill>
+                <a:latin typeface="Consolas"/>
+              </a:rPr>
+              <a:t>num</a:t>
+            </a:r>
+            <a:r>
+              <a:rPr sz="1600">
+                <a:solidFill>
+                  <a:srgbClr val="BAC2DE"/>
+                </a:solidFill>
+                <a:latin typeface="Consolas"/>
+              </a:rPr>
+              <a:t>)</a:t>
+            </a:r>
+            <a:r>
+              <a:rPr sz="1600">
+                <a:solidFill>
+                  <a:srgbClr val="BAC2DE"/>
+                </a:solidFill>
+                <a:latin typeface="Consolas"/>
+              </a:rPr>
+              <a:t>.</a:t>
+            </a:r>
+            <a:r>
+              <a:rPr sz="1600">
+                <a:solidFill>
+                  <a:srgbClr val="EEFFFF"/>
+                </a:solidFill>
+                <a:latin typeface="Consolas"/>
+              </a:rPr>
+              <a:t>unwrap_or</a:t>
+            </a:r>
+            <a:r>
+              <a:rPr sz="1600">
+                <a:solidFill>
+                  <a:srgbClr val="BAC2DE"/>
+                </a:solidFill>
+                <a:latin typeface="Consolas"/>
+              </a:rPr>
+              <a:t>(</a:t>
+            </a:r>
+            <a:r>
+              <a:rPr sz="1600">
+                <a:solidFill>
+                  <a:srgbClr val="C792EA"/>
+                </a:solidFill>
+                <a:latin typeface="Consolas"/>
+              </a:rPr>
+              <a:t>char</a:t>
+            </a:r>
+            <a:r>
+              <a:rPr sz="1600">
+                <a:solidFill>
+                  <a:srgbClr val="BAC2DE"/>
+                </a:solidFill>
+                <a:latin typeface="Consolas"/>
+              </a:rPr>
+              <a:t>::</a:t>
+            </a:r>
+            <a:r>
+              <a:rPr sz="1600">
+                <a:solidFill>
+                  <a:srgbClr val="EEFFFF"/>
+                </a:solidFill>
+                <a:latin typeface="Consolas"/>
+              </a:rPr>
+              <a:t>MIN</a:t>
+            </a:r>
+            <a:r>
+              <a:rPr sz="1600">
+                <a:solidFill>
+                  <a:srgbClr val="BAC2DE"/>
+                </a:solidFill>
+                <a:latin typeface="Consolas"/>
+              </a:rPr>
+              <a:t>)</a:t>
+            </a:r>
+          </a:p>
+          <a:p>
+            <a:pPr>
+              <a:lnSpc>
+                <a:spcPct val="95000"/>
+              </a:lnSpc>
+              <a:spcBef>
+                <a:spcPts val="0"/>
+              </a:spcBef>
+              <a:spcAft>
+                <a:spcPts val="0"/>
+              </a:spcAft>
+            </a:pPr>
+            <a:r>
+              <a:rPr sz="1600">
+                <a:solidFill>
+                  <a:srgbClr val="EEFFFF"/>
+                </a:solidFill>
+                <a:latin typeface="Consolas"/>
+              </a:rPr>
+              <a:t>        </a:t>
+            </a:r>
+            <a:r>
+              <a:rPr sz="1600">
+                <a:solidFill>
+                  <a:srgbClr val="BAC2DE"/>
+                </a:solidFill>
+                <a:latin typeface="Consolas"/>
+              </a:rPr>
+              <a:t>}</a:t>
+            </a:r>
+          </a:p>
+          <a:p>
+            <a:pPr>
+              <a:lnSpc>
+                <a:spcPct val="95000"/>
+              </a:lnSpc>
+              <a:spcBef>
+                <a:spcPts val="0"/>
+              </a:spcBef>
+              <a:spcAft>
+                <a:spcPts val="0"/>
+              </a:spcAft>
+            </a:pPr>
+          </a:p>
+          <a:p>
+            <a:pPr>
+              <a:lnSpc>
+                <a:spcPct val="95000"/>
+              </a:lnSpc>
+              <a:spcBef>
+                <a:spcPts val="0"/>
+              </a:spcBef>
+              <a:spcAft>
+                <a:spcPts val="0"/>
+              </a:spcAft>
+            </a:pPr>
+            <a:r>
+              <a:rPr sz="1600">
+                <a:solidFill>
+                  <a:srgbClr val="EEFFFF"/>
+                </a:solidFill>
+                <a:latin typeface="Consolas"/>
+              </a:rPr>
+              <a:t>        </a:t>
+            </a:r>
+            <a:r>
+              <a:rPr sz="1600">
+                <a:solidFill>
+                  <a:srgbClr val="C792EA"/>
+                </a:solidFill>
+                <a:latin typeface="Consolas"/>
+              </a:rPr>
+              <a:t>fn</a:t>
+            </a:r>
+            <a:r>
+              <a:rPr sz="1600">
+                <a:solidFill>
+                  <a:srgbClr val="EEFFFF"/>
+                </a:solidFill>
+                <a:latin typeface="Consolas"/>
+              </a:rPr>
+              <a:t> </a:t>
+            </a:r>
+            <a:r>
+              <a:rPr sz="1600">
+                <a:solidFill>
+                  <a:srgbClr val="82AAFF"/>
+                </a:solidFill>
+                <a:latin typeface="Consolas"/>
+              </a:rPr>
+              <a:t>min_value</a:t>
+            </a:r>
+            <a:r>
+              <a:rPr sz="1600">
+                <a:solidFill>
+                  <a:srgbClr val="BAC2DE"/>
+                </a:solidFill>
+                <a:latin typeface="Consolas"/>
+              </a:rPr>
+              <a:t>(</a:t>
+            </a:r>
+            <a:r>
+              <a:rPr sz="1600">
+                <a:solidFill>
+                  <a:srgbClr val="BAC2DE"/>
+                </a:solidFill>
+                <a:latin typeface="Consolas"/>
+              </a:rPr>
+              <a:t>)</a:t>
+            </a:r>
+            <a:r>
+              <a:rPr sz="1600">
+                <a:solidFill>
+                  <a:srgbClr val="EEFFFF"/>
+                </a:solidFill>
+                <a:latin typeface="Consolas"/>
+              </a:rPr>
+              <a:t> </a:t>
+            </a:r>
+            <a:r>
+              <a:rPr sz="1600">
+                <a:solidFill>
+                  <a:srgbClr val="BAC2DE"/>
+                </a:solidFill>
+                <a:latin typeface="Consolas"/>
+              </a:rPr>
+              <a:t>-&gt;</a:t>
+            </a:r>
+            <a:r>
+              <a:rPr sz="1600">
+                <a:solidFill>
+                  <a:srgbClr val="EEFFFF"/>
+                </a:solidFill>
+                <a:latin typeface="Consolas"/>
+              </a:rPr>
+              <a:t> </a:t>
+            </a:r>
+            <a:r>
+              <a:rPr sz="1600">
+                <a:solidFill>
+                  <a:srgbClr val="FFCB6B"/>
+                </a:solidFill>
+                <a:latin typeface="Consolas"/>
+              </a:rPr>
+              <a:t>Self</a:t>
+            </a:r>
+            <a:r>
+              <a:rPr sz="1600">
+                <a:solidFill>
+                  <a:srgbClr val="EEFFFF"/>
+                </a:solidFill>
+                <a:latin typeface="Consolas"/>
+              </a:rPr>
+              <a:t> </a:t>
+            </a:r>
+            <a:r>
+              <a:rPr sz="1600">
+                <a:solidFill>
+                  <a:srgbClr val="BAC2DE"/>
+                </a:solidFill>
+                <a:latin typeface="Consolas"/>
+              </a:rPr>
+              <a:t>{</a:t>
+            </a:r>
+          </a:p>
+          <a:p>
+            <a:pPr>
+              <a:lnSpc>
+                <a:spcPct val="95000"/>
+              </a:lnSpc>
+              <a:spcBef>
+                <a:spcPts val="0"/>
+              </a:spcBef>
+              <a:spcAft>
+                <a:spcPts val="0"/>
+              </a:spcAft>
+            </a:pPr>
+            <a:r>
+              <a:rPr sz="1600">
+                <a:solidFill>
+                  <a:srgbClr val="EEFFFF"/>
+                </a:solidFill>
+                <a:latin typeface="Consolas"/>
+              </a:rPr>
+              <a:t>            </a:t>
+            </a:r>
+            <a:r>
+              <a:rPr sz="1600">
+                <a:solidFill>
+                  <a:srgbClr val="C792EA"/>
+                </a:solidFill>
+                <a:latin typeface="Consolas"/>
+              </a:rPr>
+              <a:t>char</a:t>
+            </a:r>
+            <a:r>
+              <a:rPr sz="1600">
+                <a:solidFill>
+                  <a:srgbClr val="BAC2DE"/>
+                </a:solidFill>
+                <a:latin typeface="Consolas"/>
+              </a:rPr>
+              <a:t>::</a:t>
+            </a:r>
+            <a:r>
+              <a:rPr sz="1600">
+                <a:solidFill>
+                  <a:srgbClr val="EEFFFF"/>
+                </a:solidFill>
+                <a:latin typeface="Consolas"/>
+              </a:rPr>
+              <a:t>MIN</a:t>
+            </a:r>
+          </a:p>
+        </p:txBody>
+      </p:sp>
+    </p:spTree>
+  </p:cSld>
+  <p:clrMapOvr>
+    <a:masterClrMapping/>
+  </p:clrMapOvr>
+</p:sld>
+</file>
+
+<file path=ppt/slides/slide4.xml><?xml version="1.0" encoding="utf-8"?>
+<p:sld xmlns:a="http://schemas.openxmlformats.org/drawingml/2006/main" xmlns:p="http://schemas.openxmlformats.org/presentationml/2006/main" xmlns:r="http://schemas.openxmlformats.org/officeDocument/2006/relationships">
+  <p:cSld>
+    <p:spTree>
+      <p:nvGrpSpPr>
+        <p:cNvPr id="1" name=""/>
+        <p:cNvGrpSpPr/>
+        <p:nvPr/>
+      </p:nvGrpSpPr>
+      <p:grpSpPr/>
+      <p:sp>
+        <p:nvSpPr>
+          <p:cNvPr id="2" name="Rectangle 1"/>
+          <p:cNvSpPr/>
+          <p:nvPr/>
+        </p:nvSpPr>
+        <p:spPr>
+          <a:xfrm>
+            <a:off x="0" y="0"/>
+            <a:ext cx="9144000" cy="6858000"/>
+          </a:xfrm>
+          <a:prstGeom prst="rect">
+            <a:avLst/>
+          </a:prstGeom>
+          <a:solidFill>
+            <a:srgbClr val="000000"/>
+          </a:solidFill>
+          <a:ln>
+            <a:noFill/>
+          </a:ln>
+        </p:spPr>
+        <p:style>
+          <a:lnRef idx="1">
+            <a:schemeClr val="accent1"/>
+          </a:lnRef>
+          <a:fillRef idx="3">
+            <a:schemeClr val="accent1"/>
+          </a:fillRef>
+          <a:effectRef idx="2">
+            <a:schemeClr val="accent1"/>
+          </a:effectRef>
+          <a:fontRef idx="minor">
+            <a:schemeClr val="lt1"/>
+          </a:fontRef>
+        </p:style>
+        <p:txBody>
+          <a:bodyPr rtlCol="0" anchor="ctr"/>
+          <a:lstStyle/>
+          <a:p>
+            <a:pPr algn="ctr"/>
+          </a:p>
+        </p:txBody>
+      </p:sp>
+      <p:sp>
+        <p:nvSpPr>
+          <p:cNvPr id="3" name="TextBox 2"/>
+          <p:cNvSpPr txBox="1"/>
+          <p:nvPr/>
+        </p:nvSpPr>
+        <p:spPr>
+          <a:xfrm>
+            <a:off x="164592" y="109728"/>
+            <a:ext cx="8814816" cy="6638544"/>
+          </a:xfrm>
+          <a:prstGeom prst="rect">
+            <a:avLst/>
+          </a:prstGeom>
+          <a:noFill/>
+        </p:spPr>
+        <p:txBody>
+          <a:bodyPr wrap="square">
+            <a:noAutofit/>
+          </a:bodyPr>
+          <a:lstStyle/>
+          <a:p>
+            <a:pPr>
+              <a:lnSpc>
+                <a:spcPct val="95000"/>
+              </a:lnSpc>
+              <a:spcBef>
+                <a:spcPts val="0"/>
+              </a:spcBef>
+              <a:spcAft>
+                <a:spcPts val="0"/>
+              </a:spcAft>
+            </a:pPr>
+            <a:r>
+              <a:rPr sz="1600">
+                <a:solidFill>
+                  <a:srgbClr val="EEFFFF"/>
+                </a:solidFill>
+                <a:latin typeface="Consolas"/>
+              </a:rPr>
+              <a:t>        </a:t>
+            </a:r>
+            <a:r>
+              <a:rPr sz="1600">
+                <a:solidFill>
+                  <a:srgbClr val="BAC2DE"/>
+                </a:solidFill>
+                <a:latin typeface="Consolas"/>
+              </a:rPr>
+              <a:t>}</a:t>
+            </a:r>
+          </a:p>
+          <a:p>
+            <a:pPr>
+              <a:lnSpc>
+                <a:spcPct val="95000"/>
+              </a:lnSpc>
+              <a:spcBef>
+                <a:spcPts val="0"/>
+              </a:spcBef>
+              <a:spcAft>
+                <a:spcPts val="0"/>
+              </a:spcAft>
+            </a:pPr>
+          </a:p>
+          <a:p>
+            <a:pPr>
+              <a:lnSpc>
+                <a:spcPct val="95000"/>
+              </a:lnSpc>
+              <a:spcBef>
+                <a:spcPts val="0"/>
+              </a:spcBef>
+              <a:spcAft>
+                <a:spcPts val="0"/>
+              </a:spcAft>
+            </a:pPr>
+            <a:r>
+              <a:rPr sz="1600">
+                <a:solidFill>
+                  <a:srgbClr val="EEFFFF"/>
+                </a:solidFill>
+                <a:latin typeface="Consolas"/>
+              </a:rPr>
+              <a:t>        </a:t>
+            </a:r>
+            <a:r>
+              <a:rPr sz="1600">
+                <a:solidFill>
+                  <a:srgbClr val="C792EA"/>
+                </a:solidFill>
+                <a:latin typeface="Consolas"/>
+              </a:rPr>
+              <a:t>fn</a:t>
+            </a:r>
+            <a:r>
+              <a:rPr sz="1600">
+                <a:solidFill>
+                  <a:srgbClr val="EEFFFF"/>
+                </a:solidFill>
+                <a:latin typeface="Consolas"/>
+              </a:rPr>
+              <a:t> </a:t>
+            </a:r>
+            <a:r>
+              <a:rPr sz="1600">
+                <a:solidFill>
+                  <a:srgbClr val="82AAFF"/>
+                </a:solidFill>
+                <a:latin typeface="Consolas"/>
+              </a:rPr>
+              <a:t>max_value</a:t>
+            </a:r>
+            <a:r>
+              <a:rPr sz="1600">
+                <a:solidFill>
+                  <a:srgbClr val="BAC2DE"/>
+                </a:solidFill>
+                <a:latin typeface="Consolas"/>
+              </a:rPr>
+              <a:t>(</a:t>
+            </a:r>
+            <a:r>
+              <a:rPr sz="1600">
+                <a:solidFill>
+                  <a:srgbClr val="BAC2DE"/>
+                </a:solidFill>
+                <a:latin typeface="Consolas"/>
+              </a:rPr>
+              <a:t>)</a:t>
+            </a:r>
+            <a:r>
+              <a:rPr sz="1600">
+                <a:solidFill>
+                  <a:srgbClr val="EEFFFF"/>
+                </a:solidFill>
+                <a:latin typeface="Consolas"/>
+              </a:rPr>
+              <a:t> </a:t>
+            </a:r>
+            <a:r>
+              <a:rPr sz="1600">
+                <a:solidFill>
+                  <a:srgbClr val="BAC2DE"/>
+                </a:solidFill>
+                <a:latin typeface="Consolas"/>
+              </a:rPr>
+              <a:t>-&gt;</a:t>
+            </a:r>
+            <a:r>
+              <a:rPr sz="1600">
+                <a:solidFill>
+                  <a:srgbClr val="EEFFFF"/>
+                </a:solidFill>
+                <a:latin typeface="Consolas"/>
+              </a:rPr>
+              <a:t> </a:t>
+            </a:r>
+            <a:r>
+              <a:rPr sz="1600">
+                <a:solidFill>
+                  <a:srgbClr val="FFCB6B"/>
+                </a:solidFill>
+                <a:latin typeface="Consolas"/>
+              </a:rPr>
+              <a:t>Self</a:t>
+            </a:r>
+            <a:r>
+              <a:rPr sz="1600">
+                <a:solidFill>
+                  <a:srgbClr val="EEFFFF"/>
+                </a:solidFill>
+                <a:latin typeface="Consolas"/>
+              </a:rPr>
+              <a:t> </a:t>
+            </a:r>
+            <a:r>
+              <a:rPr sz="1600">
+                <a:solidFill>
+                  <a:srgbClr val="BAC2DE"/>
+                </a:solidFill>
+                <a:latin typeface="Consolas"/>
+              </a:rPr>
+              <a:t>{</a:t>
+            </a:r>
+          </a:p>
+          <a:p>
+            <a:pPr>
+              <a:lnSpc>
+                <a:spcPct val="95000"/>
+              </a:lnSpc>
+              <a:spcBef>
+                <a:spcPts val="0"/>
+              </a:spcBef>
+              <a:spcAft>
+                <a:spcPts val="0"/>
+              </a:spcAft>
+            </a:pPr>
+            <a:r>
+              <a:rPr sz="1600">
+                <a:solidFill>
+                  <a:srgbClr val="EEFFFF"/>
+                </a:solidFill>
+                <a:latin typeface="Consolas"/>
+              </a:rPr>
+              <a:t>            </a:t>
+            </a:r>
+            <a:r>
+              <a:rPr sz="1600">
+                <a:solidFill>
+                  <a:srgbClr val="C792EA"/>
+                </a:solidFill>
+                <a:latin typeface="Consolas"/>
+              </a:rPr>
+              <a:t>char</a:t>
+            </a:r>
+            <a:r>
+              <a:rPr sz="1600">
+                <a:solidFill>
+                  <a:srgbClr val="BAC2DE"/>
+                </a:solidFill>
+                <a:latin typeface="Consolas"/>
+              </a:rPr>
+              <a:t>::</a:t>
+            </a:r>
+            <a:r>
+              <a:rPr sz="1600">
+                <a:solidFill>
+                  <a:srgbClr val="EEFFFF"/>
+                </a:solidFill>
+                <a:latin typeface="Consolas"/>
+              </a:rPr>
+              <a:t>MAX</a:t>
+            </a:r>
+          </a:p>
+          <a:p>
+            <a:pPr>
+              <a:lnSpc>
+                <a:spcPct val="95000"/>
+              </a:lnSpc>
+              <a:spcBef>
+                <a:spcPts val="0"/>
+              </a:spcBef>
+              <a:spcAft>
+                <a:spcPts val="0"/>
+              </a:spcAft>
+            </a:pPr>
+            <a:r>
+              <a:rPr sz="1600">
+                <a:solidFill>
+                  <a:srgbClr val="EEFFFF"/>
+                </a:solidFill>
+                <a:latin typeface="Consolas"/>
+              </a:rPr>
+              <a:t>        </a:t>
+            </a:r>
+            <a:r>
+              <a:rPr sz="1600">
+                <a:solidFill>
+                  <a:srgbClr val="BAC2DE"/>
+                </a:solidFill>
+                <a:latin typeface="Consolas"/>
+              </a:rPr>
+              <a:t>}</a:t>
+            </a:r>
+          </a:p>
+          <a:p>
+            <a:pPr>
+              <a:lnSpc>
+                <a:spcPct val="95000"/>
+              </a:lnSpc>
+              <a:spcBef>
+                <a:spcPts val="0"/>
+              </a:spcBef>
+              <a:spcAft>
+                <a:spcPts val="0"/>
+              </a:spcAft>
+            </a:pPr>
+            <a:r>
+              <a:rPr sz="1600">
+                <a:solidFill>
+                  <a:srgbClr val="EEFFFF"/>
+                </a:solidFill>
+                <a:latin typeface="Consolas"/>
+              </a:rPr>
+              <a:t>    </a:t>
+            </a:r>
+            <a:r>
+              <a:rPr sz="1600">
+                <a:solidFill>
+                  <a:srgbClr val="BAC2DE"/>
+                </a:solidFill>
+                <a:latin typeface="Consolas"/>
+              </a:rPr>
+              <a:t>}</a:t>
+            </a:r>
+            <a:r>
+              <a:rPr sz="1600">
+                <a:solidFill>
+                  <a:srgbClr val="BAC2DE"/>
+                </a:solidFill>
+                <a:latin typeface="Consolas"/>
+              </a:rPr>
+              <a:t>;</a:t>
+            </a:r>
+          </a:p>
+          <a:p>
+            <a:pPr>
+              <a:lnSpc>
+                <a:spcPct val="95000"/>
+              </a:lnSpc>
+              <a:spcBef>
+                <a:spcPts val="0"/>
+              </a:spcBef>
+              <a:spcAft>
+                <a:spcPts val="0"/>
+              </a:spcAft>
+            </a:pPr>
+            <a:r>
+              <a:rPr sz="1600">
+                <a:solidFill>
+                  <a:srgbClr val="BAC2DE"/>
+                </a:solidFill>
+                <a:latin typeface="Consolas"/>
+              </a:rPr>
+              <a:t>}</a:t>
+            </a:r>
+          </a:p>
+          <a:p>
+            <a:pPr>
+              <a:lnSpc>
+                <a:spcPct val="95000"/>
+              </a:lnSpc>
+              <a:spcBef>
+                <a:spcPts val="0"/>
+              </a:spcBef>
+              <a:spcAft>
+                <a:spcPts val="0"/>
+              </a:spcAft>
+            </a:pPr>
+          </a:p>
+          <a:p>
+            <a:pPr>
+              <a:lnSpc>
+                <a:spcPct val="95000"/>
+              </a:lnSpc>
+              <a:spcBef>
+                <a:spcPts val="0"/>
+              </a:spcBef>
+              <a:spcAft>
+                <a:spcPts val="0"/>
+              </a:spcAft>
+            </a:pPr>
+            <a:r>
+              <a:rPr sz="1600">
+                <a:solidFill>
+                  <a:srgbClr val="C792EA"/>
+                </a:solidFill>
+                <a:latin typeface="Consolas"/>
+              </a:rPr>
+              <a:t>impl</a:t>
+            </a:r>
+            <a:r>
+              <a:rPr sz="1600">
+                <a:solidFill>
+                  <a:srgbClr val="EEFFFF"/>
+                </a:solidFill>
+                <a:latin typeface="Consolas"/>
+              </a:rPr>
+              <a:t> </a:t>
+            </a:r>
+            <a:r>
+              <a:rPr sz="1600">
+                <a:solidFill>
+                  <a:srgbClr val="EEFFFF"/>
+                </a:solidFill>
+                <a:latin typeface="Consolas"/>
+              </a:rPr>
+              <a:t>Integer</a:t>
+            </a:r>
+            <a:r>
+              <a:rPr sz="1600">
+                <a:solidFill>
+                  <a:srgbClr val="EEFFFF"/>
+                </a:solidFill>
+                <a:latin typeface="Consolas"/>
+              </a:rPr>
+              <a:t> </a:t>
+            </a:r>
+            <a:r>
+              <a:rPr sz="1600">
+                <a:solidFill>
+                  <a:srgbClr val="C792EA"/>
+                </a:solidFill>
+                <a:latin typeface="Consolas"/>
+              </a:rPr>
+              <a:t>for</a:t>
+            </a:r>
+            <a:r>
+              <a:rPr sz="1600">
+                <a:solidFill>
+                  <a:srgbClr val="EEFFFF"/>
+                </a:solidFill>
+                <a:latin typeface="Consolas"/>
+              </a:rPr>
+              <a:t> </a:t>
+            </a:r>
+            <a:r>
+              <a:rPr sz="1600">
+                <a:solidFill>
+                  <a:srgbClr val="C792EA"/>
+                </a:solidFill>
+                <a:latin typeface="Consolas"/>
+              </a:rPr>
+              <a:t>i8</a:t>
+            </a:r>
+            <a:r>
+              <a:rPr sz="1600">
+                <a:solidFill>
+                  <a:srgbClr val="EEFFFF"/>
+                </a:solidFill>
+                <a:latin typeface="Consolas"/>
+              </a:rPr>
+              <a:t> </a:t>
+            </a:r>
+            <a:r>
+              <a:rPr sz="1600">
+                <a:solidFill>
+                  <a:srgbClr val="BAC2DE"/>
+                </a:solidFill>
+                <a:latin typeface="Consolas"/>
+              </a:rPr>
+              <a:t>{</a:t>
+            </a:r>
+            <a:r>
+              <a:rPr sz="1600">
+                <a:solidFill>
+                  <a:srgbClr val="EEFFFF"/>
+                </a:solidFill>
+                <a:latin typeface="Consolas"/>
+              </a:rPr>
+              <a:t> </a:t>
+            </a:r>
+            <a:r>
+              <a:rPr sz="1600">
+                <a:solidFill>
+                  <a:srgbClr val="EEFFFF"/>
+                </a:solidFill>
+                <a:latin typeface="Consolas"/>
+              </a:rPr>
+              <a:t>impl_integer_ops_num</a:t>
+            </a:r>
+            <a:r>
+              <a:rPr sz="1600">
+                <a:solidFill>
+                  <a:srgbClr val="89DDFF"/>
+                </a:solidFill>
+                <a:latin typeface="Consolas"/>
+              </a:rPr>
               <a:t>!</a:t>
             </a:r>
             <a:r>
               <a:rPr sz="1600">
                 <a:solidFill>
+                  <a:srgbClr val="BAC2DE"/>
+                </a:solidFill>
+                <a:latin typeface="Consolas"/>
+              </a:rPr>
+              <a:t>(</a:t>
+            </a:r>
+            <a:r>
+              <a:rPr sz="1600">
+                <a:solidFill>
+                  <a:srgbClr val="C792EA"/>
+                </a:solidFill>
+                <a:latin typeface="Consolas"/>
+              </a:rPr>
+              <a:t>i8</a:t>
+            </a:r>
+            <a:r>
+              <a:rPr sz="1600">
+                <a:solidFill>
+                  <a:srgbClr val="BAC2DE"/>
+                </a:solidFill>
+                <a:latin typeface="Consolas"/>
+              </a:rPr>
+              <a:t>)</a:t>
+            </a:r>
+            <a:r>
+              <a:rPr sz="1600">
+                <a:solidFill>
+                  <a:srgbClr val="BAC2DE"/>
+                </a:solidFill>
+                <a:latin typeface="Consolas"/>
+              </a:rPr>
+              <a:t>;</a:t>
+            </a:r>
+            <a:r>
+              <a:rPr sz="1600">
+                <a:solidFill>
+                  <a:srgbClr val="EEFFFF"/>
+                </a:solidFill>
+                <a:latin typeface="Consolas"/>
+              </a:rPr>
+              <a:t> </a:t>
+            </a:r>
+            <a:r>
+              <a:rPr sz="1600">
+                <a:solidFill>
+                  <a:srgbClr val="BAC2DE"/>
+                </a:solidFill>
+                <a:latin typeface="Consolas"/>
+              </a:rPr>
+              <a:t>}</a:t>
+            </a:r>
+          </a:p>
+          <a:p>
+            <a:pPr>
+              <a:lnSpc>
+                <a:spcPct val="95000"/>
+              </a:lnSpc>
+              <a:spcBef>
+                <a:spcPts val="0"/>
+              </a:spcBef>
+              <a:spcAft>
+                <a:spcPts val="0"/>
+              </a:spcAft>
+            </a:pPr>
+            <a:r>
+              <a:rPr sz="1600">
+                <a:solidFill>
+                  <a:srgbClr val="C792EA"/>
+                </a:solidFill>
+                <a:latin typeface="Consolas"/>
+              </a:rPr>
+              <a:t>impl</a:t>
+            </a:r>
+            <a:r>
+              <a:rPr sz="1600">
+                <a:solidFill>
+                  <a:srgbClr val="EEFFFF"/>
+                </a:solidFill>
+                <a:latin typeface="Consolas"/>
+              </a:rPr>
+              <a:t> </a:t>
+            </a:r>
+            <a:r>
+              <a:rPr sz="1600">
+                <a:solidFill>
+                  <a:srgbClr val="EEFFFF"/>
+                </a:solidFill>
+                <a:latin typeface="Consolas"/>
+              </a:rPr>
+              <a:t>Integer</a:t>
+            </a:r>
+            <a:r>
+              <a:rPr sz="1600">
+                <a:solidFill>
+                  <a:srgbClr val="EEFFFF"/>
+                </a:solidFill>
+                <a:latin typeface="Consolas"/>
+              </a:rPr>
+              <a:t> </a:t>
+            </a:r>
+            <a:r>
+              <a:rPr sz="1600">
+                <a:solidFill>
+                  <a:srgbClr val="C792EA"/>
+                </a:solidFill>
+                <a:latin typeface="Consolas"/>
+              </a:rPr>
+              <a:t>for</a:t>
+            </a:r>
+            <a:r>
+              <a:rPr sz="1600">
+                <a:solidFill>
+                  <a:srgbClr val="EEFFFF"/>
+                </a:solidFill>
+                <a:latin typeface="Consolas"/>
+              </a:rPr>
+              <a:t> </a:t>
+            </a:r>
+            <a:r>
+              <a:rPr sz="1600">
+                <a:solidFill>
+                  <a:srgbClr val="C792EA"/>
+                </a:solidFill>
+                <a:latin typeface="Consolas"/>
+              </a:rPr>
+              <a:t>u8</a:t>
+            </a:r>
+            <a:r>
+              <a:rPr sz="1600">
+                <a:solidFill>
+                  <a:srgbClr val="EEFFFF"/>
+                </a:solidFill>
+                <a:latin typeface="Consolas"/>
+              </a:rPr>
+              <a:t> </a:t>
+            </a:r>
+            <a:r>
+              <a:rPr sz="1600">
+                <a:solidFill>
+                  <a:srgbClr val="BAC2DE"/>
+                </a:solidFill>
+                <a:latin typeface="Consolas"/>
+              </a:rPr>
+              <a:t>{</a:t>
+            </a:r>
+            <a:r>
+              <a:rPr sz="1600">
+                <a:solidFill>
+                  <a:srgbClr val="EEFFFF"/>
+                </a:solidFill>
+                <a:latin typeface="Consolas"/>
+              </a:rPr>
+              <a:t> </a:t>
+            </a:r>
+            <a:r>
+              <a:rPr sz="1600">
+                <a:solidFill>
+                  <a:srgbClr val="EEFFFF"/>
+                </a:solidFill>
+                <a:latin typeface="Consolas"/>
+              </a:rPr>
+              <a:t>impl_integer_ops_num</a:t>
+            </a:r>
+            <a:r>
+              <a:rPr sz="1600">
+                <a:solidFill>
+                  <a:srgbClr val="89DDFF"/>
+                </a:solidFill>
+                <a:latin typeface="Consolas"/>
+              </a:rPr>
+              <a:t>!</a:t>
+            </a:r>
+            <a:r>
+              <a:rPr sz="1600">
+                <a:solidFill>
+                  <a:srgbClr val="BAC2DE"/>
+                </a:solidFill>
+                <a:latin typeface="Consolas"/>
+              </a:rPr>
+              <a:t>(</a:t>
+            </a:r>
+            <a:r>
+              <a:rPr sz="1600">
+                <a:solidFill>
+                  <a:srgbClr val="C792EA"/>
+                </a:solidFill>
+                <a:latin typeface="Consolas"/>
+              </a:rPr>
+              <a:t>u8</a:t>
+            </a:r>
+            <a:r>
+              <a:rPr sz="1600">
+                <a:solidFill>
+                  <a:srgbClr val="BAC2DE"/>
+                </a:solidFill>
+                <a:latin typeface="Consolas"/>
+              </a:rPr>
+              <a:t>)</a:t>
+            </a:r>
+            <a:r>
+              <a:rPr sz="1600">
+                <a:solidFill>
+                  <a:srgbClr val="BAC2DE"/>
+                </a:solidFill>
+                <a:latin typeface="Consolas"/>
+              </a:rPr>
+              <a:t>;</a:t>
+            </a:r>
+            <a:r>
+              <a:rPr sz="1600">
+                <a:solidFill>
+                  <a:srgbClr val="EEFFFF"/>
+                </a:solidFill>
+                <a:latin typeface="Consolas"/>
+              </a:rPr>
+              <a:t> </a:t>
+            </a:r>
+            <a:r>
+              <a:rPr sz="1600">
+                <a:solidFill>
+                  <a:srgbClr val="BAC2DE"/>
+                </a:solidFill>
+                <a:latin typeface="Consolas"/>
+              </a:rPr>
+              <a:t>}</a:t>
+            </a:r>
+          </a:p>
+          <a:p>
+            <a:pPr>
+              <a:lnSpc>
+                <a:spcPct val="95000"/>
+              </a:lnSpc>
+              <a:spcBef>
+                <a:spcPts val="0"/>
+              </a:spcBef>
+              <a:spcAft>
+                <a:spcPts val="0"/>
+              </a:spcAft>
+            </a:pPr>
+            <a:r>
+              <a:rPr sz="1600">
+                <a:solidFill>
+                  <a:srgbClr val="C792EA"/>
+                </a:solidFill>
+                <a:latin typeface="Consolas"/>
+              </a:rPr>
+              <a:t>impl</a:t>
+            </a:r>
+            <a:r>
+              <a:rPr sz="1600">
+                <a:solidFill>
+                  <a:srgbClr val="EEFFFF"/>
+                </a:solidFill>
+                <a:latin typeface="Consolas"/>
+              </a:rPr>
+              <a:t> </a:t>
+            </a:r>
+            <a:r>
+              <a:rPr sz="1600">
+                <a:solidFill>
+                  <a:srgbClr val="EEFFFF"/>
+                </a:solidFill>
+                <a:latin typeface="Consolas"/>
+              </a:rPr>
+              <a:t>Integer</a:t>
+            </a:r>
+            <a:r>
+              <a:rPr sz="1600">
+                <a:solidFill>
+                  <a:srgbClr val="EEFFFF"/>
+                </a:solidFill>
+                <a:latin typeface="Consolas"/>
+              </a:rPr>
+              <a:t> </a:t>
+            </a:r>
+            <a:r>
+              <a:rPr sz="1600">
+                <a:solidFill>
+                  <a:srgbClr val="C792EA"/>
+                </a:solidFill>
+                <a:latin typeface="Consolas"/>
+              </a:rPr>
+              <a:t>for</a:t>
+            </a:r>
+            <a:r>
+              <a:rPr sz="1600">
+                <a:solidFill>
+                  <a:srgbClr val="EEFFFF"/>
+                </a:solidFill>
+                <a:latin typeface="Consolas"/>
+              </a:rPr>
+              <a:t> </a:t>
+            </a:r>
+            <a:r>
+              <a:rPr sz="1600">
+                <a:solidFill>
+                  <a:srgbClr val="C792EA"/>
+                </a:solidFill>
+                <a:latin typeface="Consolas"/>
+              </a:rPr>
+              <a:t>i16</a:t>
+            </a:r>
+            <a:r>
+              <a:rPr sz="1600">
+                <a:solidFill>
+                  <a:srgbClr val="EEFFFF"/>
+                </a:solidFill>
+                <a:latin typeface="Consolas"/>
+              </a:rPr>
+              <a:t> </a:t>
+            </a:r>
+            <a:r>
+              <a:rPr sz="1600">
+                <a:solidFill>
+                  <a:srgbClr val="BAC2DE"/>
+                </a:solidFill>
+                <a:latin typeface="Consolas"/>
+              </a:rPr>
+              <a:t>{</a:t>
+            </a:r>
+            <a:r>
+              <a:rPr sz="1600">
+                <a:solidFill>
+                  <a:srgbClr val="EEFFFF"/>
+                </a:solidFill>
+                <a:latin typeface="Consolas"/>
+              </a:rPr>
+              <a:t> </a:t>
+            </a:r>
+            <a:r>
+              <a:rPr sz="1600">
+                <a:solidFill>
+                  <a:srgbClr val="EEFFFF"/>
+                </a:solidFill>
+                <a:latin typeface="Consolas"/>
+              </a:rPr>
+              <a:t>impl_integer_ops_num</a:t>
+            </a:r>
+            <a:r>
+              <a:rPr sz="1600">
+                <a:solidFill>
+                  <a:srgbClr val="89DDFF"/>
+                </a:solidFill>
+                <a:latin typeface="Consolas"/>
+              </a:rPr>
+              <a:t>!</a:t>
+            </a:r>
+            <a:r>
+              <a:rPr sz="1600">
+                <a:solidFill>
+                  <a:srgbClr val="BAC2DE"/>
+                </a:solidFill>
+                <a:latin typeface="Consolas"/>
+              </a:rPr>
+              <a:t>(</a:t>
+            </a:r>
+            <a:r>
+              <a:rPr sz="1600">
+                <a:solidFill>
+                  <a:srgbClr val="C792EA"/>
+                </a:solidFill>
+                <a:latin typeface="Consolas"/>
+              </a:rPr>
+              <a:t>i16</a:t>
+            </a:r>
+            <a:r>
+              <a:rPr sz="1600">
+                <a:solidFill>
+                  <a:srgbClr val="BAC2DE"/>
+                </a:solidFill>
+                <a:latin typeface="Consolas"/>
+              </a:rPr>
+              <a:t>)</a:t>
+            </a:r>
+            <a:r>
+              <a:rPr sz="1600">
+                <a:solidFill>
+                  <a:srgbClr val="BAC2DE"/>
+                </a:solidFill>
+                <a:latin typeface="Consolas"/>
+              </a:rPr>
+              <a:t>;</a:t>
+            </a:r>
+            <a:r>
+              <a:rPr sz="1600">
+                <a:solidFill>
+                  <a:srgbClr val="EEFFFF"/>
+                </a:solidFill>
+                <a:latin typeface="Consolas"/>
+              </a:rPr>
+              <a:t> </a:t>
+            </a:r>
+            <a:r>
+              <a:rPr sz="1600">
+                <a:solidFill>
+                  <a:srgbClr val="BAC2DE"/>
+                </a:solidFill>
+                <a:latin typeface="Consolas"/>
+              </a:rPr>
+              <a:t>}</a:t>
+            </a:r>
+          </a:p>
+          <a:p>
+            <a:pPr>
+              <a:lnSpc>
+                <a:spcPct val="95000"/>
+              </a:lnSpc>
+              <a:spcBef>
+                <a:spcPts val="0"/>
+              </a:spcBef>
+              <a:spcAft>
+                <a:spcPts val="0"/>
+              </a:spcAft>
+            </a:pPr>
+            <a:r>
+              <a:rPr sz="1600">
+                <a:solidFill>
+                  <a:srgbClr val="C792EA"/>
+                </a:solidFill>
+                <a:latin typeface="Consolas"/>
+              </a:rPr>
+              <a:t>impl</a:t>
+            </a:r>
+            <a:r>
+              <a:rPr sz="1600">
+                <a:solidFill>
+                  <a:srgbClr val="EEFFFF"/>
+                </a:solidFill>
+                <a:latin typeface="Consolas"/>
+              </a:rPr>
+              <a:t> </a:t>
+            </a:r>
+            <a:r>
+              <a:rPr sz="1600">
+                <a:solidFill>
+                  <a:srgbClr val="EEFFFF"/>
+                </a:solidFill>
+                <a:latin typeface="Consolas"/>
+              </a:rPr>
+              <a:t>Integer</a:t>
+            </a:r>
+            <a:r>
+              <a:rPr sz="1600">
+                <a:solidFill>
+                  <a:srgbClr val="EEFFFF"/>
+                </a:solidFill>
+                <a:latin typeface="Consolas"/>
+              </a:rPr>
+              <a:t> </a:t>
+            </a:r>
+            <a:r>
+              <a:rPr sz="1600">
+                <a:solidFill>
+                  <a:srgbClr val="C792EA"/>
+                </a:solidFill>
+                <a:latin typeface="Consolas"/>
+              </a:rPr>
+              <a:t>for</a:t>
+            </a:r>
+            <a:r>
+              <a:rPr sz="1600">
+                <a:solidFill>
+                  <a:srgbClr val="EEFFFF"/>
+                </a:solidFill>
+                <a:latin typeface="Consolas"/>
+              </a:rPr>
+              <a:t> </a:t>
+            </a:r>
+            <a:r>
+              <a:rPr sz="1600">
+                <a:solidFill>
+                  <a:srgbClr val="C792EA"/>
+                </a:solidFill>
+                <a:latin typeface="Consolas"/>
+              </a:rPr>
+              <a:t>u16</a:t>
+            </a:r>
+            <a:r>
+              <a:rPr sz="1600">
+                <a:solidFill>
+                  <a:srgbClr val="EEFFFF"/>
+                </a:solidFill>
+                <a:latin typeface="Consolas"/>
+              </a:rPr>
+              <a:t> </a:t>
+            </a:r>
+            <a:r>
+              <a:rPr sz="1600">
+                <a:solidFill>
+                  <a:srgbClr val="BAC2DE"/>
+                </a:solidFill>
+                <a:latin typeface="Consolas"/>
+              </a:rPr>
+              <a:t>{</a:t>
+            </a:r>
+            <a:r>
+              <a:rPr sz="1600">
+                <a:solidFill>
+                  <a:srgbClr val="EEFFFF"/>
+                </a:solidFill>
+                <a:latin typeface="Consolas"/>
+              </a:rPr>
+              <a:t> </a:t>
+            </a:r>
+            <a:r>
+              <a:rPr sz="1600">
+                <a:solidFill>
+                  <a:srgbClr val="EEFFFF"/>
+                </a:solidFill>
+                <a:latin typeface="Consolas"/>
+              </a:rPr>
+              <a:t>impl_integer_ops_num</a:t>
+            </a:r>
+            <a:r>
+              <a:rPr sz="1600">
+                <a:solidFill>
+                  <a:srgbClr val="89DDFF"/>
+                </a:solidFill>
+                <a:latin typeface="Consolas"/>
+              </a:rPr>
+              <a:t>!</a:t>
+            </a:r>
+            <a:r>
+              <a:rPr sz="1600">
+                <a:solidFill>
+                  <a:srgbClr val="BAC2DE"/>
+                </a:solidFill>
+                <a:latin typeface="Consolas"/>
+              </a:rPr>
+              <a:t>(</a:t>
+            </a:r>
+            <a:r>
+              <a:rPr sz="1600">
+                <a:solidFill>
+                  <a:srgbClr val="C792EA"/>
+                </a:solidFill>
+                <a:latin typeface="Consolas"/>
+              </a:rPr>
+              <a:t>u16</a:t>
+            </a:r>
+            <a:r>
+              <a:rPr sz="1600">
+                <a:solidFill>
+                  <a:srgbClr val="BAC2DE"/>
+                </a:solidFill>
+                <a:latin typeface="Consolas"/>
+              </a:rPr>
+              <a:t>)</a:t>
+            </a:r>
+            <a:r>
+              <a:rPr sz="1600">
+                <a:solidFill>
+                  <a:srgbClr val="BAC2DE"/>
+                </a:solidFill>
+                <a:latin typeface="Consolas"/>
+              </a:rPr>
+              <a:t>;</a:t>
+            </a:r>
+            <a:r>
+              <a:rPr sz="1600">
+                <a:solidFill>
+                  <a:srgbClr val="EEFFFF"/>
+                </a:solidFill>
+                <a:latin typeface="Consolas"/>
+              </a:rPr>
+              <a:t> </a:t>
+            </a:r>
+            <a:r>
+              <a:rPr sz="1600">
+                <a:solidFill>
+                  <a:srgbClr val="BAC2DE"/>
+                </a:solidFill>
+                <a:latin typeface="Consolas"/>
+              </a:rPr>
+              <a:t>}</a:t>
+            </a:r>
+          </a:p>
+          <a:p>
+            <a:pPr>
+              <a:lnSpc>
+                <a:spcPct val="95000"/>
+              </a:lnSpc>
+              <a:spcBef>
+                <a:spcPts val="0"/>
+              </a:spcBef>
+              <a:spcAft>
+                <a:spcPts val="0"/>
+              </a:spcAft>
+            </a:pPr>
+            <a:r>
+              <a:rPr sz="1600">
+                <a:solidFill>
+                  <a:srgbClr val="C792EA"/>
+                </a:solidFill>
+                <a:latin typeface="Consolas"/>
+              </a:rPr>
+              <a:t>impl</a:t>
+            </a:r>
+            <a:r>
+              <a:rPr sz="1600">
+                <a:solidFill>
+                  <a:srgbClr val="EEFFFF"/>
+                </a:solidFill>
+                <a:latin typeface="Consolas"/>
+              </a:rPr>
+              <a:t> </a:t>
+            </a:r>
+            <a:r>
+              <a:rPr sz="1600">
+                <a:solidFill>
+                  <a:srgbClr val="EEFFFF"/>
+                </a:solidFill>
+                <a:latin typeface="Consolas"/>
+              </a:rPr>
+              <a:t>Integer</a:t>
+            </a:r>
+            <a:r>
+              <a:rPr sz="1600">
+                <a:solidFill>
+                  <a:srgbClr val="EEFFFF"/>
+                </a:solidFill>
+                <a:latin typeface="Consolas"/>
+              </a:rPr>
+              <a:t> </a:t>
+            </a:r>
+            <a:r>
+              <a:rPr sz="1600">
+                <a:solidFill>
+                  <a:srgbClr val="C792EA"/>
+                </a:solidFill>
+                <a:latin typeface="Consolas"/>
+              </a:rPr>
+              <a:t>for</a:t>
+            </a:r>
+            <a:r>
+              <a:rPr sz="1600">
+                <a:solidFill>
+                  <a:srgbClr val="EEFFFF"/>
+                </a:solidFill>
+                <a:latin typeface="Consolas"/>
+              </a:rPr>
+              <a:t> </a:t>
+            </a:r>
+            <a:r>
+              <a:rPr sz="1600">
+                <a:solidFill>
+                  <a:srgbClr val="C792EA"/>
+                </a:solidFill>
+                <a:latin typeface="Consolas"/>
+              </a:rPr>
+              <a:t>i32</a:t>
+            </a:r>
+            <a:r>
+              <a:rPr sz="1600">
+                <a:solidFill>
+                  <a:srgbClr val="EEFFFF"/>
+                </a:solidFill>
+                <a:latin typeface="Consolas"/>
+              </a:rPr>
+              <a:t> </a:t>
+            </a:r>
+            <a:r>
+              <a:rPr sz="1600">
+                <a:solidFill>
+                  <a:srgbClr val="BAC2DE"/>
+                </a:solidFill>
+                <a:latin typeface="Consolas"/>
+              </a:rPr>
+              <a:t>{</a:t>
+            </a:r>
+            <a:r>
+              <a:rPr sz="1600">
+                <a:solidFill>
+                  <a:srgbClr val="EEFFFF"/>
+                </a:solidFill>
+                <a:latin typeface="Consolas"/>
+              </a:rPr>
+              <a:t> </a:t>
+            </a:r>
+            <a:r>
+              <a:rPr sz="1600">
+                <a:solidFill>
+                  <a:srgbClr val="EEFFFF"/>
+                </a:solidFill>
+                <a:latin typeface="Consolas"/>
+              </a:rPr>
+              <a:t>impl_integer_ops_num</a:t>
+            </a:r>
+            <a:r>
+              <a:rPr sz="1600">
+                <a:solidFill>
+                  <a:srgbClr val="89DDFF"/>
+                </a:solidFill>
+                <a:latin typeface="Consolas"/>
+              </a:rPr>
+              <a:t>!</a:t>
+            </a:r>
+            <a:r>
+              <a:rPr sz="1600">
+                <a:solidFill>
+                  <a:srgbClr val="BAC2DE"/>
+                </a:solidFill>
+                <a:latin typeface="Consolas"/>
+              </a:rPr>
+              <a:t>(</a:t>
+            </a:r>
+            <a:r>
+              <a:rPr sz="1600">
+                <a:solidFill>
+                  <a:srgbClr val="C792EA"/>
+                </a:solidFill>
+                <a:latin typeface="Consolas"/>
+              </a:rPr>
+              <a:t>i32</a:t>
+            </a:r>
+            <a:r>
+              <a:rPr sz="1600">
+                <a:solidFill>
+                  <a:srgbClr val="BAC2DE"/>
+                </a:solidFill>
+                <a:latin typeface="Consolas"/>
+              </a:rPr>
+              <a:t>)</a:t>
+            </a:r>
+            <a:r>
+              <a:rPr sz="1600">
+                <a:solidFill>
+                  <a:srgbClr val="BAC2DE"/>
+                </a:solidFill>
+                <a:latin typeface="Consolas"/>
+              </a:rPr>
+              <a:t>;</a:t>
+            </a:r>
+            <a:r>
+              <a:rPr sz="1600">
+                <a:solidFill>
+                  <a:srgbClr val="EEFFFF"/>
+                </a:solidFill>
+                <a:latin typeface="Consolas"/>
+              </a:rPr>
+              <a:t> </a:t>
+            </a:r>
+            <a:r>
+              <a:rPr sz="1600">
+                <a:solidFill>
+                  <a:srgbClr val="BAC2DE"/>
+                </a:solidFill>
+                <a:latin typeface="Consolas"/>
+              </a:rPr>
+              <a:t>}</a:t>
+            </a:r>
+          </a:p>
+          <a:p>
+            <a:pPr>
+              <a:lnSpc>
+                <a:spcPct val="95000"/>
+              </a:lnSpc>
+              <a:spcBef>
+                <a:spcPts val="0"/>
+              </a:spcBef>
+              <a:spcAft>
+                <a:spcPts val="0"/>
+              </a:spcAft>
+            </a:pPr>
+            <a:r>
+              <a:rPr sz="1600">
+                <a:solidFill>
+                  <a:srgbClr val="C792EA"/>
+                </a:solidFill>
+                <a:latin typeface="Consolas"/>
+              </a:rPr>
+              <a:t>impl</a:t>
+            </a:r>
+            <a:r>
+              <a:rPr sz="1600">
+                <a:solidFill>
+                  <a:srgbClr val="EEFFFF"/>
+                </a:solidFill>
+                <a:latin typeface="Consolas"/>
+              </a:rPr>
+              <a:t> </a:t>
+            </a:r>
+            <a:r>
+              <a:rPr sz="1600">
+                <a:solidFill>
+                  <a:srgbClr val="EEFFFF"/>
+                </a:solidFill>
+                <a:latin typeface="Consolas"/>
+              </a:rPr>
+              <a:t>Integer</a:t>
+            </a:r>
+            <a:r>
+              <a:rPr sz="1600">
+                <a:solidFill>
+                  <a:srgbClr val="EEFFFF"/>
+                </a:solidFill>
+                <a:latin typeface="Consolas"/>
+              </a:rPr>
+              <a:t> </a:t>
+            </a:r>
+            <a:r>
+              <a:rPr sz="1600">
+                <a:solidFill>
+                  <a:srgbClr val="C792EA"/>
+                </a:solidFill>
+                <a:latin typeface="Consolas"/>
+              </a:rPr>
+              <a:t>for</a:t>
+            </a:r>
+            <a:r>
+              <a:rPr sz="1600">
+                <a:solidFill>
+                  <a:srgbClr val="EEFFFF"/>
+                </a:solidFill>
+                <a:latin typeface="Consolas"/>
+              </a:rPr>
+              <a:t> </a:t>
+            </a:r>
+            <a:r>
+              <a:rPr sz="1600">
+                <a:solidFill>
+                  <a:srgbClr val="C792EA"/>
+                </a:solidFill>
+                <a:latin typeface="Consolas"/>
+              </a:rPr>
+              <a:t>u32</a:t>
+            </a:r>
+            <a:r>
+              <a:rPr sz="1600">
+                <a:solidFill>
+                  <a:srgbClr val="EEFFFF"/>
+                </a:solidFill>
+                <a:latin typeface="Consolas"/>
+              </a:rPr>
+              <a:t> </a:t>
+            </a:r>
+            <a:r>
+              <a:rPr sz="1600">
+                <a:solidFill>
+                  <a:srgbClr val="BAC2DE"/>
+                </a:solidFill>
+                <a:latin typeface="Consolas"/>
+              </a:rPr>
+              <a:t>{</a:t>
+            </a:r>
+            <a:r>
+              <a:rPr sz="1600">
+                <a:solidFill>
+                  <a:srgbClr val="EEFFFF"/>
+                </a:solidFill>
+                <a:latin typeface="Consolas"/>
+              </a:rPr>
+              <a:t> </a:t>
+            </a:r>
+            <a:r>
+              <a:rPr sz="1600">
+                <a:solidFill>
+                  <a:srgbClr val="EEFFFF"/>
+                </a:solidFill>
+                <a:latin typeface="Consolas"/>
+              </a:rPr>
+              <a:t>impl_integer_ops_num</a:t>
+            </a:r>
+            <a:r>
+              <a:rPr sz="1600">
+                <a:solidFill>
+                  <a:srgbClr val="89DDFF"/>
+                </a:solidFill>
+                <a:latin typeface="Consolas"/>
+              </a:rPr>
+              <a:t>!</a:t>
+            </a:r>
+            <a:r>
+              <a:rPr sz="1600">
+                <a:solidFill>
+                  <a:srgbClr val="BAC2DE"/>
+                </a:solidFill>
+                <a:latin typeface="Consolas"/>
+              </a:rPr>
+              <a:t>(</a:t>
+            </a:r>
+            <a:r>
+              <a:rPr sz="1600">
+                <a:solidFill>
+                  <a:srgbClr val="C792EA"/>
+                </a:solidFill>
+                <a:latin typeface="Consolas"/>
+              </a:rPr>
+              <a:t>u32</a:t>
+            </a:r>
+            <a:r>
+              <a:rPr sz="1600">
+                <a:solidFill>
+                  <a:srgbClr val="BAC2DE"/>
+                </a:solidFill>
+                <a:latin typeface="Consolas"/>
+              </a:rPr>
+              <a:t>)</a:t>
+            </a:r>
+            <a:r>
+              <a:rPr sz="1600">
+                <a:solidFill>
+                  <a:srgbClr val="BAC2DE"/>
+                </a:solidFill>
+                <a:latin typeface="Consolas"/>
+              </a:rPr>
+              <a:t>;</a:t>
+            </a:r>
+            <a:r>
+              <a:rPr sz="1600">
+                <a:solidFill>
+                  <a:srgbClr val="EEFFFF"/>
+                </a:solidFill>
+                <a:latin typeface="Consolas"/>
+              </a:rPr>
+              <a:t> </a:t>
+            </a:r>
+            <a:r>
+              <a:rPr sz="1600">
+                <a:solidFill>
+                  <a:srgbClr val="BAC2DE"/>
+                </a:solidFill>
+                <a:latin typeface="Consolas"/>
+              </a:rPr>
+              <a:t>}</a:t>
+            </a:r>
+          </a:p>
+          <a:p>
+            <a:pPr>
+              <a:lnSpc>
+                <a:spcPct val="95000"/>
+              </a:lnSpc>
+              <a:spcBef>
+                <a:spcPts val="0"/>
+              </a:spcBef>
+              <a:spcAft>
+                <a:spcPts val="0"/>
+              </a:spcAft>
+            </a:pPr>
+            <a:r>
+              <a:rPr sz="1600">
+                <a:solidFill>
+                  <a:srgbClr val="C792EA"/>
+                </a:solidFill>
+                <a:latin typeface="Consolas"/>
+              </a:rPr>
+              <a:t>impl</a:t>
+            </a:r>
+            <a:r>
+              <a:rPr sz="1600">
+                <a:solidFill>
+                  <a:srgbClr val="EEFFFF"/>
+                </a:solidFill>
+                <a:latin typeface="Consolas"/>
+              </a:rPr>
+              <a:t> </a:t>
+            </a:r>
+            <a:r>
+              <a:rPr sz="1600">
+                <a:solidFill>
+                  <a:srgbClr val="EEFFFF"/>
+                </a:solidFill>
+                <a:latin typeface="Consolas"/>
+              </a:rPr>
+              <a:t>Integer</a:t>
+            </a:r>
+            <a:r>
+              <a:rPr sz="1600">
+                <a:solidFill>
+                  <a:srgbClr val="EEFFFF"/>
+                </a:solidFill>
+                <a:latin typeface="Consolas"/>
+              </a:rPr>
+              <a:t> </a:t>
+            </a:r>
+            <a:r>
+              <a:rPr sz="1600">
+                <a:solidFill>
+                  <a:srgbClr val="C792EA"/>
+                </a:solidFill>
+                <a:latin typeface="Consolas"/>
+              </a:rPr>
+              <a:t>for</a:t>
+            </a:r>
+            <a:r>
+              <a:rPr sz="1600">
+                <a:solidFill>
+                  <a:srgbClr val="EEFFFF"/>
+                </a:solidFill>
+                <a:latin typeface="Consolas"/>
+              </a:rPr>
+              <a:t> </a:t>
+            </a:r>
+            <a:r>
+              <a:rPr sz="1600">
+                <a:solidFill>
+                  <a:srgbClr val="C792EA"/>
+                </a:solidFill>
+                <a:latin typeface="Consolas"/>
+              </a:rPr>
+              <a:t>i64</a:t>
+            </a:r>
+            <a:r>
+              <a:rPr sz="1600">
+                <a:solidFill>
+                  <a:srgbClr val="EEFFFF"/>
+                </a:solidFill>
+                <a:latin typeface="Consolas"/>
+              </a:rPr>
+              <a:t> </a:t>
+            </a:r>
+            <a:r>
+              <a:rPr sz="1600">
+                <a:solidFill>
+                  <a:srgbClr val="BAC2DE"/>
+                </a:solidFill>
+                <a:latin typeface="Consolas"/>
+              </a:rPr>
+              <a:t>{</a:t>
+            </a:r>
+            <a:r>
+              <a:rPr sz="1600">
+                <a:solidFill>
+                  <a:srgbClr val="EEFFFF"/>
+                </a:solidFill>
+                <a:latin typeface="Consolas"/>
+              </a:rPr>
+              <a:t> </a:t>
+            </a:r>
+            <a:r>
+              <a:rPr sz="1600">
+                <a:solidFill>
+                  <a:srgbClr val="EEFFFF"/>
+                </a:solidFill>
+                <a:latin typeface="Consolas"/>
+              </a:rPr>
+              <a:t>impl_integer_ops_num</a:t>
+            </a:r>
+            <a:r>
+              <a:rPr sz="1600">
+                <a:solidFill>
+                  <a:srgbClr val="89DDFF"/>
+                </a:solidFill>
+                <a:latin typeface="Consolas"/>
+              </a:rPr>
+              <a:t>!</a:t>
+            </a:r>
+            <a:r>
+              <a:rPr sz="1600">
+                <a:solidFill>
+                  <a:srgbClr val="BAC2DE"/>
+                </a:solidFill>
+                <a:latin typeface="Consolas"/>
+              </a:rPr>
+              <a:t>(</a:t>
+            </a:r>
+            <a:r>
+              <a:rPr sz="1600">
+                <a:solidFill>
+                  <a:srgbClr val="C792EA"/>
+                </a:solidFill>
+                <a:latin typeface="Consolas"/>
+              </a:rPr>
+              <a:t>i64</a:t>
+            </a:r>
+            <a:r>
+              <a:rPr sz="1600">
+                <a:solidFill>
+                  <a:srgbClr val="BAC2DE"/>
+                </a:solidFill>
+                <a:latin typeface="Consolas"/>
+              </a:rPr>
+              <a:t>)</a:t>
+            </a:r>
+            <a:r>
+              <a:rPr sz="1600">
+                <a:solidFill>
+                  <a:srgbClr val="BAC2DE"/>
+                </a:solidFill>
+                <a:latin typeface="Consolas"/>
+              </a:rPr>
+              <a:t>;</a:t>
+            </a:r>
+            <a:r>
+              <a:rPr sz="1600">
+                <a:solidFill>
+                  <a:srgbClr val="EEFFFF"/>
+                </a:solidFill>
+                <a:latin typeface="Consolas"/>
+              </a:rPr>
+              <a:t> </a:t>
+            </a:r>
+            <a:r>
+              <a:rPr sz="1600">
+                <a:solidFill>
+                  <a:srgbClr val="BAC2DE"/>
+                </a:solidFill>
+                <a:latin typeface="Consolas"/>
+              </a:rPr>
+              <a:t>}</a:t>
+            </a:r>
+          </a:p>
+          <a:p>
+            <a:pPr>
+              <a:lnSpc>
+                <a:spcPct val="95000"/>
+              </a:lnSpc>
+              <a:spcBef>
+                <a:spcPts val="0"/>
+              </a:spcBef>
+              <a:spcAft>
+                <a:spcPts val="0"/>
+              </a:spcAft>
+            </a:pPr>
+            <a:r>
+              <a:rPr sz="1600">
+                <a:solidFill>
+                  <a:srgbClr val="C792EA"/>
+                </a:solidFill>
+                <a:latin typeface="Consolas"/>
+              </a:rPr>
+              <a:t>impl</a:t>
+            </a:r>
+            <a:r>
+              <a:rPr sz="1600">
+                <a:solidFill>
+                  <a:srgbClr val="EEFFFF"/>
+                </a:solidFill>
+                <a:latin typeface="Consolas"/>
+              </a:rPr>
+              <a:t> </a:t>
+            </a:r>
+            <a:r>
+              <a:rPr sz="1600">
+                <a:solidFill>
+                  <a:srgbClr val="EEFFFF"/>
+                </a:solidFill>
+                <a:latin typeface="Consolas"/>
+              </a:rPr>
+              <a:t>Integer</a:t>
+            </a:r>
+            <a:r>
+              <a:rPr sz="1600">
+                <a:solidFill>
+                  <a:srgbClr val="EEFFFF"/>
+                </a:solidFill>
+                <a:latin typeface="Consolas"/>
+              </a:rPr>
+              <a:t> </a:t>
+            </a:r>
+            <a:r>
+              <a:rPr sz="1600">
+                <a:solidFill>
+                  <a:srgbClr val="C792EA"/>
+                </a:solidFill>
+                <a:latin typeface="Consolas"/>
+              </a:rPr>
+              <a:t>for</a:t>
+            </a:r>
+            <a:r>
+              <a:rPr sz="1600">
+                <a:solidFill>
+                  <a:srgbClr val="EEFFFF"/>
+                </a:solidFill>
+                <a:latin typeface="Consolas"/>
+              </a:rPr>
+              <a:t> </a:t>
+            </a:r>
+            <a:r>
+              <a:rPr sz="1600">
+                <a:solidFill>
+                  <a:srgbClr val="C792EA"/>
+                </a:solidFill>
+                <a:latin typeface="Consolas"/>
+              </a:rPr>
+              <a:t>u64</a:t>
+            </a:r>
+            <a:r>
+              <a:rPr sz="1600">
+                <a:solidFill>
+                  <a:srgbClr val="EEFFFF"/>
+                </a:solidFill>
+                <a:latin typeface="Consolas"/>
+              </a:rPr>
+              <a:t> </a:t>
+            </a:r>
+            <a:r>
+              <a:rPr sz="1600">
+                <a:solidFill>
+                  <a:srgbClr val="BAC2DE"/>
+                </a:solidFill>
+                <a:latin typeface="Consolas"/>
+              </a:rPr>
+              <a:t>{</a:t>
+            </a:r>
+            <a:r>
+              <a:rPr sz="1600">
+                <a:solidFill>
+                  <a:srgbClr val="EEFFFF"/>
+                </a:solidFill>
+                <a:latin typeface="Consolas"/>
+              </a:rPr>
+              <a:t> </a:t>
+            </a:r>
+            <a:r>
+              <a:rPr sz="1600">
+                <a:solidFill>
+                  <a:srgbClr val="EEFFFF"/>
+                </a:solidFill>
+                <a:latin typeface="Consolas"/>
+              </a:rPr>
+              <a:t>impl_integer_ops_num</a:t>
+            </a:r>
+            <a:r>
+              <a:rPr sz="1600">
+                <a:solidFill>
+                  <a:srgbClr val="89DDFF"/>
+                </a:solidFill>
+                <a:latin typeface="Consolas"/>
+              </a:rPr>
+              <a:t>!</a:t>
+            </a:r>
+            <a:r>
+              <a:rPr sz="1600">
+                <a:solidFill>
+                  <a:srgbClr val="BAC2DE"/>
+                </a:solidFill>
+                <a:latin typeface="Consolas"/>
+              </a:rPr>
+              <a:t>(</a:t>
+            </a:r>
+            <a:r>
+              <a:rPr sz="1600">
+                <a:solidFill>
+                  <a:srgbClr val="C792EA"/>
+                </a:solidFill>
+                <a:latin typeface="Consolas"/>
+              </a:rPr>
+              <a:t>u64</a:t>
+            </a:r>
+            <a:r>
+              <a:rPr sz="1600">
+                <a:solidFill>
+                  <a:srgbClr val="BAC2DE"/>
+                </a:solidFill>
+                <a:latin typeface="Consolas"/>
+              </a:rPr>
+              <a:t>)</a:t>
+            </a:r>
+            <a:r>
+              <a:rPr sz="1600">
+                <a:solidFill>
+                  <a:srgbClr val="BAC2DE"/>
+                </a:solidFill>
+                <a:latin typeface="Consolas"/>
+              </a:rPr>
+              <a:t>;</a:t>
+            </a:r>
+            <a:r>
+              <a:rPr sz="1600">
+                <a:solidFill>
+                  <a:srgbClr val="EEFFFF"/>
+                </a:solidFill>
+                <a:latin typeface="Consolas"/>
+              </a:rPr>
+              <a:t> </a:t>
+            </a:r>
+            <a:r>
+              <a:rPr sz="1600">
+                <a:solidFill>
+                  <a:srgbClr val="BAC2DE"/>
+                </a:solidFill>
+                <a:latin typeface="Consolas"/>
+              </a:rPr>
+              <a:t>}</a:t>
+            </a:r>
+          </a:p>
+          <a:p>
+            <a:pPr>
+              <a:lnSpc>
+                <a:spcPct val="95000"/>
+              </a:lnSpc>
+              <a:spcBef>
+                <a:spcPts val="0"/>
+              </a:spcBef>
+              <a:spcAft>
+                <a:spcPts val="0"/>
+              </a:spcAft>
+            </a:pPr>
+            <a:r>
+              <a:rPr sz="1600">
+                <a:solidFill>
+                  <a:srgbClr val="C792EA"/>
+                </a:solidFill>
+                <a:latin typeface="Consolas"/>
+              </a:rPr>
+              <a:t>impl</a:t>
+            </a:r>
+            <a:r>
+              <a:rPr sz="1600">
+                <a:solidFill>
+                  <a:srgbClr val="EEFFFF"/>
+                </a:solidFill>
+                <a:latin typeface="Consolas"/>
+              </a:rPr>
+              <a:t> </a:t>
+            </a:r>
+            <a:r>
+              <a:rPr sz="1600">
+                <a:solidFill>
+                  <a:srgbClr val="EEFFFF"/>
+                </a:solidFill>
+                <a:latin typeface="Consolas"/>
+              </a:rPr>
+              <a:t>Integer</a:t>
+            </a:r>
+            <a:r>
+              <a:rPr sz="1600">
+                <a:solidFill>
+                  <a:srgbClr val="EEFFFF"/>
+                </a:solidFill>
+                <a:latin typeface="Consolas"/>
+              </a:rPr>
+              <a:t> </a:t>
+            </a:r>
+            <a:r>
+              <a:rPr sz="1600">
+                <a:solidFill>
+                  <a:srgbClr val="C792EA"/>
+                </a:solidFill>
+                <a:latin typeface="Consolas"/>
+              </a:rPr>
+              <a:t>for</a:t>
+            </a:r>
+            <a:r>
+              <a:rPr sz="1600">
+                <a:solidFill>
+                  <a:srgbClr val="EEFFFF"/>
+                </a:solidFill>
+                <a:latin typeface="Consolas"/>
+              </a:rPr>
+              <a:t> </a:t>
+            </a:r>
+            <a:r>
+              <a:rPr sz="1600">
+                <a:solidFill>
+                  <a:srgbClr val="C792EA"/>
+                </a:solidFill>
+                <a:latin typeface="Consolas"/>
+              </a:rPr>
+              <a:t>i128</a:t>
+            </a:r>
+            <a:r>
+              <a:rPr sz="1600">
+                <a:solidFill>
+                  <a:srgbClr val="EEFFFF"/>
+                </a:solidFill>
+                <a:latin typeface="Consolas"/>
+              </a:rPr>
+              <a:t> </a:t>
+            </a:r>
+            <a:r>
+              <a:rPr sz="1600">
+                <a:solidFill>
+                  <a:srgbClr val="BAC2DE"/>
+                </a:solidFill>
+                <a:latin typeface="Consolas"/>
+              </a:rPr>
+              <a:t>{</a:t>
+            </a:r>
+            <a:r>
+              <a:rPr sz="1600">
+                <a:solidFill>
+                  <a:srgbClr val="EEFFFF"/>
+                </a:solidFill>
+                <a:latin typeface="Consolas"/>
+              </a:rPr>
+              <a:t> </a:t>
+            </a:r>
+            <a:r>
+              <a:rPr sz="1600">
+                <a:solidFill>
+                  <a:srgbClr val="EEFFFF"/>
+                </a:solidFill>
+                <a:latin typeface="Consolas"/>
+              </a:rPr>
+              <a:t>impl_integer_ops_num</a:t>
+            </a:r>
+            <a:r>
+              <a:rPr sz="1600">
+                <a:solidFill>
+                  <a:srgbClr val="89DDFF"/>
+                </a:solidFill>
+                <a:latin typeface="Consolas"/>
+              </a:rPr>
+              <a:t>!</a:t>
+            </a:r>
+            <a:r>
+              <a:rPr sz="1600">
+                <a:solidFill>
+                  <a:srgbClr val="BAC2DE"/>
+                </a:solidFill>
+                <a:latin typeface="Consolas"/>
+              </a:rPr>
+              <a:t>(</a:t>
+            </a:r>
+            <a:r>
+              <a:rPr sz="1600">
+                <a:solidFill>
+                  <a:srgbClr val="C792EA"/>
+                </a:solidFill>
+                <a:latin typeface="Consolas"/>
+              </a:rPr>
+              <a:t>i128</a:t>
+            </a:r>
+            <a:r>
+              <a:rPr sz="1600">
+                <a:solidFill>
+                  <a:srgbClr val="BAC2DE"/>
+                </a:solidFill>
+                <a:latin typeface="Consolas"/>
+              </a:rPr>
+              <a:t>)</a:t>
+            </a:r>
+            <a:r>
+              <a:rPr sz="1600">
+                <a:solidFill>
+                  <a:srgbClr val="BAC2DE"/>
+                </a:solidFill>
+                <a:latin typeface="Consolas"/>
+              </a:rPr>
+              <a:t>;</a:t>
+            </a:r>
+            <a:r>
+              <a:rPr sz="1600">
+                <a:solidFill>
+                  <a:srgbClr val="EEFFFF"/>
+                </a:solidFill>
+                <a:latin typeface="Consolas"/>
+              </a:rPr>
+              <a:t> </a:t>
+            </a:r>
+            <a:r>
+              <a:rPr sz="1600">
+                <a:solidFill>
+                  <a:srgbClr val="BAC2DE"/>
+                </a:solidFill>
+                <a:latin typeface="Consolas"/>
+              </a:rPr>
+              <a:t>}</a:t>
+            </a:r>
+          </a:p>
+          <a:p>
+            <a:pPr>
+              <a:lnSpc>
+                <a:spcPct val="95000"/>
+              </a:lnSpc>
+              <a:spcBef>
+                <a:spcPts val="0"/>
+              </a:spcBef>
+              <a:spcAft>
+                <a:spcPts val="0"/>
+              </a:spcAft>
+            </a:pPr>
+            <a:r>
+              <a:rPr sz="1600">
+                <a:solidFill>
+                  <a:srgbClr val="C792EA"/>
+                </a:solidFill>
+                <a:latin typeface="Consolas"/>
+              </a:rPr>
+              <a:t>impl</a:t>
+            </a:r>
+            <a:r>
+              <a:rPr sz="1600">
+                <a:solidFill>
+                  <a:srgbClr val="EEFFFF"/>
+                </a:solidFill>
+                <a:latin typeface="Consolas"/>
+              </a:rPr>
+              <a:t> </a:t>
+            </a:r>
+            <a:r>
+              <a:rPr sz="1600">
+                <a:solidFill>
+                  <a:srgbClr val="EEFFFF"/>
+                </a:solidFill>
+                <a:latin typeface="Consolas"/>
+              </a:rPr>
+              <a:t>Integer</a:t>
+            </a:r>
+            <a:r>
+              <a:rPr sz="1600">
+                <a:solidFill>
+                  <a:srgbClr val="EEFFFF"/>
+                </a:solidFill>
+                <a:latin typeface="Consolas"/>
+              </a:rPr>
+              <a:t> </a:t>
+            </a:r>
+            <a:r>
+              <a:rPr sz="1600">
+                <a:solidFill>
+                  <a:srgbClr val="C792EA"/>
+                </a:solidFill>
+                <a:latin typeface="Consolas"/>
+              </a:rPr>
+              <a:t>for</a:t>
+            </a:r>
+            <a:r>
+              <a:rPr sz="1600">
+                <a:solidFill>
+                  <a:srgbClr val="EEFFFF"/>
+                </a:solidFill>
+                <a:latin typeface="Consolas"/>
+              </a:rPr>
+              <a:t> </a:t>
+            </a:r>
+            <a:r>
+              <a:rPr sz="1600">
+                <a:solidFill>
+                  <a:srgbClr val="C792EA"/>
+                </a:solidFill>
+                <a:latin typeface="Consolas"/>
+              </a:rPr>
+              <a:t>u128</a:t>
+            </a:r>
+            <a:r>
+              <a:rPr sz="1600">
+                <a:solidFill>
+                  <a:srgbClr val="EEFFFF"/>
+                </a:solidFill>
+                <a:latin typeface="Consolas"/>
+              </a:rPr>
+              <a:t> </a:t>
+            </a:r>
+            <a:r>
+              <a:rPr sz="1600">
+                <a:solidFill>
+                  <a:srgbClr val="BAC2DE"/>
+                </a:solidFill>
+                <a:latin typeface="Consolas"/>
+              </a:rPr>
+              <a:t>{</a:t>
+            </a:r>
+            <a:r>
+              <a:rPr sz="1600">
+                <a:solidFill>
+                  <a:srgbClr val="EEFFFF"/>
+                </a:solidFill>
+                <a:latin typeface="Consolas"/>
+              </a:rPr>
+              <a:t> </a:t>
+            </a:r>
+            <a:r>
+              <a:rPr sz="1600">
+                <a:solidFill>
+                  <a:srgbClr val="EEFFFF"/>
+                </a:solidFill>
+                <a:latin typeface="Consolas"/>
+              </a:rPr>
+              <a:t>impl_integer_ops_num</a:t>
+            </a:r>
+            <a:r>
+              <a:rPr sz="1600">
+                <a:solidFill>
+                  <a:srgbClr val="89DDFF"/>
+                </a:solidFill>
+                <a:latin typeface="Consolas"/>
+              </a:rPr>
+              <a:t>!</a:t>
+            </a:r>
+            <a:r>
+              <a:rPr sz="1600">
+                <a:solidFill>
+                  <a:srgbClr val="BAC2DE"/>
+                </a:solidFill>
+                <a:latin typeface="Consolas"/>
+              </a:rPr>
+              <a:t>(</a:t>
+            </a:r>
+            <a:r>
+              <a:rPr sz="1600">
+                <a:solidFill>
+                  <a:srgbClr val="C792EA"/>
+                </a:solidFill>
+                <a:latin typeface="Consolas"/>
+              </a:rPr>
+              <a:t>u128</a:t>
+            </a:r>
+            <a:r>
+              <a:rPr sz="1600">
+                <a:solidFill>
+                  <a:srgbClr val="BAC2DE"/>
+                </a:solidFill>
+                <a:latin typeface="Consolas"/>
+              </a:rPr>
+              <a:t>)</a:t>
+            </a:r>
+            <a:r>
+              <a:rPr sz="1600">
+                <a:solidFill>
+                  <a:srgbClr val="BAC2DE"/>
+                </a:solidFill>
+                <a:latin typeface="Consolas"/>
+              </a:rPr>
+              <a:t>;</a:t>
+            </a:r>
+            <a:r>
+              <a:rPr sz="1600">
+                <a:solidFill>
+                  <a:srgbClr val="EEFFFF"/>
+                </a:solidFill>
+                <a:latin typeface="Consolas"/>
+              </a:rPr>
+              <a:t> </a:t>
+            </a:r>
+            <a:r>
+              <a:rPr sz="1600">
+                <a:solidFill>
+                  <a:srgbClr val="BAC2DE"/>
+                </a:solidFill>
+                <a:latin typeface="Consolas"/>
+              </a:rPr>
+              <a:t>}</a:t>
+            </a:r>
+          </a:p>
+          <a:p>
+            <a:pPr>
+              <a:lnSpc>
+                <a:spcPct val="95000"/>
+              </a:lnSpc>
+              <a:spcBef>
+                <a:spcPts val="0"/>
+              </a:spcBef>
+              <a:spcAft>
+                <a:spcPts val="0"/>
+              </a:spcAft>
+            </a:pPr>
+            <a:r>
+              <a:rPr sz="1600">
+                <a:solidFill>
+                  <a:srgbClr val="C792EA"/>
+                </a:solidFill>
+                <a:latin typeface="Consolas"/>
+              </a:rPr>
+              <a:t>impl</a:t>
+            </a:r>
+            <a:r>
+              <a:rPr sz="1600">
+                <a:solidFill>
+                  <a:srgbClr val="EEFFFF"/>
+                </a:solidFill>
+                <a:latin typeface="Consolas"/>
+              </a:rPr>
+              <a:t> </a:t>
+            </a:r>
+            <a:r>
+              <a:rPr sz="1600">
+                <a:solidFill>
+                  <a:srgbClr val="EEFFFF"/>
+                </a:solidFill>
+                <a:latin typeface="Consolas"/>
+              </a:rPr>
+              <a:t>Integer</a:t>
+            </a:r>
+            <a:r>
+              <a:rPr sz="1600">
+                <a:solidFill>
+                  <a:srgbClr val="EEFFFF"/>
+                </a:solidFill>
+                <a:latin typeface="Consolas"/>
+              </a:rPr>
+              <a:t> </a:t>
+            </a:r>
+            <a:r>
+              <a:rPr sz="1600">
+                <a:solidFill>
+                  <a:srgbClr val="C792EA"/>
+                </a:solidFill>
+                <a:latin typeface="Consolas"/>
+              </a:rPr>
+              <a:t>for</a:t>
+            </a:r>
+            <a:r>
+              <a:rPr sz="1600">
+                <a:solidFill>
+                  <a:srgbClr val="EEFFFF"/>
+                </a:solidFill>
+                <a:latin typeface="Consolas"/>
+              </a:rPr>
+              <a:t> </a:t>
+            </a:r>
+            <a:r>
+              <a:rPr sz="1600">
+                <a:solidFill>
+                  <a:srgbClr val="C792EA"/>
+                </a:solidFill>
+                <a:latin typeface="Consolas"/>
+              </a:rPr>
+              <a:t>isize</a:t>
+            </a:r>
+            <a:r>
+              <a:rPr sz="1600">
+                <a:solidFill>
+                  <a:srgbClr val="EEFFFF"/>
+                </a:solidFill>
+                <a:latin typeface="Consolas"/>
+              </a:rPr>
+              <a:t> </a:t>
+            </a:r>
+            <a:r>
+              <a:rPr sz="1600">
+                <a:solidFill>
+                  <a:srgbClr val="BAC2DE"/>
+                </a:solidFill>
+                <a:latin typeface="Consolas"/>
+              </a:rPr>
+              <a:t>{</a:t>
+            </a:r>
+            <a:r>
+              <a:rPr sz="1600">
+                <a:solidFill>
+                  <a:srgbClr val="EEFFFF"/>
+                </a:solidFill>
+                <a:latin typeface="Consolas"/>
+              </a:rPr>
+              <a:t> </a:t>
+            </a:r>
+            <a:r>
+              <a:rPr sz="1600">
+                <a:solidFill>
+                  <a:srgbClr val="EEFFFF"/>
+                </a:solidFill>
+                <a:latin typeface="Consolas"/>
+              </a:rPr>
+              <a:t>impl_integer_ops_num</a:t>
+            </a:r>
+            <a:r>
+              <a:rPr sz="1600">
+                <a:solidFill>
+                  <a:srgbClr val="89DDFF"/>
+                </a:solidFill>
+                <a:latin typeface="Consolas"/>
+              </a:rPr>
+              <a:t>!</a:t>
+            </a:r>
+            <a:r>
+              <a:rPr sz="1600">
+                <a:solidFill>
+                  <a:srgbClr val="BAC2DE"/>
+                </a:solidFill>
+                <a:latin typeface="Consolas"/>
+              </a:rPr>
+              <a:t>(</a:t>
+            </a:r>
+            <a:r>
+              <a:rPr sz="1600">
+                <a:solidFill>
+                  <a:srgbClr val="C792EA"/>
+                </a:solidFill>
+                <a:latin typeface="Consolas"/>
+              </a:rPr>
+              <a:t>isize</a:t>
+            </a:r>
+            <a:r>
+              <a:rPr sz="1600">
+                <a:solidFill>
+                  <a:srgbClr val="BAC2DE"/>
+                </a:solidFill>
+                <a:latin typeface="Consolas"/>
+              </a:rPr>
+              <a:t>)</a:t>
+            </a:r>
+            <a:r>
+              <a:rPr sz="1600">
+                <a:solidFill>
+                  <a:srgbClr val="BAC2DE"/>
+                </a:solidFill>
+                <a:latin typeface="Consolas"/>
+              </a:rPr>
+              <a:t>;</a:t>
+            </a:r>
+            <a:r>
+              <a:rPr sz="1600">
+                <a:solidFill>
+                  <a:srgbClr val="EEFFFF"/>
+                </a:solidFill>
+                <a:latin typeface="Consolas"/>
+              </a:rPr>
+              <a:t> </a:t>
+            </a:r>
+            <a:r>
+              <a:rPr sz="1600">
+                <a:solidFill>
+                  <a:srgbClr val="BAC2DE"/>
+                </a:solidFill>
+                <a:latin typeface="Consolas"/>
+              </a:rPr>
+              <a:t>}</a:t>
+            </a:r>
+          </a:p>
+          <a:p>
+            <a:pPr>
+              <a:lnSpc>
+                <a:spcPct val="95000"/>
+              </a:lnSpc>
+              <a:spcBef>
+                <a:spcPts val="0"/>
+              </a:spcBef>
+              <a:spcAft>
+                <a:spcPts val="0"/>
+              </a:spcAft>
+            </a:pPr>
+            <a:r>
+              <a:rPr sz="1600">
+                <a:solidFill>
+                  <a:srgbClr val="C792EA"/>
+                </a:solidFill>
+                <a:latin typeface="Consolas"/>
+              </a:rPr>
+              <a:t>impl</a:t>
+            </a:r>
+            <a:r>
+              <a:rPr sz="1600">
+                <a:solidFill>
+                  <a:srgbClr val="EEFFFF"/>
+                </a:solidFill>
+                <a:latin typeface="Consolas"/>
+              </a:rPr>
+              <a:t> </a:t>
+            </a:r>
+            <a:r>
+              <a:rPr sz="1600">
+                <a:solidFill>
+                  <a:srgbClr val="EEFFFF"/>
+                </a:solidFill>
+                <a:latin typeface="Consolas"/>
+              </a:rPr>
+              <a:t>Integer</a:t>
+            </a:r>
+            <a:r>
+              <a:rPr sz="1600">
+                <a:solidFill>
+                  <a:srgbClr val="EEFFFF"/>
+                </a:solidFill>
+                <a:latin typeface="Consolas"/>
+              </a:rPr>
+              <a:t> </a:t>
+            </a:r>
+            <a:r>
+              <a:rPr sz="1600">
+                <a:solidFill>
+                  <a:srgbClr val="C792EA"/>
+                </a:solidFill>
+                <a:latin typeface="Consolas"/>
+              </a:rPr>
+              <a:t>for</a:t>
+            </a:r>
+            <a:r>
+              <a:rPr sz="1600">
+                <a:solidFill>
+                  <a:srgbClr val="EEFFFF"/>
+                </a:solidFill>
+                <a:latin typeface="Consolas"/>
+              </a:rPr>
+              <a:t> </a:t>
+            </a:r>
+            <a:r>
+              <a:rPr sz="1600">
+                <a:solidFill>
+                  <a:srgbClr val="C792EA"/>
+                </a:solidFill>
+                <a:latin typeface="Consolas"/>
+              </a:rPr>
+              <a:t>usize</a:t>
+            </a:r>
+            <a:r>
+              <a:rPr sz="1600">
+                <a:solidFill>
+                  <a:srgbClr val="EEFFFF"/>
+                </a:solidFill>
+                <a:latin typeface="Consolas"/>
+              </a:rPr>
+              <a:t> </a:t>
+            </a:r>
+            <a:r>
+              <a:rPr sz="1600">
+                <a:solidFill>
+                  <a:srgbClr val="BAC2DE"/>
+                </a:solidFill>
+                <a:latin typeface="Consolas"/>
+              </a:rPr>
+              <a:t>{</a:t>
+            </a:r>
+            <a:r>
+              <a:rPr sz="1600">
+                <a:solidFill>
+                  <a:srgbClr val="EEFFFF"/>
+                </a:solidFill>
+                <a:latin typeface="Consolas"/>
+              </a:rPr>
+              <a:t> </a:t>
+            </a:r>
+            <a:r>
+              <a:rPr sz="1600">
+                <a:solidFill>
+                  <a:srgbClr val="EEFFFF"/>
+                </a:solidFill>
+                <a:latin typeface="Consolas"/>
+              </a:rPr>
+              <a:t>impl_integer_ops_num</a:t>
+            </a:r>
+            <a:r>
+              <a:rPr sz="1600">
+                <a:solidFill>
+                  <a:srgbClr val="89DDFF"/>
+                </a:solidFill>
+                <a:latin typeface="Consolas"/>
+              </a:rPr>
+              <a:t>!</a:t>
+            </a:r>
+            <a:r>
+              <a:rPr sz="1600">
+                <a:solidFill>
+                  <a:srgbClr val="BAC2DE"/>
+                </a:solidFill>
+                <a:latin typeface="Consolas"/>
+              </a:rPr>
+              <a:t>(</a:t>
+            </a:r>
+            <a:r>
+              <a:rPr sz="1600">
+                <a:solidFill>
+                  <a:srgbClr val="C792EA"/>
+                </a:solidFill>
+                <a:latin typeface="Consolas"/>
+              </a:rPr>
+              <a:t>usize</a:t>
+            </a:r>
+            <a:r>
+              <a:rPr sz="1600">
+                <a:solidFill>
+                  <a:srgbClr val="BAC2DE"/>
+                </a:solidFill>
+                <a:latin typeface="Consolas"/>
+              </a:rPr>
+              <a:t>)</a:t>
+            </a:r>
+            <a:r>
+              <a:rPr sz="1600">
+                <a:solidFill>
+                  <a:srgbClr val="BAC2DE"/>
+                </a:solidFill>
+                <a:latin typeface="Consolas"/>
+              </a:rPr>
+              <a:t>;</a:t>
+            </a:r>
+            <a:r>
+              <a:rPr sz="1600">
+                <a:solidFill>
+                  <a:srgbClr val="EEFFFF"/>
+                </a:solidFill>
+                <a:latin typeface="Consolas"/>
+              </a:rPr>
+              <a:t> </a:t>
+            </a:r>
+            <a:r>
+              <a:rPr sz="1600">
+                <a:solidFill>
+                  <a:srgbClr val="BAC2DE"/>
+                </a:solidFill>
+                <a:latin typeface="Consolas"/>
+              </a:rPr>
+              <a:t>}</a:t>
+            </a:r>
+          </a:p>
+          <a:p>
+            <a:pPr>
+              <a:lnSpc>
+                <a:spcPct val="95000"/>
+              </a:lnSpc>
+              <a:spcBef>
+                <a:spcPts val="0"/>
+              </a:spcBef>
+              <a:spcAft>
+                <a:spcPts val="0"/>
+              </a:spcAft>
+            </a:pPr>
+            <a:r>
+              <a:rPr sz="1600">
+                <a:solidFill>
+                  <a:srgbClr val="C792EA"/>
+                </a:solidFill>
+                <a:latin typeface="Consolas"/>
+              </a:rPr>
+              <a:t>impl</a:t>
+            </a:r>
+            <a:r>
+              <a:rPr sz="1600">
+                <a:solidFill>
+                  <a:srgbClr val="EEFFFF"/>
+                </a:solidFill>
+                <a:latin typeface="Consolas"/>
+              </a:rPr>
+              <a:t> </a:t>
+            </a:r>
+            <a:r>
+              <a:rPr sz="1600">
+                <a:solidFill>
+                  <a:srgbClr val="EEFFFF"/>
+                </a:solidFill>
+                <a:latin typeface="Consolas"/>
+              </a:rPr>
+              <a:t>Integer</a:t>
+            </a:r>
+            <a:r>
+              <a:rPr sz="1600">
+                <a:solidFill>
+                  <a:srgbClr val="EEFFFF"/>
+                </a:solidFill>
+                <a:latin typeface="Consolas"/>
+              </a:rPr>
+              <a:t> </a:t>
+            </a:r>
+            <a:r>
+              <a:rPr sz="1600">
+                <a:solidFill>
+                  <a:srgbClr val="C792EA"/>
+                </a:solidFill>
+                <a:latin typeface="Consolas"/>
+              </a:rPr>
+              <a:t>for</a:t>
+            </a:r>
+            <a:r>
+              <a:rPr sz="1600">
+                <a:solidFill>
+                  <a:srgbClr val="EEFFFF"/>
+                </a:solidFill>
+                <a:latin typeface="Consolas"/>
+              </a:rPr>
+              <a:t> </a:t>
+            </a:r>
+            <a:r>
+              <a:rPr sz="1600">
+                <a:solidFill>
+                  <a:srgbClr val="EEFFFF"/>
+                </a:solidFill>
+                <a:latin typeface="Consolas"/>
+              </a:rPr>
+              <a:t>Ipv4Addr</a:t>
+            </a:r>
+            <a:r>
+              <a:rPr sz="1600">
+                <a:solidFill>
+                  <a:srgbClr val="EEFFFF"/>
+                </a:solidFill>
+                <a:latin typeface="Consolas"/>
+              </a:rPr>
+              <a:t> </a:t>
+            </a:r>
+            <a:r>
+              <a:rPr sz="1600">
+                <a:solidFill>
+                  <a:srgbClr val="BAC2DE"/>
+                </a:solidFill>
+                <a:latin typeface="Consolas"/>
+              </a:rPr>
+              <a:t>{</a:t>
+            </a:r>
+            <a:r>
+              <a:rPr sz="1600">
+                <a:solidFill>
+                  <a:srgbClr val="EEFFFF"/>
+                </a:solidFill>
+                <a:latin typeface="Consolas"/>
+              </a:rPr>
+              <a:t> </a:t>
+            </a:r>
+            <a:r>
+              <a:rPr sz="1600">
+                <a:solidFill>
+                  <a:srgbClr val="EEFFFF"/>
+                </a:solidFill>
+                <a:latin typeface="Consolas"/>
+              </a:rPr>
+              <a:t>impl_integer_ops_ip</a:t>
+            </a:r>
+            <a:r>
+              <a:rPr sz="1600">
+                <a:solidFill>
+                  <a:srgbClr val="89DDFF"/>
+                </a:solidFill>
+                <a:latin typeface="Consolas"/>
+              </a:rPr>
+              <a:t>!</a:t>
+            </a:r>
+            <a:r>
+              <a:rPr sz="1600">
+                <a:solidFill>
+                  <a:srgbClr val="BAC2DE"/>
+                </a:solidFill>
+                <a:latin typeface="Consolas"/>
+              </a:rPr>
+              <a:t>(</a:t>
+            </a:r>
+            <a:r>
+              <a:rPr sz="1600">
+                <a:solidFill>
+                  <a:srgbClr val="EEFFFF"/>
+                </a:solidFill>
+                <a:latin typeface="Consolas"/>
+              </a:rPr>
+              <a:t>Ipv4Addr</a:t>
+            </a:r>
+            <a:r>
+              <a:rPr sz="1600">
+                <a:solidFill>
+                  <a:srgbClr val="BAC2DE"/>
+                </a:solidFill>
+                <a:latin typeface="Consolas"/>
+              </a:rPr>
+              <a:t>,</a:t>
+            </a:r>
+            <a:r>
+              <a:rPr sz="1600">
+                <a:solidFill>
+                  <a:srgbClr val="EEFFFF"/>
+                </a:solidFill>
+                <a:latin typeface="Consolas"/>
+              </a:rPr>
+              <a:t> </a:t>
+            </a:r>
+            <a:r>
+              <a:rPr sz="1600">
+                <a:solidFill>
+                  <a:srgbClr val="C792EA"/>
+                </a:solidFill>
+                <a:latin typeface="Consolas"/>
+              </a:rPr>
+              <a:t>u32</a:t>
+            </a:r>
+            <a:r>
+              <a:rPr sz="1600">
+                <a:solidFill>
+                  <a:srgbClr val="BAC2DE"/>
+                </a:solidFill>
+                <a:latin typeface="Consolas"/>
+              </a:rPr>
+              <a:t>)</a:t>
+            </a:r>
+            <a:r>
+              <a:rPr sz="1600">
+                <a:solidFill>
+                  <a:srgbClr val="BAC2DE"/>
+                </a:solidFill>
+                <a:latin typeface="Consolas"/>
+              </a:rPr>
+              <a:t>;</a:t>
+            </a:r>
+            <a:r>
+              <a:rPr sz="1600">
+                <a:solidFill>
+                  <a:srgbClr val="EEFFFF"/>
+                </a:solidFill>
+                <a:latin typeface="Consolas"/>
+              </a:rPr>
+              <a:t> </a:t>
+            </a:r>
+            <a:r>
+              <a:rPr sz="1600">
+                <a:solidFill>
+                  <a:srgbClr val="BAC2DE"/>
+                </a:solidFill>
+                <a:latin typeface="Consolas"/>
+              </a:rPr>
+              <a:t>}</a:t>
+            </a:r>
+          </a:p>
+          <a:p>
+            <a:pPr>
+              <a:lnSpc>
+                <a:spcPct val="95000"/>
+              </a:lnSpc>
+              <a:spcBef>
+                <a:spcPts val="0"/>
+              </a:spcBef>
+              <a:spcAft>
+                <a:spcPts val="0"/>
+              </a:spcAft>
+            </a:pPr>
+            <a:r>
+              <a:rPr sz="1600">
+                <a:solidFill>
+                  <a:srgbClr val="C792EA"/>
+                </a:solidFill>
+                <a:latin typeface="Consolas"/>
+              </a:rPr>
+              <a:t>impl</a:t>
+            </a:r>
+            <a:r>
+              <a:rPr sz="1600">
+                <a:solidFill>
+                  <a:srgbClr val="EEFFFF"/>
+                </a:solidFill>
+                <a:latin typeface="Consolas"/>
+              </a:rPr>
+              <a:t> </a:t>
+            </a:r>
+            <a:r>
+              <a:rPr sz="1600">
+                <a:solidFill>
+                  <a:srgbClr val="EEFFFF"/>
+                </a:solidFill>
+                <a:latin typeface="Consolas"/>
+              </a:rPr>
+              <a:t>Integer</a:t>
+            </a:r>
+            <a:r>
+              <a:rPr sz="1600">
+                <a:solidFill>
+                  <a:srgbClr val="EEFFFF"/>
+                </a:solidFill>
+                <a:latin typeface="Consolas"/>
+              </a:rPr>
+              <a:t> </a:t>
+            </a:r>
+            <a:r>
+              <a:rPr sz="1600">
+                <a:solidFill>
+                  <a:srgbClr val="C792EA"/>
+                </a:solidFill>
+                <a:latin typeface="Consolas"/>
+              </a:rPr>
+              <a:t>for</a:t>
+            </a:r>
+            <a:r>
+              <a:rPr sz="1600">
+                <a:solidFill>
+                  <a:srgbClr val="EEFFFF"/>
+                </a:solidFill>
+                <a:latin typeface="Consolas"/>
+              </a:rPr>
+              <a:t> </a:t>
+            </a:r>
+            <a:r>
+              <a:rPr sz="1600">
+                <a:solidFill>
+                  <a:srgbClr val="EEFFFF"/>
+                </a:solidFill>
+                <a:latin typeface="Consolas"/>
+              </a:rPr>
+              <a:t>Ipv6Addr</a:t>
+            </a:r>
+            <a:r>
+              <a:rPr sz="1600">
+                <a:solidFill>
+                  <a:srgbClr val="EEFFFF"/>
+                </a:solidFill>
+                <a:latin typeface="Consolas"/>
+              </a:rPr>
+              <a:t> </a:t>
+            </a:r>
+            <a:r>
+              <a:rPr sz="1600">
+                <a:solidFill>
+                  <a:srgbClr val="BAC2DE"/>
+                </a:solidFill>
+                <a:latin typeface="Consolas"/>
+              </a:rPr>
+              <a:t>{</a:t>
+            </a:r>
+            <a:r>
+              <a:rPr sz="1600">
+                <a:solidFill>
+                  <a:srgbClr val="EEFFFF"/>
+                </a:solidFill>
+                <a:latin typeface="Consolas"/>
+              </a:rPr>
+              <a:t> </a:t>
+            </a:r>
+            <a:r>
+              <a:rPr sz="1600">
+                <a:solidFill>
+                  <a:srgbClr val="EEFFFF"/>
+                </a:solidFill>
+                <a:latin typeface="Consolas"/>
+              </a:rPr>
+              <a:t>impl_integer_ops_ip</a:t>
+            </a:r>
+            <a:r>
+              <a:rPr sz="1600">
+                <a:solidFill>
+                  <a:srgbClr val="89DDFF"/>
+                </a:solidFill>
+                <a:latin typeface="Consolas"/>
+              </a:rPr>
+              <a:t>!</a:t>
+            </a:r>
+            <a:r>
+              <a:rPr sz="1600">
+                <a:solidFill>
+                  <a:srgbClr val="BAC2DE"/>
+                </a:solidFill>
+                <a:latin typeface="Consolas"/>
+              </a:rPr>
+              <a:t>(</a:t>
+            </a:r>
+            <a:r>
+              <a:rPr sz="1600">
+                <a:solidFill>
+                  <a:srgbClr val="EEFFFF"/>
+                </a:solidFill>
+                <a:latin typeface="Consolas"/>
+              </a:rPr>
+              <a:t>Ipv6Addr</a:t>
+            </a:r>
+            <a:r>
+              <a:rPr sz="1600">
+                <a:solidFill>
+                  <a:srgbClr val="BAC2DE"/>
+                </a:solidFill>
+                <a:latin typeface="Consolas"/>
+              </a:rPr>
+              <a:t>,</a:t>
+            </a:r>
+            <a:r>
+              <a:rPr sz="1600">
+                <a:solidFill>
+                  <a:srgbClr val="EEFFFF"/>
+                </a:solidFill>
+                <a:latin typeface="Consolas"/>
+              </a:rPr>
+              <a:t> </a:t>
+            </a:r>
+            <a:r>
+              <a:rPr sz="1600">
+                <a:solidFill>
+                  <a:srgbClr val="C792EA"/>
+                </a:solidFill>
+                <a:latin typeface="Consolas"/>
+              </a:rPr>
+              <a:t>u128</a:t>
+            </a:r>
+            <a:r>
+              <a:rPr sz="1600">
+                <a:solidFill>
+                  <a:srgbClr val="BAC2DE"/>
+                </a:solidFill>
+                <a:latin typeface="Consolas"/>
+              </a:rPr>
+              <a:t>)</a:t>
+            </a:r>
+            <a:r>
+              <a:rPr sz="1600">
+                <a:solidFill>
+                  <a:srgbClr val="BAC2DE"/>
+                </a:solidFill>
+                <a:latin typeface="Consolas"/>
+              </a:rPr>
+              <a:t>;</a:t>
+            </a:r>
+            <a:r>
+              <a:rPr sz="1600">
+                <a:solidFill>
+                  <a:srgbClr val="EEFFFF"/>
+                </a:solidFill>
+                <a:latin typeface="Consolas"/>
+              </a:rPr>
+              <a:t> </a:t>
+            </a:r>
+            <a:r>
+              <a:rPr sz="1600">
+                <a:solidFill>
+                  <a:srgbClr val="BAC2DE"/>
+                </a:solidFill>
+                <a:latin typeface="Consolas"/>
+              </a:rPr>
+              <a:t>}</a:t>
+            </a:r>
+          </a:p>
+          <a:p>
+            <a:pPr>
+              <a:lnSpc>
+                <a:spcPct val="95000"/>
+              </a:lnSpc>
+              <a:spcBef>
+                <a:spcPts val="0"/>
+              </a:spcBef>
+              <a:spcAft>
+                <a:spcPts val="0"/>
+              </a:spcAft>
+            </a:pPr>
+            <a:r>
+              <a:rPr sz="1600">
+                <a:solidFill>
+                  <a:srgbClr val="C792EA"/>
+                </a:solidFill>
+                <a:latin typeface="Consolas"/>
+              </a:rPr>
+              <a:t>impl</a:t>
+            </a:r>
+            <a:r>
+              <a:rPr sz="1600">
+                <a:solidFill>
+                  <a:srgbClr val="EEFFFF"/>
+                </a:solidFill>
+                <a:latin typeface="Consolas"/>
+              </a:rPr>
+              <a:t> </a:t>
+            </a:r>
+            <a:r>
+              <a:rPr sz="1600">
+                <a:solidFill>
+                  <a:srgbClr val="EEFFFF"/>
+                </a:solidFill>
+                <a:latin typeface="Consolas"/>
+              </a:rPr>
+              <a:t>Integer</a:t>
+            </a:r>
+            <a:r>
+              <a:rPr sz="1600">
+                <a:solidFill>
+                  <a:srgbClr val="EEFFFF"/>
+                </a:solidFill>
+                <a:latin typeface="Consolas"/>
+              </a:rPr>
+              <a:t> </a:t>
+            </a:r>
+            <a:r>
+              <a:rPr sz="1600">
+                <a:solidFill>
+                  <a:srgbClr val="C792EA"/>
+                </a:solidFill>
+                <a:latin typeface="Consolas"/>
+              </a:rPr>
+              <a:t>for</a:t>
+            </a:r>
+            <a:r>
+              <a:rPr sz="1600">
+                <a:solidFill>
+                  <a:srgbClr val="EEFFFF"/>
+                </a:solidFill>
+                <a:latin typeface="Consolas"/>
+              </a:rPr>
+              <a:t> </a:t>
+            </a:r>
+            <a:r>
+              <a:rPr sz="1600">
+                <a:solidFill>
+                  <a:srgbClr val="C792EA"/>
+                </a:solidFill>
+                <a:latin typeface="Consolas"/>
+              </a:rPr>
+              <a:t>char</a:t>
+            </a:r>
+            <a:r>
+              <a:rPr sz="1600">
+                <a:solidFill>
+                  <a:srgbClr val="EEFFFF"/>
+                </a:solidFill>
+                <a:latin typeface="Consolas"/>
+              </a:rPr>
+              <a:t> </a:t>
+            </a:r>
+            <a:r>
+              <a:rPr sz="1600">
+                <a:solidFill>
+                  <a:srgbClr val="BAC2DE"/>
+                </a:solidFill>
+                <a:latin typeface="Consolas"/>
+              </a:rPr>
+              <a:t>{</a:t>
+            </a:r>
+            <a:r>
+              <a:rPr sz="1600">
+                <a:solidFill>
+                  <a:srgbClr val="EEFFFF"/>
+                </a:solidFill>
+                <a:latin typeface="Consolas"/>
+              </a:rPr>
+              <a:t> </a:t>
+            </a:r>
+            <a:r>
+              <a:rPr sz="1600">
+                <a:solidFill>
+                  <a:srgbClr val="EEFFFF"/>
+                </a:solidFill>
+                <a:latin typeface="Consolas"/>
+              </a:rPr>
+              <a:t>impl_integer_ops_char</a:t>
+            </a:r>
+            <a:r>
+              <a:rPr sz="1600">
+                <a:solidFill>
+                  <a:srgbClr val="89DDFF"/>
+                </a:solidFill>
+                <a:latin typeface="Consolas"/>
+              </a:rPr>
+              <a:t>!</a:t>
+            </a:r>
+            <a:r>
+              <a:rPr sz="1600">
+                <a:solidFill>
+                  <a:srgbClr val="BAC2DE"/>
+                </a:solidFill>
+                <a:latin typeface="Consolas"/>
+              </a:rPr>
+              <a:t>(</a:t>
+            </a:r>
+            <a:r>
+              <a:rPr sz="1600">
+                <a:solidFill>
+                  <a:srgbClr val="BAC2DE"/>
+                </a:solidFill>
+                <a:latin typeface="Consolas"/>
+              </a:rPr>
+              <a:t>)</a:t>
+            </a:r>
+            <a:r>
+              <a:rPr sz="1600">
+                <a:solidFill>
+                  <a:srgbClr val="BAC2DE"/>
+                </a:solidFill>
+                <a:latin typeface="Consolas"/>
+              </a:rPr>
+              <a:t>;</a:t>
+            </a:r>
+            <a:r>
+              <a:rPr sz="1600">
+                <a:solidFill>
+                  <a:srgbClr val="EEFFFF"/>
+                </a:solidFill>
+                <a:latin typeface="Consolas"/>
+              </a:rPr>
+              <a:t> </a:t>
+            </a:r>
+            <a:r>
+              <a:rPr sz="1600">
+                <a:solidFill>
+                  <a:srgbClr val="BAC2DE"/>
+                </a:solidFill>
+                <a:latin typeface="Consolas"/>
+              </a:rPr>
+              <a:t>}</a:t>
+            </a:r>
+          </a:p>
+          <a:p>
+            <a:pPr>
+              <a:lnSpc>
+                <a:spcPct val="95000"/>
+              </a:lnSpc>
+              <a:spcBef>
+                <a:spcPts val="0"/>
+              </a:spcBef>
+              <a:spcAft>
+                <a:spcPts val="0"/>
+              </a:spcAft>
+            </a:pPr>
+          </a:p>
+          <a:p>
+            <a:pPr>
+              <a:lnSpc>
+                <a:spcPct val="95000"/>
+              </a:lnSpc>
+              <a:spcBef>
+                <a:spcPts val="0"/>
+              </a:spcBef>
+              <a:spcAft>
+                <a:spcPts val="0"/>
+              </a:spcAft>
+            </a:pPr>
+            <a:r>
+              <a:rPr sz="1600">
+                <a:solidFill>
+                  <a:srgbClr val="6A9955"/>
+                </a:solidFill>
+                <a:latin typeface="Consolas"/>
+              </a:rPr>
+              <a:t>// Can't use num_traits::PrimInt as a 'subclass'</a:t>
+            </a:r>
+          </a:p>
+          <a:p>
+            <a:pPr>
+              <a:lnSpc>
+                <a:spcPct val="95000"/>
+              </a:lnSpc>
+              <a:spcBef>
+                <a:spcPts val="0"/>
+              </a:spcBef>
+              <a:spcAft>
+                <a:spcPts val="0"/>
+              </a:spcAft>
+            </a:pPr>
+            <a:r>
+              <a:rPr sz="1600">
+                <a:solidFill>
+                  <a:srgbClr val="6A9955"/>
+                </a:solidFill>
+                <a:latin typeface="Consolas"/>
+              </a:rPr>
+              <a:t>// because Rust worries that 'char' etc. might</a:t>
+            </a:r>
+          </a:p>
+        </p:txBody>
+      </p:sp>
+    </p:spTree>
+  </p:cSld>
+  <p:clrMapOvr>
+    <a:masterClrMapping/>
+  </p:clrMapOvr>
+</p:sld>
+</file>
+
+<file path=ppt/slides/slide5.xml><?xml version="1.0" encoding="utf-8"?>
+<p:sld xmlns:a="http://schemas.openxmlformats.org/drawingml/2006/main" xmlns:p="http://schemas.openxmlformats.org/presentationml/2006/main" xmlns:r="http://schemas.openxmlformats.org/officeDocument/2006/relationships">
+  <p:cSld>
+    <p:spTree>
+      <p:nvGrpSpPr>
+        <p:cNvPr id="1" name=""/>
+        <p:cNvGrpSpPr/>
+        <p:nvPr/>
+      </p:nvGrpSpPr>
+      <p:grpSpPr/>
+      <p:sp>
+        <p:nvSpPr>
+          <p:cNvPr id="2" name="Rectangle 1"/>
+          <p:cNvSpPr/>
+          <p:nvPr/>
+        </p:nvSpPr>
+        <p:spPr>
+          <a:xfrm>
+            <a:off x="0" y="0"/>
+            <a:ext cx="9144000" cy="6858000"/>
+          </a:xfrm>
+          <a:prstGeom prst="rect">
+            <a:avLst/>
+          </a:prstGeom>
+          <a:solidFill>
+            <a:srgbClr val="000000"/>
+          </a:solidFill>
+          <a:ln>
+            <a:noFill/>
+          </a:ln>
+        </p:spPr>
+        <p:style>
+          <a:lnRef idx="1">
+            <a:schemeClr val="accent1"/>
+          </a:lnRef>
+          <a:fillRef idx="3">
+            <a:schemeClr val="accent1"/>
+          </a:fillRef>
+          <a:effectRef idx="2">
+            <a:schemeClr val="accent1"/>
+          </a:effectRef>
+          <a:fontRef idx="minor">
+            <a:schemeClr val="lt1"/>
+          </a:fontRef>
+        </p:style>
+        <p:txBody>
+          <a:bodyPr rtlCol="0" anchor="ctr"/>
+          <a:lstStyle/>
+          <a:p>
+            <a:pPr algn="ctr"/>
+          </a:p>
+        </p:txBody>
+      </p:sp>
+      <p:sp>
+        <p:nvSpPr>
+          <p:cNvPr id="3" name="TextBox 2"/>
+          <p:cNvSpPr txBox="1"/>
+          <p:nvPr/>
+        </p:nvSpPr>
+        <p:spPr>
+          <a:xfrm>
+            <a:off x="164592" y="109728"/>
+            <a:ext cx="8814816" cy="6638544"/>
+          </a:xfrm>
+          <a:prstGeom prst="rect">
+            <a:avLst/>
+          </a:prstGeom>
+          <a:noFill/>
+        </p:spPr>
+        <p:txBody>
+          <a:bodyPr wrap="square">
+            <a:noAutofit/>
+          </a:bodyPr>
+          <a:lstStyle/>
+          <a:p>
+            <a:pPr>
+              <a:lnSpc>
+                <a:spcPct val="95000"/>
+              </a:lnSpc>
+              <a:spcBef>
+                <a:spcPts val="0"/>
+              </a:spcBef>
+              <a:spcAft>
+                <a:spcPts val="0"/>
+              </a:spcAft>
+            </a:pPr>
+            <a:r>
+              <a:rPr sz="1600">
+                <a:solidFill>
+                  <a:srgbClr val="6A9955"/>
+                </a:solidFill>
+                <a:latin typeface="Consolas"/>
+              </a:rPr>
+              <a:t>// be added to it later (coherence).</a:t>
+            </a:r>
+          </a:p>
+          <a:p>
+            <a:pPr>
+              <a:lnSpc>
+                <a:spcPct val="95000"/>
+              </a:lnSpc>
+              <a:spcBef>
+                <a:spcPts val="0"/>
+              </a:spcBef>
+              <a:spcAft>
+                <a:spcPts val="0"/>
+              </a:spcAft>
+            </a:pPr>
+          </a:p>
+          <a:p>
+            <a:pPr>
+              <a:lnSpc>
+                <a:spcPct val="95000"/>
+              </a:lnSpc>
+              <a:spcBef>
+                <a:spcPts val="0"/>
+              </a:spcBef>
+              <a:spcAft>
+                <a:spcPts val="0"/>
+              </a:spcAft>
+            </a:pPr>
+            <a:r>
+              <a:rPr sz="1600">
+                <a:solidFill>
+                  <a:srgbClr val="6A9955"/>
+                </a:solidFill>
+                <a:latin typeface="Consolas"/>
+              </a:rPr>
+              <a:t>// TECHNIQUE NAME: macro-generated implementation.</a:t>
+            </a:r>
+          </a:p>
+          <a:p>
+            <a:pPr>
+              <a:lnSpc>
+                <a:spcPct val="95000"/>
+              </a:lnSpc>
+              <a:spcBef>
+                <a:spcPts val="0"/>
+              </a:spcBef>
+              <a:spcAft>
+                <a:spcPts val="0"/>
+              </a:spcAft>
+            </a:pPr>
+          </a:p>
+          <a:p>
+            <a:pPr>
+              <a:lnSpc>
+                <a:spcPct val="95000"/>
+              </a:lnSpc>
+              <a:spcBef>
+                <a:spcPts val="0"/>
+              </a:spcBef>
+              <a:spcAft>
+                <a:spcPts val="0"/>
+              </a:spcAft>
+            </a:pPr>
+            <a:r>
+              <a:rPr sz="1600">
+                <a:solidFill>
+                  <a:srgbClr val="C792EA"/>
+                </a:solidFill>
+                <a:latin typeface="Consolas"/>
+              </a:rPr>
+              <a:t>fn</a:t>
+            </a:r>
+            <a:r>
+              <a:rPr sz="1600">
+                <a:solidFill>
+                  <a:srgbClr val="EEFFFF"/>
+                </a:solidFill>
+                <a:latin typeface="Consolas"/>
+              </a:rPr>
+              <a:t> </a:t>
+            </a:r>
+            <a:r>
+              <a:rPr sz="1600">
+                <a:solidFill>
+                  <a:srgbClr val="82AAFF"/>
+                </a:solidFill>
+                <a:latin typeface="Consolas"/>
+              </a:rPr>
+              <a:t>main</a:t>
+            </a:r>
+            <a:r>
+              <a:rPr sz="1600">
+                <a:solidFill>
+                  <a:srgbClr val="BAC2DE"/>
+                </a:solidFill>
+                <a:latin typeface="Consolas"/>
+              </a:rPr>
+              <a:t>(</a:t>
+            </a:r>
+            <a:r>
+              <a:rPr sz="1600">
+                <a:solidFill>
+                  <a:srgbClr val="BAC2DE"/>
+                </a:solidFill>
+                <a:latin typeface="Consolas"/>
+              </a:rPr>
+              <a:t>)</a:t>
+            </a:r>
+            <a:r>
+              <a:rPr sz="1600">
+                <a:solidFill>
+                  <a:srgbClr val="EEFFFF"/>
+                </a:solidFill>
+                <a:latin typeface="Consolas"/>
+              </a:rPr>
+              <a:t> </a:t>
+            </a:r>
+            <a:r>
+              <a:rPr sz="1600">
+                <a:solidFill>
+                  <a:srgbClr val="BAC2DE"/>
+                </a:solidFill>
+                <a:latin typeface="Consolas"/>
+              </a:rPr>
+              <a:t>{</a:t>
+            </a:r>
+          </a:p>
+          <a:p>
+            <a:pPr>
+              <a:lnSpc>
+                <a:spcPct val="95000"/>
+              </a:lnSpc>
+              <a:spcBef>
+                <a:spcPts val="0"/>
+              </a:spcBef>
+              <a:spcAft>
+                <a:spcPts val="0"/>
+              </a:spcAft>
+            </a:pPr>
+            <a:r>
+              <a:rPr sz="1600">
+                <a:solidFill>
+                  <a:srgbClr val="EEFFFF"/>
+                </a:solidFill>
+                <a:latin typeface="Consolas"/>
+              </a:rPr>
+              <a:t>    </a:t>
+            </a:r>
+            <a:r>
+              <a:rPr sz="1600">
+                <a:solidFill>
+                  <a:srgbClr val="C792EA"/>
+                </a:solidFill>
+                <a:latin typeface="Consolas"/>
+              </a:rPr>
+              <a:t>let</a:t>
+            </a:r>
+            <a:r>
+              <a:rPr sz="1600">
+                <a:solidFill>
+                  <a:srgbClr val="EEFFFF"/>
+                </a:solidFill>
+                <a:latin typeface="Consolas"/>
+              </a:rPr>
+              <a:t> </a:t>
+            </a:r>
+            <a:r>
+              <a:rPr sz="1600">
+                <a:solidFill>
+                  <a:srgbClr val="EEFFFF"/>
+                </a:solidFill>
+                <a:latin typeface="Consolas"/>
+              </a:rPr>
+              <a:t>x</a:t>
+            </a:r>
+            <a:r>
+              <a:rPr sz="1600">
+                <a:solidFill>
+                  <a:srgbClr val="BAC2DE"/>
+                </a:solidFill>
+                <a:latin typeface="Consolas"/>
+              </a:rPr>
+              <a:t>:</a:t>
+            </a:r>
+            <a:r>
+              <a:rPr sz="1600">
+                <a:solidFill>
+                  <a:srgbClr val="EEFFFF"/>
+                </a:solidFill>
+                <a:latin typeface="Consolas"/>
+              </a:rPr>
+              <a:t> </a:t>
+            </a:r>
+            <a:r>
+              <a:rPr sz="1600">
+                <a:solidFill>
+                  <a:srgbClr val="C792EA"/>
+                </a:solidFill>
+                <a:latin typeface="Consolas"/>
+              </a:rPr>
+              <a:t>u8</a:t>
+            </a:r>
+            <a:r>
+              <a:rPr sz="1600">
+                <a:solidFill>
+                  <a:srgbClr val="EEFFFF"/>
+                </a:solidFill>
+                <a:latin typeface="Consolas"/>
+              </a:rPr>
+              <a:t> </a:t>
+            </a:r>
+            <a:r>
+              <a:rPr sz="1600">
+                <a:solidFill>
+                  <a:srgbClr val="89DDFF"/>
+                </a:solidFill>
+                <a:latin typeface="Consolas"/>
+              </a:rPr>
+              <a:t>=</a:t>
+            </a:r>
+            <a:r>
+              <a:rPr sz="1600">
+                <a:solidFill>
+                  <a:srgbClr val="EEFFFF"/>
+                </a:solidFill>
+                <a:latin typeface="Consolas"/>
+              </a:rPr>
+              <a:t> </a:t>
+            </a:r>
+            <a:r>
+              <a:rPr sz="1600">
+                <a:solidFill>
                   <a:srgbClr val="F78C6C"/>
                 </a:solidFill>
                 <a:latin typeface="Consolas"/>
               </a:rPr>
-              <a:t>12.</a:t>
-            </a:r>
-            <a:r>
-              <a:rPr sz="1600">
-                <a:solidFill>
-                  <a:srgbClr val="EEFFFF"/>
-                </a:solidFill>
-                <a:latin typeface="Consolas"/>
-              </a:rPr>
-              <a:t>is_odd</a:t>
+              <a:t>254</a:t>
+            </a:r>
+            <a:r>
+              <a:rPr sz="1600">
+                <a:solidFill>
+                  <a:srgbClr val="BAC2DE"/>
+                </a:solidFill>
+                <a:latin typeface="Consolas"/>
+              </a:rPr>
+              <a:t>;</a:t>
+            </a:r>
+          </a:p>
+          <a:p>
+            <a:pPr>
+              <a:lnSpc>
+                <a:spcPct val="95000"/>
+              </a:lnSpc>
+              <a:spcBef>
+                <a:spcPts val="0"/>
+              </a:spcBef>
+              <a:spcAft>
+                <a:spcPts val="0"/>
+              </a:spcAft>
+            </a:pPr>
+            <a:r>
+              <a:rPr sz="1600">
+                <a:solidFill>
+                  <a:srgbClr val="EEFFFF"/>
+                </a:solidFill>
+                <a:latin typeface="Consolas"/>
+              </a:rPr>
+              <a:t>    </a:t>
+            </a:r>
+            <a:r>
+              <a:rPr sz="1600">
+                <a:solidFill>
+                  <a:srgbClr val="82AAFF"/>
+                </a:solidFill>
+                <a:latin typeface="Consolas"/>
+              </a:rPr>
+              <a:t>assert_eq!</a:t>
             </a:r>
             <a:r>
               <a:rPr sz="1600">
@@ -4427,6 +10975,885 @@
                 <a:latin typeface="Consolas"/>
               </a:rPr>
               <a:t>(</a:t>
+            </a:r>
+            <a:r>
+              <a:rPr sz="1600">
+                <a:solidFill>
+                  <a:srgbClr val="EEFFFF"/>
+                </a:solidFill>
+                <a:latin typeface="Consolas"/>
+              </a:rPr>
+              <a:t>x</a:t>
+            </a:r>
+            <a:r>
+              <a:rPr sz="1600">
+                <a:solidFill>
+                  <a:srgbClr val="BAC2DE"/>
+                </a:solidFill>
+                <a:latin typeface="Consolas"/>
+              </a:rPr>
+              <a:t>.</a:t>
+            </a:r>
+            <a:r>
+              <a:rPr sz="1600">
+                <a:solidFill>
+                  <a:srgbClr val="EEFFFF"/>
+                </a:solidFill>
+                <a:latin typeface="Consolas"/>
+              </a:rPr>
+              <a:t>add_one</a:t>
+            </a:r>
+            <a:r>
+              <a:rPr sz="1600">
+                <a:solidFill>
+                  <a:srgbClr val="BAC2DE"/>
+                </a:solidFill>
+                <a:latin typeface="Consolas"/>
+              </a:rPr>
+              <a:t>(</a:t>
+            </a:r>
+            <a:r>
+              <a:rPr sz="1600">
+                <a:solidFill>
+                  <a:srgbClr val="BAC2DE"/>
+                </a:solidFill>
+                <a:latin typeface="Consolas"/>
+              </a:rPr>
+              <a:t>)</a:t>
+            </a:r>
+            <a:r>
+              <a:rPr sz="1600">
+                <a:solidFill>
+                  <a:srgbClr val="BAC2DE"/>
+                </a:solidFill>
+                <a:latin typeface="Consolas"/>
+              </a:rPr>
+              <a:t>,</a:t>
+            </a:r>
+            <a:r>
+              <a:rPr sz="1600">
+                <a:solidFill>
+                  <a:srgbClr val="EEFFFF"/>
+                </a:solidFill>
+                <a:latin typeface="Consolas"/>
+              </a:rPr>
+              <a:t> </a:t>
+            </a:r>
+            <a:r>
+              <a:rPr sz="1600">
+                <a:solidFill>
+                  <a:srgbClr val="F78C6C"/>
+                </a:solidFill>
+                <a:latin typeface="Consolas"/>
+              </a:rPr>
+              <a:t>255</a:t>
+            </a:r>
+            <a:r>
+              <a:rPr sz="1600">
+                <a:solidFill>
+                  <a:srgbClr val="BAC2DE"/>
+                </a:solidFill>
+                <a:latin typeface="Consolas"/>
+              </a:rPr>
+              <a:t>)</a:t>
+            </a:r>
+            <a:r>
+              <a:rPr sz="1600">
+                <a:solidFill>
+                  <a:srgbClr val="BAC2DE"/>
+                </a:solidFill>
+                <a:latin typeface="Consolas"/>
+              </a:rPr>
+              <a:t>;</a:t>
+            </a:r>
+          </a:p>
+          <a:p>
+            <a:pPr>
+              <a:lnSpc>
+                <a:spcPct val="95000"/>
+              </a:lnSpc>
+              <a:spcBef>
+                <a:spcPts val="0"/>
+              </a:spcBef>
+              <a:spcAft>
+                <a:spcPts val="0"/>
+              </a:spcAft>
+            </a:pPr>
+            <a:r>
+              <a:rPr sz="1600">
+                <a:solidFill>
+                  <a:srgbClr val="EEFFFF"/>
+                </a:solidFill>
+                <a:latin typeface="Consolas"/>
+              </a:rPr>
+              <a:t>    </a:t>
+            </a:r>
+            <a:r>
+              <a:rPr sz="1600">
+                <a:solidFill>
+                  <a:srgbClr val="82AAFF"/>
+                </a:solidFill>
+                <a:latin typeface="Consolas"/>
+              </a:rPr>
+              <a:t>assert_eq!</a:t>
+            </a:r>
+            <a:r>
+              <a:rPr sz="1600">
+                <a:solidFill>
+                  <a:srgbClr val="BAC2DE"/>
+                </a:solidFill>
+                <a:latin typeface="Consolas"/>
+              </a:rPr>
+              <a:t>(</a:t>
+            </a:r>
+            <a:r>
+              <a:rPr sz="1600">
+                <a:solidFill>
+                  <a:srgbClr val="C3E88D"/>
+                </a:solidFill>
+                <a:latin typeface="Consolas"/>
+              </a:rPr>
+              <a:t>'a'</a:t>
+            </a:r>
+            <a:r>
+              <a:rPr sz="1600">
+                <a:solidFill>
+                  <a:srgbClr val="BAC2DE"/>
+                </a:solidFill>
+                <a:latin typeface="Consolas"/>
+              </a:rPr>
+              <a:t>.</a:t>
+            </a:r>
+            <a:r>
+              <a:rPr sz="1600">
+                <a:solidFill>
+                  <a:srgbClr val="EEFFFF"/>
+                </a:solidFill>
+                <a:latin typeface="Consolas"/>
+              </a:rPr>
+              <a:t>add_one</a:t>
+            </a:r>
+            <a:r>
+              <a:rPr sz="1600">
+                <a:solidFill>
+                  <a:srgbClr val="BAC2DE"/>
+                </a:solidFill>
+                <a:latin typeface="Consolas"/>
+              </a:rPr>
+              <a:t>(</a:t>
+            </a:r>
+            <a:r>
+              <a:rPr sz="1600">
+                <a:solidFill>
+                  <a:srgbClr val="BAC2DE"/>
+                </a:solidFill>
+                <a:latin typeface="Consolas"/>
+              </a:rPr>
+              <a:t>)</a:t>
+            </a:r>
+            <a:r>
+              <a:rPr sz="1600">
+                <a:solidFill>
+                  <a:srgbClr val="BAC2DE"/>
+                </a:solidFill>
+                <a:latin typeface="Consolas"/>
+              </a:rPr>
+              <a:t>,</a:t>
+            </a:r>
+            <a:r>
+              <a:rPr sz="1600">
+                <a:solidFill>
+                  <a:srgbClr val="EEFFFF"/>
+                </a:solidFill>
+                <a:latin typeface="Consolas"/>
+              </a:rPr>
+              <a:t> </a:t>
+            </a:r>
+            <a:r>
+              <a:rPr sz="1600">
+                <a:solidFill>
+                  <a:srgbClr val="C3E88D"/>
+                </a:solidFill>
+                <a:latin typeface="Consolas"/>
+              </a:rPr>
+              <a:t>'b'</a:t>
+            </a:r>
+            <a:r>
+              <a:rPr sz="1600">
+                <a:solidFill>
+                  <a:srgbClr val="BAC2DE"/>
+                </a:solidFill>
+                <a:latin typeface="Consolas"/>
+              </a:rPr>
+              <a:t>)</a:t>
+            </a:r>
+            <a:r>
+              <a:rPr sz="1600">
+                <a:solidFill>
+                  <a:srgbClr val="BAC2DE"/>
+                </a:solidFill>
+                <a:latin typeface="Consolas"/>
+              </a:rPr>
+              <a:t>;</a:t>
+            </a:r>
+          </a:p>
+          <a:p>
+            <a:pPr>
+              <a:lnSpc>
+                <a:spcPct val="95000"/>
+              </a:lnSpc>
+              <a:spcBef>
+                <a:spcPts val="0"/>
+              </a:spcBef>
+              <a:spcAft>
+                <a:spcPts val="0"/>
+              </a:spcAft>
+            </a:pPr>
+          </a:p>
+          <a:p>
+            <a:pPr>
+              <a:lnSpc>
+                <a:spcPct val="95000"/>
+              </a:lnSpc>
+              <a:spcBef>
+                <a:spcPts val="0"/>
+              </a:spcBef>
+              <a:spcAft>
+                <a:spcPts val="0"/>
+              </a:spcAft>
+            </a:pPr>
+            <a:r>
+              <a:rPr sz="1600">
+                <a:solidFill>
+                  <a:srgbClr val="EEFFFF"/>
+                </a:solidFill>
+                <a:latin typeface="Consolas"/>
+              </a:rPr>
+              <a:t>    </a:t>
+            </a:r>
+            <a:r>
+              <a:rPr sz="1600">
+                <a:solidFill>
+                  <a:srgbClr val="82AAFF"/>
+                </a:solidFill>
+                <a:latin typeface="Consolas"/>
+              </a:rPr>
+              <a:t>assert_eq!</a:t>
+            </a:r>
+            <a:r>
+              <a:rPr sz="1600">
+                <a:solidFill>
+                  <a:srgbClr val="BAC2DE"/>
+                </a:solidFill>
+                <a:latin typeface="Consolas"/>
+              </a:rPr>
+              <a:t>(</a:t>
+            </a:r>
+            <a:r>
+              <a:rPr sz="1600">
+                <a:solidFill>
+                  <a:srgbClr val="C792EA"/>
+                </a:solidFill>
+                <a:latin typeface="Consolas"/>
+              </a:rPr>
+              <a:t>char</a:t>
+            </a:r>
+            <a:r>
+              <a:rPr sz="1600">
+                <a:solidFill>
+                  <a:srgbClr val="BAC2DE"/>
+                </a:solidFill>
+                <a:latin typeface="Consolas"/>
+              </a:rPr>
+              <a:t>::</a:t>
+            </a:r>
+            <a:r>
+              <a:rPr sz="1600">
+                <a:solidFill>
+                  <a:srgbClr val="EEFFFF"/>
+                </a:solidFill>
+                <a:latin typeface="Consolas"/>
+              </a:rPr>
+              <a:t>min_value</a:t>
+            </a:r>
+            <a:r>
+              <a:rPr sz="1600">
+                <a:solidFill>
+                  <a:srgbClr val="BAC2DE"/>
+                </a:solidFill>
+                <a:latin typeface="Consolas"/>
+              </a:rPr>
+              <a:t>(</a:t>
+            </a:r>
+            <a:r>
+              <a:rPr sz="1600">
+                <a:solidFill>
+                  <a:srgbClr val="BAC2DE"/>
+                </a:solidFill>
+                <a:latin typeface="Consolas"/>
+              </a:rPr>
+              <a:t>)</a:t>
+            </a:r>
+            <a:r>
+              <a:rPr sz="1600">
+                <a:solidFill>
+                  <a:srgbClr val="BAC2DE"/>
+                </a:solidFill>
+                <a:latin typeface="Consolas"/>
+              </a:rPr>
+              <a:t>,</a:t>
+            </a:r>
+            <a:r>
+              <a:rPr sz="1600">
+                <a:solidFill>
+                  <a:srgbClr val="EEFFFF"/>
+                </a:solidFill>
+                <a:latin typeface="Consolas"/>
+              </a:rPr>
+              <a:t> </a:t>
+            </a:r>
+            <a:r>
+              <a:rPr sz="1600">
+                <a:solidFill>
+                  <a:srgbClr val="C792EA"/>
+                </a:solidFill>
+                <a:latin typeface="Consolas"/>
+              </a:rPr>
+              <a:t>char</a:t>
+            </a:r>
+            <a:r>
+              <a:rPr sz="1600">
+                <a:solidFill>
+                  <a:srgbClr val="BAC2DE"/>
+                </a:solidFill>
+                <a:latin typeface="Consolas"/>
+              </a:rPr>
+              <a:t>::</a:t>
+            </a:r>
+            <a:r>
+              <a:rPr sz="1600">
+                <a:solidFill>
+                  <a:srgbClr val="EEFFFF"/>
+                </a:solidFill>
+                <a:latin typeface="Consolas"/>
+              </a:rPr>
+              <a:t>MIN</a:t>
+            </a:r>
+            <a:r>
+              <a:rPr sz="1600">
+                <a:solidFill>
+                  <a:srgbClr val="BAC2DE"/>
+                </a:solidFill>
+                <a:latin typeface="Consolas"/>
+              </a:rPr>
+              <a:t>)</a:t>
+            </a:r>
+            <a:r>
+              <a:rPr sz="1600">
+                <a:solidFill>
+                  <a:srgbClr val="BAC2DE"/>
+                </a:solidFill>
+                <a:latin typeface="Consolas"/>
+              </a:rPr>
+              <a:t>;</a:t>
+            </a:r>
+          </a:p>
+          <a:p>
+            <a:pPr>
+              <a:lnSpc>
+                <a:spcPct val="95000"/>
+              </a:lnSpc>
+              <a:spcBef>
+                <a:spcPts val="0"/>
+              </a:spcBef>
+              <a:spcAft>
+                <a:spcPts val="0"/>
+              </a:spcAft>
+            </a:pPr>
+            <a:r>
+              <a:rPr sz="1600">
+                <a:solidFill>
+                  <a:srgbClr val="EEFFFF"/>
+                </a:solidFill>
+                <a:latin typeface="Consolas"/>
+              </a:rPr>
+              <a:t>    </a:t>
+            </a:r>
+            <a:r>
+              <a:rPr sz="1600">
+                <a:solidFill>
+                  <a:srgbClr val="82AAFF"/>
+                </a:solidFill>
+                <a:latin typeface="Consolas"/>
+              </a:rPr>
+              <a:t>assert_eq!</a:t>
+            </a:r>
+            <a:r>
+              <a:rPr sz="1600">
+                <a:solidFill>
+                  <a:srgbClr val="BAC2DE"/>
+                </a:solidFill>
+                <a:latin typeface="Consolas"/>
+              </a:rPr>
+              <a:t>(</a:t>
+            </a:r>
+            <a:r>
+              <a:rPr sz="1600">
+                <a:solidFill>
+                  <a:srgbClr val="C792EA"/>
+                </a:solidFill>
+                <a:latin typeface="Consolas"/>
+              </a:rPr>
+              <a:t>char</a:t>
+            </a:r>
+            <a:r>
+              <a:rPr sz="1600">
+                <a:solidFill>
+                  <a:srgbClr val="BAC2DE"/>
+                </a:solidFill>
+                <a:latin typeface="Consolas"/>
+              </a:rPr>
+              <a:t>::</a:t>
+            </a:r>
+            <a:r>
+              <a:rPr sz="1600">
+                <a:solidFill>
+                  <a:srgbClr val="EEFFFF"/>
+                </a:solidFill>
+                <a:latin typeface="Consolas"/>
+              </a:rPr>
+              <a:t>max_value</a:t>
+            </a:r>
+            <a:r>
+              <a:rPr sz="1600">
+                <a:solidFill>
+                  <a:srgbClr val="BAC2DE"/>
+                </a:solidFill>
+                <a:latin typeface="Consolas"/>
+              </a:rPr>
+              <a:t>(</a:t>
+            </a:r>
+            <a:r>
+              <a:rPr sz="1600">
+                <a:solidFill>
+                  <a:srgbClr val="BAC2DE"/>
+                </a:solidFill>
+                <a:latin typeface="Consolas"/>
+              </a:rPr>
+              <a:t>)</a:t>
+            </a:r>
+            <a:r>
+              <a:rPr sz="1600">
+                <a:solidFill>
+                  <a:srgbClr val="BAC2DE"/>
+                </a:solidFill>
+                <a:latin typeface="Consolas"/>
+              </a:rPr>
+              <a:t>,</a:t>
+            </a:r>
+            <a:r>
+              <a:rPr sz="1600">
+                <a:solidFill>
+                  <a:srgbClr val="EEFFFF"/>
+                </a:solidFill>
+                <a:latin typeface="Consolas"/>
+              </a:rPr>
+              <a:t> </a:t>
+            </a:r>
+            <a:r>
+              <a:rPr sz="1600">
+                <a:solidFill>
+                  <a:srgbClr val="C792EA"/>
+                </a:solidFill>
+                <a:latin typeface="Consolas"/>
+              </a:rPr>
+              <a:t>char</a:t>
+            </a:r>
+            <a:r>
+              <a:rPr sz="1600">
+                <a:solidFill>
+                  <a:srgbClr val="BAC2DE"/>
+                </a:solidFill>
+                <a:latin typeface="Consolas"/>
+              </a:rPr>
+              <a:t>::</a:t>
+            </a:r>
+            <a:r>
+              <a:rPr sz="1600">
+                <a:solidFill>
+                  <a:srgbClr val="EEFFFF"/>
+                </a:solidFill>
+                <a:latin typeface="Consolas"/>
+              </a:rPr>
+              <a:t>MAX</a:t>
+            </a:r>
+            <a:r>
+              <a:rPr sz="1600">
+                <a:solidFill>
+                  <a:srgbClr val="BAC2DE"/>
+                </a:solidFill>
+                <a:latin typeface="Consolas"/>
+              </a:rPr>
+              <a:t>)</a:t>
+            </a:r>
+            <a:r>
+              <a:rPr sz="1600">
+                <a:solidFill>
+                  <a:srgbClr val="BAC2DE"/>
+                </a:solidFill>
+                <a:latin typeface="Consolas"/>
+              </a:rPr>
+              <a:t>;</a:t>
+            </a:r>
+          </a:p>
+          <a:p>
+            <a:pPr>
+              <a:lnSpc>
+                <a:spcPct val="95000"/>
+              </a:lnSpc>
+              <a:spcBef>
+                <a:spcPts val="0"/>
+              </a:spcBef>
+              <a:spcAft>
+                <a:spcPts val="0"/>
+              </a:spcAft>
+            </a:pPr>
+            <a:r>
+              <a:rPr sz="1600">
+                <a:solidFill>
+                  <a:srgbClr val="EEFFFF"/>
+                </a:solidFill>
+                <a:latin typeface="Consolas"/>
+              </a:rPr>
+              <a:t>    </a:t>
+            </a:r>
+            <a:r>
+              <a:rPr sz="1600">
+                <a:solidFill>
+                  <a:srgbClr val="82AAFF"/>
+                </a:solidFill>
+                <a:latin typeface="Consolas"/>
+              </a:rPr>
+              <a:t>assert_eq!</a:t>
+            </a:r>
+            <a:r>
+              <a:rPr sz="1600">
+                <a:solidFill>
+                  <a:srgbClr val="BAC2DE"/>
+                </a:solidFill>
+                <a:latin typeface="Consolas"/>
+              </a:rPr>
+              <a:t>(</a:t>
+            </a:r>
+            <a:r>
+              <a:rPr sz="1600">
+                <a:solidFill>
+                  <a:srgbClr val="EEFFFF"/>
+                </a:solidFill>
+                <a:latin typeface="Consolas"/>
+              </a:rPr>
+              <a:t>Ipv4Addr</a:t>
+            </a:r>
+            <a:r>
+              <a:rPr sz="1600">
+                <a:solidFill>
+                  <a:srgbClr val="BAC2DE"/>
+                </a:solidFill>
+                <a:latin typeface="Consolas"/>
+              </a:rPr>
+              <a:t>::</a:t>
+            </a:r>
+            <a:r>
+              <a:rPr sz="1600">
+                <a:solidFill>
+                  <a:srgbClr val="EEFFFF"/>
+                </a:solidFill>
+                <a:latin typeface="Consolas"/>
+              </a:rPr>
+              <a:t>min_value</a:t>
+            </a:r>
+            <a:r>
+              <a:rPr sz="1600">
+                <a:solidFill>
+                  <a:srgbClr val="BAC2DE"/>
+                </a:solidFill>
+                <a:latin typeface="Consolas"/>
+              </a:rPr>
+              <a:t>(</a:t>
+            </a:r>
+            <a:r>
+              <a:rPr sz="1600">
+                <a:solidFill>
+                  <a:srgbClr val="BAC2DE"/>
+                </a:solidFill>
+                <a:latin typeface="Consolas"/>
+              </a:rPr>
+              <a:t>)</a:t>
+            </a:r>
+            <a:r>
+              <a:rPr sz="1600">
+                <a:solidFill>
+                  <a:srgbClr val="BAC2DE"/>
+                </a:solidFill>
+                <a:latin typeface="Consolas"/>
+              </a:rPr>
+              <a:t>,</a:t>
+            </a:r>
+            <a:r>
+              <a:rPr sz="1600">
+                <a:solidFill>
+                  <a:srgbClr val="EEFFFF"/>
+                </a:solidFill>
+                <a:latin typeface="Consolas"/>
+              </a:rPr>
+              <a:t> </a:t>
+            </a:r>
+            <a:r>
+              <a:rPr sz="1600">
+                <a:solidFill>
+                  <a:srgbClr val="EEFFFF"/>
+                </a:solidFill>
+                <a:latin typeface="Consolas"/>
+              </a:rPr>
+              <a:t>Ipv4Addr</a:t>
+            </a:r>
+            <a:r>
+              <a:rPr sz="1600">
+                <a:solidFill>
+                  <a:srgbClr val="BAC2DE"/>
+                </a:solidFill>
+                <a:latin typeface="Consolas"/>
+              </a:rPr>
+              <a:t>::</a:t>
+            </a:r>
+            <a:r>
+              <a:rPr sz="1600">
+                <a:solidFill>
+                  <a:srgbClr val="EEFFFF"/>
+                </a:solidFill>
+                <a:latin typeface="Consolas"/>
+              </a:rPr>
+              <a:t>from</a:t>
+            </a:r>
+            <a:r>
+              <a:rPr sz="1600">
+                <a:solidFill>
+                  <a:srgbClr val="BAC2DE"/>
+                </a:solidFill>
+                <a:latin typeface="Consolas"/>
+              </a:rPr>
+              <a:t>(</a:t>
+            </a:r>
+            <a:r>
+              <a:rPr sz="1600">
+                <a:solidFill>
+                  <a:srgbClr val="F78C6C"/>
+                </a:solidFill>
+                <a:latin typeface="Consolas"/>
+              </a:rPr>
+              <a:t>0</a:t>
+            </a:r>
+            <a:r>
+              <a:rPr sz="1600">
+                <a:solidFill>
+                  <a:srgbClr val="C792EA"/>
+                </a:solidFill>
+                <a:latin typeface="Consolas"/>
+              </a:rPr>
+              <a:t>u32</a:t>
+            </a:r>
+            <a:r>
+              <a:rPr sz="1600">
+                <a:solidFill>
+                  <a:srgbClr val="BAC2DE"/>
+                </a:solidFill>
+                <a:latin typeface="Consolas"/>
+              </a:rPr>
+              <a:t>)</a:t>
+            </a:r>
+            <a:r>
+              <a:rPr sz="1600">
+                <a:solidFill>
+                  <a:srgbClr val="BAC2DE"/>
+                </a:solidFill>
+                <a:latin typeface="Consolas"/>
+              </a:rPr>
+              <a:t>)</a:t>
+            </a:r>
+            <a:r>
+              <a:rPr sz="1600">
+                <a:solidFill>
+                  <a:srgbClr val="BAC2DE"/>
+                </a:solidFill>
+                <a:latin typeface="Consolas"/>
+              </a:rPr>
+              <a:t>;</a:t>
+            </a:r>
+          </a:p>
+          <a:p>
+            <a:pPr>
+              <a:lnSpc>
+                <a:spcPct val="95000"/>
+              </a:lnSpc>
+              <a:spcBef>
+                <a:spcPts val="0"/>
+              </a:spcBef>
+              <a:spcAft>
+                <a:spcPts val="0"/>
+              </a:spcAft>
+            </a:pPr>
+            <a:r>
+              <a:rPr sz="1600">
+                <a:solidFill>
+                  <a:srgbClr val="EEFFFF"/>
+                </a:solidFill>
+                <a:latin typeface="Consolas"/>
+              </a:rPr>
+              <a:t>    </a:t>
+            </a:r>
+            <a:r>
+              <a:rPr sz="1600">
+                <a:solidFill>
+                  <a:srgbClr val="82AAFF"/>
+                </a:solidFill>
+                <a:latin typeface="Consolas"/>
+              </a:rPr>
+              <a:t>assert_eq!</a:t>
+            </a:r>
+            <a:r>
+              <a:rPr sz="1600">
+                <a:solidFill>
+                  <a:srgbClr val="BAC2DE"/>
+                </a:solidFill>
+                <a:latin typeface="Consolas"/>
+              </a:rPr>
+              <a:t>(</a:t>
+            </a:r>
+            <a:r>
+              <a:rPr sz="1600">
+                <a:solidFill>
+                  <a:srgbClr val="EEFFFF"/>
+                </a:solidFill>
+                <a:latin typeface="Consolas"/>
+              </a:rPr>
+              <a:t>Ipv4Addr</a:t>
+            </a:r>
+            <a:r>
+              <a:rPr sz="1600">
+                <a:solidFill>
+                  <a:srgbClr val="BAC2DE"/>
+                </a:solidFill>
+                <a:latin typeface="Consolas"/>
+              </a:rPr>
+              <a:t>::</a:t>
+            </a:r>
+            <a:r>
+              <a:rPr sz="1600">
+                <a:solidFill>
+                  <a:srgbClr val="EEFFFF"/>
+                </a:solidFill>
+                <a:latin typeface="Consolas"/>
+              </a:rPr>
+              <a:t>max_value</a:t>
+            </a:r>
+            <a:r>
+              <a:rPr sz="1600">
+                <a:solidFill>
+                  <a:srgbClr val="BAC2DE"/>
+                </a:solidFill>
+                <a:latin typeface="Consolas"/>
+              </a:rPr>
+              <a:t>(</a:t>
+            </a:r>
+            <a:r>
+              <a:rPr sz="1600">
+                <a:solidFill>
+                  <a:srgbClr val="BAC2DE"/>
+                </a:solidFill>
+                <a:latin typeface="Consolas"/>
+              </a:rPr>
+              <a:t>)</a:t>
+            </a:r>
+            <a:r>
+              <a:rPr sz="1600">
+                <a:solidFill>
+                  <a:srgbClr val="BAC2DE"/>
+                </a:solidFill>
+                <a:latin typeface="Consolas"/>
+              </a:rPr>
+              <a:t>,</a:t>
+            </a:r>
+            <a:r>
+              <a:rPr sz="1600">
+                <a:solidFill>
+                  <a:srgbClr val="EEFFFF"/>
+                </a:solidFill>
+                <a:latin typeface="Consolas"/>
+              </a:rPr>
+              <a:t> </a:t>
+            </a:r>
+            <a:r>
+              <a:rPr sz="1600">
+                <a:solidFill>
+                  <a:srgbClr val="EEFFFF"/>
+                </a:solidFill>
+                <a:latin typeface="Consolas"/>
+              </a:rPr>
+              <a:t>Ipv4Addr</a:t>
+            </a:r>
+            <a:r>
+              <a:rPr sz="1600">
+                <a:solidFill>
+                  <a:srgbClr val="BAC2DE"/>
+                </a:solidFill>
+                <a:latin typeface="Consolas"/>
+              </a:rPr>
+              <a:t>::</a:t>
+            </a:r>
+            <a:r>
+              <a:rPr sz="1600">
+                <a:solidFill>
+                  <a:srgbClr val="EEFFFF"/>
+                </a:solidFill>
+                <a:latin typeface="Consolas"/>
+              </a:rPr>
+              <a:t>from</a:t>
+            </a:r>
+            <a:r>
+              <a:rPr sz="1600">
+                <a:solidFill>
+                  <a:srgbClr val="BAC2DE"/>
+                </a:solidFill>
+                <a:latin typeface="Consolas"/>
+              </a:rPr>
+              <a:t>(</a:t>
+            </a:r>
+            <a:r>
+              <a:rPr sz="1600">
+                <a:solidFill>
+                  <a:srgbClr val="C792EA"/>
+                </a:solidFill>
+                <a:latin typeface="Consolas"/>
+              </a:rPr>
+              <a:t>u32</a:t>
+            </a:r>
+            <a:r>
+              <a:rPr sz="1600">
+                <a:solidFill>
+                  <a:srgbClr val="BAC2DE"/>
+                </a:solidFill>
+                <a:latin typeface="Consolas"/>
+              </a:rPr>
+              <a:t>::</a:t>
+            </a:r>
+            <a:r>
+              <a:rPr sz="1600">
+                <a:solidFill>
+                  <a:srgbClr val="EEFFFF"/>
+                </a:solidFill>
+                <a:latin typeface="Consolas"/>
+              </a:rPr>
+              <a:t>MAX</a:t>
             </a:r>
             <a:r>
               <a:rPr sz="1600">

--- a/docs/example7_walkthrough.pptx
+++ b/docs/example7_walkthrough.pptx
@@ -11,7 +11,7 @@
     <p:sldId id="259" r:id="rId10"/>
     <p:sldId id="260" r:id="rId11"/>
   </p:sldIdLst>
-  <p:sldSz cx="9144000" cy="6858000" type="screen4x3"/>
+  <p:sldSz cx="12192000" cy="6858000" type="screen4x3"/>
   <p:notesSz cx="6858000" cy="9144000"/>
   <p:defaultTextStyle>
     <a:defPPr>
@@ -3101,7 +3101,7 @@
         <p:spPr>
           <a:xfrm>
             <a:off x="0" y="0"/>
-            <a:ext cx="9144000" cy="6858000"/>
+            <a:ext cx="12192000" cy="6858000"/>
           </a:xfrm>
           <a:prstGeom prst="rect">
             <a:avLst/>
@@ -3143,7 +3143,7 @@
         </p:nvSpPr>
         <p:spPr>
           <a:xfrm>
-            <a:off x="7543800" y="0"/>
+            <a:off x="10591800" y="0"/>
             <a:ext cx="1600200" cy="6858000"/>
           </a:xfrm>
           <a:prstGeom prst="rect">
@@ -3188,7 +3188,7 @@
         </p:nvSpPr>
         <p:spPr>
           <a:xfrm rot="16200000">
-            <a:off x="7616952" y="274320"/>
+            <a:off x="10664952" y="274320"/>
             <a:ext cx="1453896" cy="6309360"/>
           </a:xfrm>
           <a:prstGeom prst="rect">
@@ -3225,7 +3225,7 @@
         <p:spPr>
           <a:xfrm>
             <a:off x="731520" y="502920"/>
-            <a:ext cx="6446520" cy="1051560"/>
+            <a:ext cx="9494520" cy="1051560"/>
           </a:xfrm>
           <a:prstGeom prst="rect">
             <a:avLst/>
@@ -3410,8 +3410,8 @@
         </p:blipFill>
         <p:spPr>
           <a:xfrm>
-            <a:off x="274319" y="1691640"/>
-            <a:ext cx="6995160" cy="4559345"/>
+            <a:off x="1578175" y="1691640"/>
+            <a:ext cx="7435449" cy="4846320"/>
           </a:xfrm>
           <a:prstGeom prst="rect">
             <a:avLst/>
@@ -3445,7 +3445,7 @@
         <p:spPr>
           <a:xfrm>
             <a:off x="0" y="0"/>
-            <a:ext cx="9144000" cy="6858000"/>
+            <a:ext cx="12192000" cy="6858000"/>
           </a:xfrm>
           <a:prstGeom prst="rect">
             <a:avLst/>
@@ -3488,7 +3488,7 @@
         <p:spPr>
           <a:xfrm>
             <a:off x="164592" y="109728"/>
-            <a:ext cx="8814816" cy="6638544"/>
+            <a:ext cx="11862816" cy="6638544"/>
           </a:xfrm>
           <a:prstGeom prst="rect">
             <a:avLst/>
@@ -5334,7 +5334,7 @@
         <p:spPr>
           <a:xfrm>
             <a:off x="0" y="0"/>
-            <a:ext cx="9144000" cy="6858000"/>
+            <a:ext cx="12192000" cy="6858000"/>
           </a:xfrm>
           <a:prstGeom prst="rect">
             <a:avLst/>
@@ -5377,7 +5377,7 @@
         <p:spPr>
           <a:xfrm>
             <a:off x="164592" y="109728"/>
-            <a:ext cx="8814816" cy="6638544"/>
+            <a:ext cx="11862816" cy="6638544"/>
           </a:xfrm>
           <a:prstGeom prst="rect">
             <a:avLst/>
@@ -7484,7 +7484,7 @@
         <p:spPr>
           <a:xfrm>
             <a:off x="0" y="0"/>
-            <a:ext cx="9144000" cy="6858000"/>
+            <a:ext cx="12192000" cy="6858000"/>
           </a:xfrm>
           <a:prstGeom prst="rect">
             <a:avLst/>
@@ -7527,7 +7527,7 @@
         <p:spPr>
           <a:xfrm>
             <a:off x="164592" y="109728"/>
-            <a:ext cx="8814816" cy="6638544"/>
+            <a:ext cx="11862816" cy="6638544"/>
           </a:xfrm>
           <a:prstGeom prst="rect">
             <a:avLst/>
@@ -10615,7 +10615,7 @@
         <p:spPr>
           <a:xfrm>
             <a:off x="0" y="0"/>
-            <a:ext cx="9144000" cy="6858000"/>
+            <a:ext cx="12192000" cy="6858000"/>
           </a:xfrm>
           <a:prstGeom prst="rect">
             <a:avLst/>
@@ -10658,7 +10658,7 @@
         <p:spPr>
           <a:xfrm>
             <a:off x="164592" y="109728"/>
-            <a:ext cx="8814816" cy="6638544"/>
+            <a:ext cx="11862816" cy="6638544"/>
           </a:xfrm>
           <a:prstGeom prst="rect">
             <a:avLst/>
